--- a/바이오마커.pptx
+++ b/바이오마커.pptx
@@ -5,7 +5,7 @@
     <p:sldMasterId id="2147483648" r:id="rId1"/>
   </p:sldMasterIdLst>
   <p:notesMasterIdLst>
-    <p:notesMasterId r:id="rId26"/>
+    <p:notesMasterId r:id="rId25"/>
   </p:notesMasterIdLst>
   <p:sldIdLst>
     <p:sldId id="270" r:id="rId2"/>
@@ -23,15 +23,14 @@
     <p:sldId id="263" r:id="rId14"/>
     <p:sldId id="268" r:id="rId15"/>
     <p:sldId id="267" r:id="rId16"/>
-    <p:sldId id="281" r:id="rId17"/>
-    <p:sldId id="272" r:id="rId18"/>
-    <p:sldId id="275" r:id="rId19"/>
-    <p:sldId id="271" r:id="rId20"/>
-    <p:sldId id="279" r:id="rId21"/>
-    <p:sldId id="280" r:id="rId22"/>
-    <p:sldId id="278" r:id="rId23"/>
-    <p:sldId id="277" r:id="rId24"/>
-    <p:sldId id="276" r:id="rId25"/>
+    <p:sldId id="272" r:id="rId17"/>
+    <p:sldId id="275" r:id="rId18"/>
+    <p:sldId id="271" r:id="rId19"/>
+    <p:sldId id="279" r:id="rId20"/>
+    <p:sldId id="280" r:id="rId21"/>
+    <p:sldId id="278" r:id="rId22"/>
+    <p:sldId id="277" r:id="rId23"/>
+    <p:sldId id="276" r:id="rId24"/>
   </p:sldIdLst>
   <p:sldSz cx="12192000" cy="6858000"/>
   <p:notesSz cx="6858000" cy="9144000"/>
@@ -220,7 +219,7 @@
           <a:p>
             <a:fld id="{2BC423B3-EE37-400D-A108-967FFF8D0453}" type="datetimeFigureOut">
               <a:rPr lang="ko-KR" altLang="en-US" smtClean="0"/>
-              <a:t>2026-01-19</a:t>
+              <a:t>2026-01-20</a:t>
             </a:fld>
             <a:endParaRPr lang="ko-KR" altLang="en-US"/>
           </a:p>
@@ -634,7 +633,7 @@
           <a:p>
             <a:fld id="{E667081F-5F1E-4DE8-96D6-E0E3DED8A257}" type="datetimeFigureOut">
               <a:rPr lang="ko-KR" altLang="en-US" smtClean="0"/>
-              <a:t>2026-01-19</a:t>
+              <a:t>2026-01-20</a:t>
             </a:fld>
             <a:endParaRPr lang="ko-KR" altLang="en-US"/>
           </a:p>
@@ -832,7 +831,7 @@
           <a:p>
             <a:fld id="{E667081F-5F1E-4DE8-96D6-E0E3DED8A257}" type="datetimeFigureOut">
               <a:rPr lang="ko-KR" altLang="en-US" smtClean="0"/>
-              <a:t>2026-01-19</a:t>
+              <a:t>2026-01-20</a:t>
             </a:fld>
             <a:endParaRPr lang="ko-KR" altLang="en-US"/>
           </a:p>
@@ -1040,7 +1039,7 @@
           <a:p>
             <a:fld id="{E667081F-5F1E-4DE8-96D6-E0E3DED8A257}" type="datetimeFigureOut">
               <a:rPr lang="ko-KR" altLang="en-US" smtClean="0"/>
-              <a:t>2026-01-19</a:t>
+              <a:t>2026-01-20</a:t>
             </a:fld>
             <a:endParaRPr lang="ko-KR" altLang="en-US"/>
           </a:p>
@@ -1238,7 +1237,7 @@
           <a:p>
             <a:fld id="{E667081F-5F1E-4DE8-96D6-E0E3DED8A257}" type="datetimeFigureOut">
               <a:rPr lang="ko-KR" altLang="en-US" smtClean="0"/>
-              <a:t>2026-01-19</a:t>
+              <a:t>2026-01-20</a:t>
             </a:fld>
             <a:endParaRPr lang="ko-KR" altLang="en-US"/>
           </a:p>
@@ -1513,7 +1512,7 @@
           <a:p>
             <a:fld id="{E667081F-5F1E-4DE8-96D6-E0E3DED8A257}" type="datetimeFigureOut">
               <a:rPr lang="ko-KR" altLang="en-US" smtClean="0"/>
-              <a:t>2026-01-19</a:t>
+              <a:t>2026-01-20</a:t>
             </a:fld>
             <a:endParaRPr lang="ko-KR" altLang="en-US"/>
           </a:p>
@@ -1778,7 +1777,7 @@
           <a:p>
             <a:fld id="{E667081F-5F1E-4DE8-96D6-E0E3DED8A257}" type="datetimeFigureOut">
               <a:rPr lang="ko-KR" altLang="en-US" smtClean="0"/>
-              <a:t>2026-01-19</a:t>
+              <a:t>2026-01-20</a:t>
             </a:fld>
             <a:endParaRPr lang="ko-KR" altLang="en-US"/>
           </a:p>
@@ -2190,7 +2189,7 @@
           <a:p>
             <a:fld id="{E667081F-5F1E-4DE8-96D6-E0E3DED8A257}" type="datetimeFigureOut">
               <a:rPr lang="ko-KR" altLang="en-US" smtClean="0"/>
-              <a:t>2026-01-19</a:t>
+              <a:t>2026-01-20</a:t>
             </a:fld>
             <a:endParaRPr lang="ko-KR" altLang="en-US"/>
           </a:p>
@@ -2331,7 +2330,7 @@
           <a:p>
             <a:fld id="{E667081F-5F1E-4DE8-96D6-E0E3DED8A257}" type="datetimeFigureOut">
               <a:rPr lang="ko-KR" altLang="en-US" smtClean="0"/>
-              <a:t>2026-01-19</a:t>
+              <a:t>2026-01-20</a:t>
             </a:fld>
             <a:endParaRPr lang="ko-KR" altLang="en-US"/>
           </a:p>
@@ -2444,7 +2443,7 @@
           <a:p>
             <a:fld id="{E667081F-5F1E-4DE8-96D6-E0E3DED8A257}" type="datetimeFigureOut">
               <a:rPr lang="ko-KR" altLang="en-US" smtClean="0"/>
-              <a:t>2026-01-19</a:t>
+              <a:t>2026-01-20</a:t>
             </a:fld>
             <a:endParaRPr lang="ko-KR" altLang="en-US"/>
           </a:p>
@@ -2755,7 +2754,7 @@
           <a:p>
             <a:fld id="{E667081F-5F1E-4DE8-96D6-E0E3DED8A257}" type="datetimeFigureOut">
               <a:rPr lang="ko-KR" altLang="en-US" smtClean="0"/>
-              <a:t>2026-01-19</a:t>
+              <a:t>2026-01-20</a:t>
             </a:fld>
             <a:endParaRPr lang="ko-KR" altLang="en-US"/>
           </a:p>
@@ -3043,7 +3042,7 @@
           <a:p>
             <a:fld id="{E667081F-5F1E-4DE8-96D6-E0E3DED8A257}" type="datetimeFigureOut">
               <a:rPr lang="ko-KR" altLang="en-US" smtClean="0"/>
-              <a:t>2026-01-19</a:t>
+              <a:t>2026-01-20</a:t>
             </a:fld>
             <a:endParaRPr lang="ko-KR" altLang="en-US"/>
           </a:p>
@@ -3284,7 +3283,7 @@
           <a:p>
             <a:fld id="{E667081F-5F1E-4DE8-96D6-E0E3DED8A257}" type="datetimeFigureOut">
               <a:rPr lang="ko-KR" altLang="en-US" smtClean="0"/>
-              <a:t>2026-01-19</a:t>
+              <a:t>2026-01-20</a:t>
             </a:fld>
             <a:endParaRPr lang="ko-KR" altLang="en-US"/>
           </a:p>
@@ -6224,203 +6223,6 @@
           </a:p>
         </p:txBody>
       </p:sp>
-      <p:sp>
-        <p:nvSpPr>
-          <p:cNvPr id="4" name="TextBox 3">
-            <a:extLst>
-              <a:ext uri="{FF2B5EF4-FFF2-40B4-BE49-F238E27FC236}">
-                <a16:creationId xmlns:a16="http://schemas.microsoft.com/office/drawing/2014/main" id="{99544C35-15E3-427C-AC04-9AD77DDCEB02}"/>
-              </a:ext>
-            </a:extLst>
-          </p:cNvPr>
-          <p:cNvSpPr txBox="1"/>
-          <p:nvPr/>
-        </p:nvSpPr>
-        <p:spPr>
-          <a:xfrm>
-            <a:off x="1143730" y="4768568"/>
-            <a:ext cx="10210069" cy="1477328"/>
-          </a:xfrm>
-          <a:prstGeom prst="rect">
-            <a:avLst/>
-          </a:prstGeom>
-          <a:noFill/>
-        </p:spPr>
-        <p:txBody>
-          <a:bodyPr wrap="square" rtlCol="0">
-            <a:spAutoFit/>
-          </a:bodyPr>
-          <a:lstStyle/>
-          <a:p>
-            <a:r>
-              <a:rPr lang="ko-KR" altLang="en-US" dirty="0">
-                <a:latin typeface="프리젠테이션 4 Regular" pitchFamily="2" charset="-127"/>
-                <a:ea typeface="프리젠테이션 4 Regular" pitchFamily="2" charset="-127"/>
-              </a:rPr>
-              <a:t>궁금한점</a:t>
-            </a:r>
-            <a:r>
-              <a:rPr lang="en-US" altLang="ko-KR" dirty="0">
-                <a:latin typeface="프리젠테이션 4 Regular" pitchFamily="2" charset="-127"/>
-                <a:ea typeface="프리젠테이션 4 Regular" pitchFamily="2" charset="-127"/>
-              </a:rPr>
-              <a:t>:</a:t>
-            </a:r>
-          </a:p>
-          <a:p>
-            <a:endParaRPr lang="en-US" altLang="ko-KR" dirty="0">
-              <a:latin typeface="프리젠테이션 4 Regular" pitchFamily="2" charset="-127"/>
-              <a:ea typeface="프리젠테이션 4 Regular" pitchFamily="2" charset="-127"/>
-            </a:endParaRPr>
-          </a:p>
-          <a:p>
-            <a:r>
-              <a:rPr lang="ko-KR" altLang="en-US" dirty="0">
-                <a:latin typeface="프리젠테이션 4 Regular" pitchFamily="2" charset="-127"/>
-                <a:ea typeface="프리젠테이션 4 Regular" pitchFamily="2" charset="-127"/>
-              </a:rPr>
-              <a:t>성별을 통제변수에 넣을지 말지</a:t>
-            </a:r>
-            <a:r>
-              <a:rPr lang="en-US" altLang="ko-KR" dirty="0">
-                <a:latin typeface="프리젠테이션 4 Regular" pitchFamily="2" charset="-127"/>
-                <a:ea typeface="프리젠테이션 4 Regular" pitchFamily="2" charset="-127"/>
-              </a:rPr>
-              <a:t>..? </a:t>
-            </a:r>
-          </a:p>
-          <a:p>
-            <a:r>
-              <a:rPr lang="ko-KR" altLang="en-US" dirty="0">
-                <a:latin typeface="프리젠테이션 4 Regular" pitchFamily="2" charset="-127"/>
-                <a:ea typeface="프리젠테이션 4 Regular" pitchFamily="2" charset="-127"/>
-              </a:rPr>
-              <a:t>나이 관련 분석을 진행할 때는 간</a:t>
-            </a:r>
-            <a:r>
-              <a:rPr lang="en-US" altLang="ko-KR" dirty="0">
-                <a:latin typeface="프리젠테이션 4 Regular" pitchFamily="2" charset="-127"/>
-                <a:ea typeface="프리젠테이션 4 Regular" pitchFamily="2" charset="-127"/>
-              </a:rPr>
-              <a:t>, </a:t>
-            </a:r>
-            <a:r>
-              <a:rPr lang="ko-KR" altLang="en-US" dirty="0">
-                <a:latin typeface="프리젠테이션 4 Regular" pitchFamily="2" charset="-127"/>
-                <a:ea typeface="프리젠테이션 4 Regular" pitchFamily="2" charset="-127"/>
-              </a:rPr>
-              <a:t>신장</a:t>
-            </a:r>
-            <a:r>
-              <a:rPr lang="en-US" altLang="ko-KR" dirty="0">
-                <a:latin typeface="프리젠테이션 4 Regular" pitchFamily="2" charset="-127"/>
-                <a:ea typeface="프리젠테이션 4 Regular" pitchFamily="2" charset="-127"/>
-              </a:rPr>
-              <a:t> ,</a:t>
-            </a:r>
-            <a:r>
-              <a:rPr lang="ko-KR" altLang="en-US" dirty="0">
-                <a:latin typeface="프리젠테이션 4 Regular" pitchFamily="2" charset="-127"/>
-                <a:ea typeface="프리젠테이션 4 Regular" pitchFamily="2" charset="-127"/>
-              </a:rPr>
-              <a:t> 대사 지표는 제외하고 분석을 진행해도 되는지</a:t>
-            </a:r>
-            <a:r>
-              <a:rPr lang="en-US" altLang="ko-KR" dirty="0">
-                <a:latin typeface="프리젠테이션 4 Regular" pitchFamily="2" charset="-127"/>
-                <a:ea typeface="프리젠테이션 4 Regular" pitchFamily="2" charset="-127"/>
-              </a:rPr>
-              <a:t>?</a:t>
-            </a:r>
-          </a:p>
-          <a:p>
-            <a:r>
-              <a:rPr lang="en-US" altLang="ko-KR" dirty="0">
-                <a:latin typeface="프리젠테이션 4 Regular" pitchFamily="2" charset="-127"/>
-                <a:ea typeface="프리젠테이션 4 Regular" pitchFamily="2" charset="-127"/>
-              </a:rPr>
-              <a:t>T</a:t>
-            </a:r>
-            <a:r>
-              <a:rPr lang="ko-KR" altLang="en-US" dirty="0">
-                <a:latin typeface="프리젠테이션 4 Regular" pitchFamily="2" charset="-127"/>
-                <a:ea typeface="프리젠테이션 4 Regular" pitchFamily="2" charset="-127"/>
-              </a:rPr>
-              <a:t>세포 소분류의 면역세포 데이터에는 </a:t>
-            </a:r>
-            <a:r>
-              <a:rPr lang="ko-KR" altLang="en-US" dirty="0" err="1">
-                <a:latin typeface="프리젠테이션 4 Regular" pitchFamily="2" charset="-127"/>
-                <a:ea typeface="프리젠테이션 4 Regular" pitchFamily="2" charset="-127"/>
-              </a:rPr>
-              <a:t>결측치가</a:t>
-            </a:r>
-            <a:r>
-              <a:rPr lang="ko-KR" altLang="en-US" dirty="0">
-                <a:latin typeface="프리젠테이션 4 Regular" pitchFamily="2" charset="-127"/>
-                <a:ea typeface="프리젠테이션 4 Regular" pitchFamily="2" charset="-127"/>
-              </a:rPr>
-              <a:t> </a:t>
-            </a:r>
-            <a:r>
-              <a:rPr lang="en-US" altLang="ko-KR" dirty="0">
-                <a:latin typeface="프리젠테이션 4 Regular" pitchFamily="2" charset="-127"/>
-                <a:ea typeface="프리젠테이션 4 Regular" pitchFamily="2" charset="-127"/>
-              </a:rPr>
-              <a:t>8</a:t>
-            </a:r>
-            <a:r>
-              <a:rPr lang="ko-KR" altLang="en-US" dirty="0">
-                <a:latin typeface="프리젠테이션 4 Regular" pitchFamily="2" charset="-127"/>
-                <a:ea typeface="프리젠테이션 4 Regular" pitchFamily="2" charset="-127"/>
-              </a:rPr>
-              <a:t>개정도 보이는데</a:t>
-            </a:r>
-            <a:r>
-              <a:rPr lang="en-US" altLang="ko-KR" dirty="0">
-                <a:latin typeface="프리젠테이션 4 Regular" pitchFamily="2" charset="-127"/>
-                <a:ea typeface="프리젠테이션 4 Regular" pitchFamily="2" charset="-127"/>
-              </a:rPr>
-              <a:t>, </a:t>
-            </a:r>
-            <a:r>
-              <a:rPr lang="ko-KR" altLang="en-US" dirty="0">
-                <a:latin typeface="프리젠테이션 4 Regular" pitchFamily="2" charset="-127"/>
-                <a:ea typeface="프리젠테이션 4 Regular" pitchFamily="2" charset="-127"/>
-              </a:rPr>
-              <a:t>어떻게 해결</a:t>
-            </a:r>
-            <a:r>
-              <a:rPr lang="en-US" altLang="ko-KR" dirty="0">
-                <a:latin typeface="프리젠테이션 4 Regular" pitchFamily="2" charset="-127"/>
-                <a:ea typeface="프리젠테이션 4 Regular" pitchFamily="2" charset="-127"/>
-              </a:rPr>
-              <a:t>? – </a:t>
-            </a:r>
-            <a:r>
-              <a:rPr lang="ko-KR" altLang="en-US" dirty="0">
-                <a:latin typeface="프리젠테이션 4 Regular" pitchFamily="2" charset="-127"/>
-                <a:ea typeface="프리젠테이션 4 Regular" pitchFamily="2" charset="-127"/>
-              </a:rPr>
-              <a:t>다중대치</a:t>
-            </a:r>
-            <a:r>
-              <a:rPr lang="en-US" altLang="ko-KR" dirty="0">
-                <a:latin typeface="프리젠테이션 4 Regular" pitchFamily="2" charset="-127"/>
-                <a:ea typeface="프리젠테이션 4 Regular" pitchFamily="2" charset="-127"/>
-              </a:rPr>
-              <a:t>(MICE)or </a:t>
-            </a:r>
-            <a:r>
-              <a:rPr lang="ko-KR" altLang="en-US" dirty="0">
-                <a:latin typeface="프리젠테이션 4 Regular" pitchFamily="2" charset="-127"/>
-                <a:ea typeface="프리젠테이션 4 Regular" pitchFamily="2" charset="-127"/>
-              </a:rPr>
-              <a:t>삭제</a:t>
-            </a:r>
-          </a:p>
-        </p:txBody>
-      </p:sp>
     </p:spTree>
     <p:extLst>
       <p:ext uri="{BB962C8B-B14F-4D97-AF65-F5344CB8AC3E}">
@@ -6897,93 +6699,6 @@
               <a:latin typeface="프리젠테이션 4 Regular" pitchFamily="2" charset="-127"/>
               <a:ea typeface="프리젠테이션 4 Regular" pitchFamily="2" charset="-127"/>
             </a:endParaRPr>
-          </a:p>
-        </p:txBody>
-      </p:sp>
-      <p:sp>
-        <p:nvSpPr>
-          <p:cNvPr id="5" name="TextBox 4">
-            <a:extLst>
-              <a:ext uri="{FF2B5EF4-FFF2-40B4-BE49-F238E27FC236}">
-                <a16:creationId xmlns:a16="http://schemas.microsoft.com/office/drawing/2014/main" id="{6B395A7D-AE4B-493C-8D49-5E87DB8DE175}"/>
-              </a:ext>
-            </a:extLst>
-          </p:cNvPr>
-          <p:cNvSpPr txBox="1"/>
-          <p:nvPr/>
-        </p:nvSpPr>
-        <p:spPr>
-          <a:xfrm>
-            <a:off x="791512" y="5773580"/>
-            <a:ext cx="9904538" cy="369332"/>
-          </a:xfrm>
-          <a:prstGeom prst="rect">
-            <a:avLst/>
-          </a:prstGeom>
-          <a:noFill/>
-        </p:spPr>
-        <p:txBody>
-          <a:bodyPr wrap="square" rtlCol="0">
-            <a:spAutoFit/>
-          </a:bodyPr>
-          <a:lstStyle/>
-          <a:p>
-            <a:r>
-              <a:rPr lang="ko-KR" altLang="en-US" dirty="0">
-                <a:latin typeface="프리젠테이션 4 Regular" pitchFamily="2" charset="-127"/>
-                <a:ea typeface="프리젠테이션 4 Regular" pitchFamily="2" charset="-127"/>
-              </a:rPr>
-              <a:t>궁금한점</a:t>
-            </a:r>
-            <a:r>
-              <a:rPr lang="en-US" altLang="ko-KR" dirty="0">
-                <a:latin typeface="프리젠테이션 4 Regular" pitchFamily="2" charset="-127"/>
-                <a:ea typeface="프리젠테이션 4 Regular" pitchFamily="2" charset="-127"/>
-              </a:rPr>
-              <a:t>:</a:t>
-            </a:r>
-            <a:r>
-              <a:rPr lang="ko-KR" altLang="en-US" dirty="0">
-                <a:latin typeface="프리젠테이션 4 Regular" pitchFamily="2" charset="-127"/>
-                <a:ea typeface="프리젠테이션 4 Regular" pitchFamily="2" charset="-127"/>
-              </a:rPr>
-              <a:t> 절반씩 비어 있는 간</a:t>
-            </a:r>
-            <a:r>
-              <a:rPr lang="en-US" altLang="ko-KR" dirty="0">
-                <a:latin typeface="프리젠테이션 4 Regular" pitchFamily="2" charset="-127"/>
-                <a:ea typeface="프리젠테이션 4 Regular" pitchFamily="2" charset="-127"/>
-              </a:rPr>
-              <a:t>, </a:t>
-            </a:r>
-            <a:r>
-              <a:rPr lang="ko-KR" altLang="en-US" dirty="0">
-                <a:latin typeface="프리젠테이션 4 Regular" pitchFamily="2" charset="-127"/>
-                <a:ea typeface="프리젠테이션 4 Regular" pitchFamily="2" charset="-127"/>
-              </a:rPr>
-              <a:t>신장 등의 지표에 대해서는 그냥 </a:t>
-            </a:r>
-            <a:r>
-              <a:rPr lang="en-US" altLang="ko-KR" dirty="0">
-                <a:latin typeface="프리젠테이션 4 Regular" pitchFamily="2" charset="-127"/>
-                <a:ea typeface="프리젠테이션 4 Regular" pitchFamily="2" charset="-127"/>
-              </a:rPr>
-              <a:t>22</a:t>
-            </a:r>
-            <a:r>
-              <a:rPr lang="ko-KR" altLang="en-US" dirty="0">
-                <a:latin typeface="프리젠테이션 4 Regular" pitchFamily="2" charset="-127"/>
-                <a:ea typeface="프리젠테이션 4 Regular" pitchFamily="2" charset="-127"/>
-              </a:rPr>
-              <a:t>명씩 따로 분석을 진행하면 되는지</a:t>
-            </a:r>
-            <a:r>
-              <a:rPr lang="en-US" altLang="ko-KR" dirty="0">
-                <a:latin typeface="프리젠테이션 4 Regular" pitchFamily="2" charset="-127"/>
-                <a:ea typeface="프리젠테이션 4 Regular" pitchFamily="2" charset="-127"/>
-              </a:rPr>
-              <a:t>?</a:t>
-            </a:r>
           </a:p>
         </p:txBody>
       </p:sp>
@@ -7244,30 +6959,6 @@
               <a:buNone/>
             </a:pPr>
             <a:r>
-              <a:rPr lang="en-US" altLang="ko-KR" sz="2000" dirty="0">
-                <a:highlight>
-                  <a:srgbClr val="FFFF00"/>
-                </a:highlight>
-                <a:latin typeface="프리젠테이션 4 Regular" pitchFamily="2" charset="-127"/>
-                <a:ea typeface="프리젠테이션 4 Regular" pitchFamily="2" charset="-127"/>
-              </a:rPr>
-              <a:t>BMI</a:t>
-            </a:r>
-            <a:r>
-              <a:rPr lang="ko-KR" altLang="en-US" sz="2000" dirty="0">
-                <a:latin typeface="프리젠테이션 4 Regular" pitchFamily="2" charset="-127"/>
-                <a:ea typeface="프리젠테이션 4 Regular" pitchFamily="2" charset="-127"/>
-              </a:rPr>
-              <a:t>를 통제변수로 둔 후</a:t>
-            </a:r>
-            <a:r>
-              <a:rPr lang="en-US" altLang="ko-KR" sz="2000" dirty="0">
-                <a:latin typeface="프리젠테이션 4 Regular" pitchFamily="2" charset="-127"/>
-                <a:ea typeface="프리젠테이션 4 Regular" pitchFamily="2" charset="-127"/>
-              </a:rPr>
-              <a:t>,  </a:t>
-            </a:r>
-            <a:r>
               <a:rPr lang="ko-KR" altLang="en-US" sz="2000" dirty="0">
                 <a:latin typeface="프리젠테이션 4 Regular" pitchFamily="2" charset="-127"/>
                 <a:ea typeface="프리젠테이션 4 Regular" pitchFamily="2" charset="-127"/>
@@ -7389,14 +7080,14 @@
           <p:nvPr>
             <p:extLst>
               <p:ext uri="{D42A27DB-BD31-4B8C-83A1-F6EECF244321}">
-                <p14:modId xmlns:p14="http://schemas.microsoft.com/office/powerpoint/2010/main" val="1110711078"/>
+                <p14:modId xmlns:p14="http://schemas.microsoft.com/office/powerpoint/2010/main" val="1110071239"/>
               </p:ext>
             </p:extLst>
           </p:nvPr>
         </p:nvGraphicFramePr>
         <p:xfrm>
-          <a:off x="1506000" y="2346674"/>
-          <a:ext cx="9180000" cy="3810000"/>
+          <a:off x="1434164" y="2156801"/>
+          <a:ext cx="8851356" cy="4224744"/>
         </p:xfrm>
         <a:graphic>
           <a:graphicData uri="http://schemas.openxmlformats.org/drawingml/2006/table">
@@ -7405,42 +7096,42 @@
                 <a:tableStyleId>{F2DE63D5-997A-4646-A377-4702673A728D}</a:tableStyleId>
               </a:tblPr>
               <a:tblGrid>
-                <a:gridCol w="1530000">
+                <a:gridCol w="1475226">
                   <a:extLst>
                     <a:ext uri="{9D8B030D-6E8A-4147-A177-3AD203B41FA5}">
                       <a16:colId xmlns:a16="http://schemas.microsoft.com/office/drawing/2014/main" val="3817914715"/>
                     </a:ext>
                   </a:extLst>
                 </a:gridCol>
-                <a:gridCol w="1530000">
+                <a:gridCol w="1475226">
                   <a:extLst>
                     <a:ext uri="{9D8B030D-6E8A-4147-A177-3AD203B41FA5}">
                       <a16:colId xmlns:a16="http://schemas.microsoft.com/office/drawing/2014/main" val="403642707"/>
                     </a:ext>
                   </a:extLst>
                 </a:gridCol>
-                <a:gridCol w="1530000">
+                <a:gridCol w="1475226">
                   <a:extLst>
                     <a:ext uri="{9D8B030D-6E8A-4147-A177-3AD203B41FA5}">
                       <a16:colId xmlns:a16="http://schemas.microsoft.com/office/drawing/2014/main" val="2892634231"/>
                     </a:ext>
                   </a:extLst>
                 </a:gridCol>
-                <a:gridCol w="1530000">
+                <a:gridCol w="1475226">
                   <a:extLst>
                     <a:ext uri="{9D8B030D-6E8A-4147-A177-3AD203B41FA5}">
                       <a16:colId xmlns:a16="http://schemas.microsoft.com/office/drawing/2014/main" val="2291883617"/>
                     </a:ext>
                   </a:extLst>
                 </a:gridCol>
-                <a:gridCol w="1530000">
+                <a:gridCol w="1475226">
                   <a:extLst>
                     <a:ext uri="{9D8B030D-6E8A-4147-A177-3AD203B41FA5}">
                       <a16:colId xmlns:a16="http://schemas.microsoft.com/office/drawing/2014/main" val="3169242423"/>
                     </a:ext>
                   </a:extLst>
                 </a:gridCol>
-                <a:gridCol w="1530000">
+                <a:gridCol w="1475226">
                   <a:extLst>
                     <a:ext uri="{9D8B030D-6E8A-4147-A177-3AD203B41FA5}">
                       <a16:colId xmlns:a16="http://schemas.microsoft.com/office/drawing/2014/main" val="4222895381"/>
@@ -7448,7 +7139,7 @@
                   </a:extLst>
                 </a:gridCol>
               </a:tblGrid>
-              <a:tr h="267728">
+              <a:tr h="497433">
                 <a:tc>
                   <a:txBody>
                     <a:bodyPr/>
@@ -7456,10 +7147,10 @@
                     <a:p>
                       <a:pPr algn="ctr" latinLnBrk="1"/>
                       <a:r>
-                        <a:rPr lang="en-US" altLang="ko-KR" sz="1600" dirty="0"/>
+                        <a:rPr lang="en-US" altLang="ko-KR" sz="1100" dirty="0"/>
                         <a:t>PAN%</a:t>
                       </a:r>
-                      <a:endParaRPr lang="ko-KR" altLang="en-US" sz="1600" dirty="0">
+                      <a:endParaRPr lang="ko-KR" altLang="en-US" sz="1100" dirty="0">
                         <a:latin typeface="프리젠테이션 4 Regular" pitchFamily="2" charset="-127"/>
                         <a:ea typeface="프리젠테이션 4 Regular" pitchFamily="2" charset="-127"/>
                       </a:endParaRPr>
@@ -7474,13 +7165,13 @@
                     <a:p>
                       <a:pPr algn="ctr" latinLnBrk="1"/>
                       <a:r>
-                        <a:rPr lang="en-US" altLang="ko-KR" sz="1600" dirty="0" err="1">
+                        <a:rPr lang="en-US" altLang="ko-KR" sz="1100" dirty="0" err="1">
                           <a:latin typeface="프리젠테이션 4 Regular" pitchFamily="2" charset="-127"/>
                           <a:ea typeface="프리젠테이션 4 Regular" pitchFamily="2" charset="-127"/>
                         </a:rPr>
                         <a:t>covar</a:t>
                       </a:r>
-                      <a:endParaRPr lang="ko-KR" altLang="en-US" sz="1600" dirty="0">
+                      <a:endParaRPr lang="ko-KR" altLang="en-US" sz="1100" dirty="0">
                         <a:latin typeface="프리젠테이션 4 Regular" pitchFamily="2" charset="-127"/>
                         <a:ea typeface="프리젠테이션 4 Regular" pitchFamily="2" charset="-127"/>
                       </a:endParaRPr>
@@ -7495,10 +7186,10 @@
                     <a:p>
                       <a:pPr algn="ctr" latinLnBrk="1"/>
                       <a:r>
-                        <a:rPr lang="en-US" altLang="ko-KR" sz="1600" dirty="0"/>
+                        <a:rPr lang="en-US" altLang="ko-KR" sz="1100" dirty="0"/>
                         <a:t>Correlation </a:t>
                       </a:r>
-                      <a:endParaRPr lang="ko-KR" altLang="en-US" sz="1600" dirty="0">
+                      <a:endParaRPr lang="ko-KR" altLang="en-US" sz="1100" dirty="0">
                         <a:latin typeface="프리젠테이션 4 Regular" pitchFamily="2" charset="-127"/>
                         <a:ea typeface="프리젠테이션 4 Regular" pitchFamily="2" charset="-127"/>
                       </a:endParaRPr>
@@ -7513,10 +7204,10 @@
                     <a:p>
                       <a:pPr algn="ctr" latinLnBrk="1"/>
                       <a:r>
-                        <a:rPr lang="en-US" altLang="ko-KR" sz="1600" dirty="0"/>
+                        <a:rPr lang="en-US" altLang="ko-KR" sz="1100" dirty="0"/>
                         <a:t>r</a:t>
                       </a:r>
-                      <a:endParaRPr lang="ko-KR" altLang="en-US" sz="1600" dirty="0">
+                      <a:endParaRPr lang="ko-KR" altLang="en-US" sz="1100" dirty="0">
                         <a:latin typeface="프리젠테이션 4 Regular" pitchFamily="2" charset="-127"/>
                         <a:ea typeface="프리젠테이션 4 Regular" pitchFamily="2" charset="-127"/>
                       </a:endParaRPr>
@@ -7531,10 +7222,10 @@
                     <a:p>
                       <a:pPr algn="ctr" latinLnBrk="1"/>
                       <a:r>
-                        <a:rPr lang="en-US" altLang="ko-KR" sz="1600" dirty="0"/>
+                        <a:rPr lang="en-US" altLang="ko-KR" sz="1100" dirty="0"/>
                         <a:t>CI95%</a:t>
                       </a:r>
-                      <a:endParaRPr lang="ko-KR" altLang="en-US" sz="1600" dirty="0">
+                      <a:endParaRPr lang="ko-KR" altLang="en-US" sz="1100" dirty="0">
                         <a:latin typeface="프리젠테이션 4 Regular" pitchFamily="2" charset="-127"/>
                         <a:ea typeface="프리젠테이션 4 Regular" pitchFamily="2" charset="-127"/>
                       </a:endParaRPr>
@@ -7549,14 +7240,14 @@
                     <a:p>
                       <a:pPr algn="ctr" latinLnBrk="1"/>
                       <a:r>
-                        <a:rPr lang="en-US" altLang="ko-KR" sz="1600" dirty="0"/>
+                        <a:rPr lang="en-US" altLang="ko-KR" sz="1100" dirty="0"/>
                         <a:t> p-</a:t>
                       </a:r>
                       <a:r>
-                        <a:rPr lang="en-US" altLang="ko-KR" sz="1600" dirty="0" err="1"/>
+                        <a:rPr lang="en-US" altLang="ko-KR" sz="1100" dirty="0" err="1"/>
                         <a:t>val</a:t>
                       </a:r>
-                      <a:endParaRPr lang="ko-KR" altLang="en-US" sz="1600" dirty="0">
+                      <a:endParaRPr lang="ko-KR" altLang="en-US" sz="1100" dirty="0">
                         <a:latin typeface="프리젠테이션 4 Regular" pitchFamily="2" charset="-127"/>
                         <a:ea typeface="프리젠테이션 4 Regular" pitchFamily="2" charset="-127"/>
                       </a:endParaRPr>
@@ -7570,7 +7261,7 @@
                   </a:ext>
                 </a:extLst>
               </a:tr>
-              <a:tr h="579120">
+              <a:tr h="274381">
                 <a:tc>
                   <a:txBody>
                     <a:bodyPr/>
@@ -7578,10 +7269,10 @@
                     <a:p>
                       <a:pPr algn="ctr" latinLnBrk="1"/>
                       <a:r>
-                        <a:rPr lang="en-US" altLang="ko-KR" sz="1600" dirty="0"/>
+                        <a:rPr lang="en-US" altLang="ko-KR" sz="1100" dirty="0"/>
                         <a:t>B</a:t>
                       </a:r>
-                      <a:endParaRPr lang="ko-KR" altLang="en-US" sz="1600" dirty="0">
+                      <a:endParaRPr lang="ko-KR" altLang="en-US" sz="1100" dirty="0">
                         <a:latin typeface="프리젠테이션 4 Regular" pitchFamily="2" charset="-127"/>
                         <a:ea typeface="프리젠테이션 4 Regular" pitchFamily="2" charset="-127"/>
                       </a:endParaRPr>
@@ -7596,13 +7287,13 @@
                     <a:p>
                       <a:pPr algn="ctr" latinLnBrk="1"/>
                       <a:r>
-                        <a:rPr lang="en-US" altLang="ko-KR" sz="1600" dirty="0">
+                        <a:rPr lang="en-US" altLang="ko-KR" sz="1100" dirty="0">
                           <a:latin typeface="프리젠테이션 4 Regular" pitchFamily="2" charset="-127"/>
                           <a:ea typeface="프리젠테이션 4 Regular" pitchFamily="2" charset="-127"/>
                         </a:rPr>
                         <a:t>BMI</a:t>
                       </a:r>
-                      <a:endParaRPr lang="ko-KR" altLang="en-US" sz="1600" dirty="0">
+                      <a:endParaRPr lang="ko-KR" altLang="en-US" sz="1100" dirty="0">
                         <a:latin typeface="프리젠테이션 4 Regular" pitchFamily="2" charset="-127"/>
                         <a:ea typeface="프리젠테이션 4 Regular" pitchFamily="2" charset="-127"/>
                       </a:endParaRPr>
@@ -7617,10 +7308,10 @@
                     <a:p>
                       <a:pPr algn="ctr" latinLnBrk="1"/>
                       <a:r>
-                        <a:rPr lang="en-US" altLang="ko-KR" sz="1600" dirty="0" err="1"/>
+                        <a:rPr lang="en-US" altLang="ko-KR" sz="1100" dirty="0" err="1"/>
                         <a:t>pearson</a:t>
                       </a:r>
-                      <a:endParaRPr lang="ko-KR" altLang="en-US" sz="1600" dirty="0">
+                      <a:endParaRPr lang="ko-KR" altLang="en-US" sz="1100" dirty="0">
                         <a:latin typeface="프리젠테이션 4 Regular" pitchFamily="2" charset="-127"/>
                         <a:ea typeface="프리젠테이션 4 Regular" pitchFamily="2" charset="-127"/>
                       </a:endParaRPr>
@@ -7635,12 +7326,12 @@
                     <a:p>
                       <a:pPr algn="ctr" latinLnBrk="1"/>
                       <a:r>
-                        <a:rPr lang="en-US" altLang="ko-KR" sz="1600" kern="1200" dirty="0">
+                        <a:rPr lang="en-US" altLang="ko-KR" sz="1100" kern="1200" dirty="0">
                           <a:effectLst/>
                         </a:rPr>
                         <a:t>0.132268</a:t>
                       </a:r>
-                      <a:endParaRPr lang="ko-KR" altLang="en-US" sz="1600" dirty="0">
+                      <a:endParaRPr lang="ko-KR" altLang="en-US" sz="1100" dirty="0">
                         <a:latin typeface="프리젠테이션 4 Regular" pitchFamily="2" charset="-127"/>
                         <a:ea typeface="프리젠테이션 4 Regular" pitchFamily="2" charset="-127"/>
                       </a:endParaRPr>
@@ -7655,12 +7346,12 @@
                     <a:p>
                       <a:pPr algn="ctr" latinLnBrk="1"/>
                       <a:r>
-                        <a:rPr lang="en-US" altLang="ko-KR" sz="1600" kern="1200" dirty="0">
+                        <a:rPr lang="en-US" altLang="ko-KR" sz="1100" kern="1200" dirty="0">
                           <a:effectLst/>
                         </a:rPr>
                         <a:t>[-0.18, 0.42]</a:t>
                       </a:r>
-                      <a:endParaRPr lang="ko-KR" altLang="en-US" sz="1600" dirty="0">
+                      <a:endParaRPr lang="ko-KR" altLang="en-US" sz="1100" dirty="0">
                         <a:latin typeface="프리젠테이션 4 Regular" pitchFamily="2" charset="-127"/>
                         <a:ea typeface="프리젠테이션 4 Regular" pitchFamily="2" charset="-127"/>
                       </a:endParaRPr>
@@ -7675,12 +7366,12 @@
                     <a:p>
                       <a:pPr algn="ctr" latinLnBrk="1"/>
                       <a:r>
-                        <a:rPr lang="en-US" altLang="ko-KR" sz="1600" kern="1200" dirty="0">
+                        <a:rPr lang="en-US" altLang="ko-KR" sz="1100" kern="1200" dirty="0">
                           <a:effectLst/>
                         </a:rPr>
                         <a:t>0.397829</a:t>
                       </a:r>
-                      <a:endParaRPr lang="ko-KR" altLang="en-US" sz="1600" dirty="0">
+                      <a:endParaRPr lang="ko-KR" altLang="en-US" sz="1100" dirty="0">
                         <a:latin typeface="프리젠테이션 4 Regular" pitchFamily="2" charset="-127"/>
                         <a:ea typeface="프리젠테이션 4 Regular" pitchFamily="2" charset="-127"/>
                       </a:endParaRPr>
@@ -7694,7 +7385,7 @@
                   </a:ext>
                 </a:extLst>
               </a:tr>
-              <a:tr h="579120">
+              <a:tr h="284169">
                 <a:tc>
                   <a:txBody>
                     <a:bodyPr/>
@@ -7702,10 +7393,10 @@
                     <a:p>
                       <a:pPr algn="ctr" latinLnBrk="1"/>
                       <a:r>
-                        <a:rPr lang="en-US" altLang="ko-KR" sz="1600" dirty="0"/>
+                        <a:rPr lang="en-US" altLang="ko-KR" sz="1100" dirty="0"/>
                         <a:t>CD11b</a:t>
                       </a:r>
-                      <a:endParaRPr lang="ko-KR" altLang="en-US" sz="1600" dirty="0">
+                      <a:endParaRPr lang="ko-KR" altLang="en-US" sz="1100" dirty="0">
                         <a:latin typeface="프리젠테이션 4 Regular" pitchFamily="2" charset="-127"/>
                         <a:ea typeface="프리젠테이션 4 Regular" pitchFamily="2" charset="-127"/>
                       </a:endParaRPr>
@@ -7720,13 +7411,13 @@
                     <a:p>
                       <a:pPr algn="ctr" latinLnBrk="1"/>
                       <a:r>
-                        <a:rPr lang="en-US" altLang="ko-KR" sz="1600" dirty="0">
+                        <a:rPr lang="en-US" altLang="ko-KR" sz="1100" dirty="0">
                           <a:latin typeface="프리젠테이션 4 Regular" pitchFamily="2" charset="-127"/>
                           <a:ea typeface="프리젠테이션 4 Regular" pitchFamily="2" charset="-127"/>
                         </a:rPr>
                         <a:t>BMI</a:t>
                       </a:r>
-                      <a:endParaRPr lang="ko-KR" altLang="en-US" sz="1600" dirty="0">
+                      <a:endParaRPr lang="ko-KR" altLang="en-US" sz="1100" dirty="0">
                         <a:latin typeface="프리젠테이션 4 Regular" pitchFamily="2" charset="-127"/>
                         <a:ea typeface="프리젠테이션 4 Regular" pitchFamily="2" charset="-127"/>
                       </a:endParaRPr>
@@ -7741,10 +7432,10 @@
                     <a:p>
                       <a:pPr algn="ctr" latinLnBrk="1"/>
                       <a:r>
-                        <a:rPr lang="en-US" altLang="ko-KR" sz="1600" dirty="0" err="1"/>
+                        <a:rPr lang="en-US" altLang="ko-KR" sz="1100" dirty="0" err="1"/>
                         <a:t>pearson</a:t>
                       </a:r>
-                      <a:endParaRPr lang="ko-KR" altLang="en-US" sz="1600" dirty="0">
+                      <a:endParaRPr lang="ko-KR" altLang="en-US" sz="1100" dirty="0">
                         <a:latin typeface="프리젠테이션 4 Regular" pitchFamily="2" charset="-127"/>
                         <a:ea typeface="프리젠테이션 4 Regular" pitchFamily="2" charset="-127"/>
                       </a:endParaRPr>
@@ -7759,12 +7450,12 @@
                     <a:p>
                       <a:pPr algn="ctr" latinLnBrk="1"/>
                       <a:r>
-                        <a:rPr lang="en-US" altLang="ko-KR" sz="1600" kern="1200" dirty="0">
+                        <a:rPr lang="en-US" altLang="ko-KR" sz="1100" kern="1200" dirty="0">
                           <a:effectLst/>
                         </a:rPr>
                         <a:t>-0.253556</a:t>
                       </a:r>
-                      <a:endParaRPr lang="ko-KR" altLang="en-US" sz="1600" dirty="0">
+                      <a:endParaRPr lang="ko-KR" altLang="en-US" sz="1100" dirty="0">
                         <a:latin typeface="프리젠테이션 4 Regular" pitchFamily="2" charset="-127"/>
                         <a:ea typeface="프리젠테이션 4 Regular" pitchFamily="2" charset="-127"/>
                       </a:endParaRPr>
@@ -7779,7 +7470,7 @@
                     <a:p>
                       <a:pPr algn="ctr"/>
                       <a:r>
-                        <a:rPr lang="en-US" altLang="ko-KR" sz="1600" dirty="0">
+                        <a:rPr lang="en-US" altLang="ko-KR" sz="1100" dirty="0">
                           <a:effectLst/>
                         </a:rPr>
                         <a:t>[-0.51, 0.05]</a:t>
@@ -7795,7 +7486,7 @@
                     <a:p>
                       <a:pPr algn="ctr"/>
                       <a:r>
-                        <a:rPr lang="en-US" altLang="ko-KR" sz="1600" dirty="0">
+                        <a:rPr lang="en-US" altLang="ko-KR" sz="1100" dirty="0">
                           <a:effectLst/>
                         </a:rPr>
                         <a:t>0.100876</a:t>
@@ -7810,7 +7501,7 @@
                   </a:ext>
                 </a:extLst>
               </a:tr>
-              <a:tr h="579120">
+              <a:tr h="274381">
                 <a:tc>
                   <a:txBody>
                     <a:bodyPr/>
@@ -7818,10 +7509,10 @@
                     <a:p>
                       <a:pPr algn="ctr" latinLnBrk="1"/>
                       <a:r>
-                        <a:rPr lang="en-US" altLang="ko-KR" sz="1600" dirty="0"/>
+                        <a:rPr lang="en-US" altLang="ko-KR" sz="1100" dirty="0"/>
                         <a:t>HLADR</a:t>
                       </a:r>
-                      <a:endParaRPr lang="ko-KR" altLang="en-US" sz="1600" dirty="0">
+                      <a:endParaRPr lang="ko-KR" altLang="en-US" sz="1100" dirty="0">
                         <a:latin typeface="프리젠테이션 4 Regular" pitchFamily="2" charset="-127"/>
                         <a:ea typeface="프리젠테이션 4 Regular" pitchFamily="2" charset="-127"/>
                       </a:endParaRPr>
@@ -7856,20 +7547,13 @@
                         <a:defRPr/>
                       </a:pPr>
                       <a:r>
-                        <a:rPr lang="en-US" altLang="ko-KR" sz="1600" dirty="0">
+                        <a:rPr lang="en-US" altLang="ko-KR" sz="1100" dirty="0">
                           <a:latin typeface="프리젠테이션 4 Regular" pitchFamily="2" charset="-127"/>
                           <a:ea typeface="프리젠테이션 4 Regular" pitchFamily="2" charset="-127"/>
                         </a:rPr>
                         <a:t>BMI</a:t>
                       </a:r>
-                      <a:endParaRPr lang="ko-KR" altLang="en-US" sz="1600" dirty="0">
-                        <a:latin typeface="프리젠테이션 4 Regular" pitchFamily="2" charset="-127"/>
-                        <a:ea typeface="프리젠테이션 4 Regular" pitchFamily="2" charset="-127"/>
-                      </a:endParaRPr>
-                    </a:p>
-                    <a:p>
-                      <a:pPr algn="ctr" latinLnBrk="1"/>
-                      <a:endParaRPr lang="ko-KR" altLang="en-US" sz="1600" dirty="0">
+                      <a:endParaRPr lang="ko-KR" altLang="en-US" sz="1100" dirty="0">
                         <a:latin typeface="프리젠테이션 4 Regular" pitchFamily="2" charset="-127"/>
                         <a:ea typeface="프리젠테이션 4 Regular" pitchFamily="2" charset="-127"/>
                       </a:endParaRPr>
@@ -7904,17 +7588,10 @@
                         <a:defRPr/>
                       </a:pPr>
                       <a:r>
-                        <a:rPr lang="en-US" altLang="ko-KR" sz="1600" dirty="0" err="1"/>
+                        <a:rPr lang="en-US" altLang="ko-KR" sz="1100" dirty="0" err="1"/>
                         <a:t>pearson</a:t>
                       </a:r>
-                      <a:endParaRPr lang="ko-KR" altLang="en-US" sz="1600" dirty="0"/>
-                    </a:p>
-                    <a:p>
-                      <a:pPr algn="ctr" latinLnBrk="1"/>
-                      <a:endParaRPr lang="ko-KR" altLang="en-US" sz="1600" dirty="0">
-                        <a:latin typeface="프리젠테이션 4 Regular" pitchFamily="2" charset="-127"/>
-                        <a:ea typeface="프리젠테이션 4 Regular" pitchFamily="2" charset="-127"/>
-                      </a:endParaRPr>
+                      <a:endParaRPr lang="ko-KR" altLang="en-US" sz="1100" dirty="0"/>
                     </a:p>
                   </a:txBody>
                   <a:tcPr>
@@ -7930,7 +7607,7 @@
                     <a:p>
                       <a:pPr algn="ctr"/>
                       <a:r>
-                        <a:rPr lang="en-US" altLang="ko-KR" sz="1600" dirty="0">
+                        <a:rPr lang="en-US" altLang="ko-KR" sz="1100" dirty="0">
                           <a:effectLst/>
                         </a:rPr>
                         <a:t>-0.305647</a:t>
@@ -7950,12 +7627,12 @@
                     <a:p>
                       <a:pPr algn="ctr"/>
                       <a:r>
-                        <a:rPr lang="en-US" altLang="ko-KR" sz="1600" kern="1200" dirty="0">
+                        <a:rPr lang="en-US" altLang="ko-KR" sz="1100" kern="1200" dirty="0">
                           <a:effectLst/>
                         </a:rPr>
                         <a:t>[-0.56, -0.01]</a:t>
                       </a:r>
-                      <a:endParaRPr lang="ko-KR" altLang="en-US" sz="1600" dirty="0">
+                      <a:endParaRPr lang="ko-KR" altLang="en-US" sz="1100" dirty="0">
                         <a:effectLst/>
                       </a:endParaRPr>
                     </a:p>
@@ -7973,7 +7650,7 @@
                     <a:p>
                       <a:pPr algn="ctr"/>
                       <a:r>
-                        <a:rPr lang="en-US" altLang="ko-KR" sz="1600" dirty="0">
+                        <a:rPr lang="en-US" altLang="ko-KR" sz="1100" dirty="0">
                           <a:effectLst/>
                         </a:rPr>
                         <a:t>0.046241</a:t>
@@ -7992,7 +7669,7 @@
                   </a:ext>
                 </a:extLst>
               </a:tr>
-              <a:tr h="579120">
+              <a:tr h="274381">
                 <a:tc>
                   <a:txBody>
                     <a:bodyPr/>
@@ -8000,10 +7677,10 @@
                     <a:p>
                       <a:pPr algn="ctr" latinLnBrk="1"/>
                       <a:r>
-                        <a:rPr lang="en-US" altLang="ko-KR" sz="1600" dirty="0"/>
+                        <a:rPr lang="en-US" altLang="ko-KR" sz="1100" dirty="0"/>
                         <a:t>NK</a:t>
                       </a:r>
-                      <a:endParaRPr lang="ko-KR" altLang="en-US" sz="1600" dirty="0">
+                      <a:endParaRPr lang="ko-KR" altLang="en-US" sz="1100" dirty="0">
                         <a:latin typeface="프리젠테이션 4 Regular" pitchFamily="2" charset="-127"/>
                         <a:ea typeface="프리젠테이션 4 Regular" pitchFamily="2" charset="-127"/>
                       </a:endParaRPr>
@@ -8034,20 +7711,13 @@
                         <a:defRPr/>
                       </a:pPr>
                       <a:r>
-                        <a:rPr lang="en-US" altLang="ko-KR" sz="1600" dirty="0">
+                        <a:rPr lang="en-US" altLang="ko-KR" sz="1100" dirty="0">
                           <a:latin typeface="프리젠테이션 4 Regular" pitchFamily="2" charset="-127"/>
                           <a:ea typeface="프리젠테이션 4 Regular" pitchFamily="2" charset="-127"/>
                         </a:rPr>
                         <a:t>BMI</a:t>
                       </a:r>
-                      <a:endParaRPr lang="ko-KR" altLang="en-US" sz="1600" dirty="0">
-                        <a:latin typeface="프리젠테이션 4 Regular" pitchFamily="2" charset="-127"/>
-                        <a:ea typeface="프리젠테이션 4 Regular" pitchFamily="2" charset="-127"/>
-                      </a:endParaRPr>
-                    </a:p>
-                    <a:p>
-                      <a:pPr algn="ctr" latinLnBrk="1"/>
-                      <a:endParaRPr lang="ko-KR" altLang="en-US" sz="1600" dirty="0">
+                      <a:endParaRPr lang="ko-KR" altLang="en-US" sz="1100" dirty="0">
                         <a:latin typeface="프리젠테이션 4 Regular" pitchFamily="2" charset="-127"/>
                         <a:ea typeface="프리젠테이션 4 Regular" pitchFamily="2" charset="-127"/>
                       </a:endParaRPr>
@@ -8078,17 +7748,10 @@
                         <a:defRPr/>
                       </a:pPr>
                       <a:r>
-                        <a:rPr lang="en-US" altLang="ko-KR" sz="1600" dirty="0" err="1"/>
+                        <a:rPr lang="en-US" altLang="ko-KR" sz="1100" dirty="0" err="1"/>
                         <a:t>pearson</a:t>
                       </a:r>
-                      <a:endParaRPr lang="ko-KR" altLang="en-US" sz="1600" dirty="0"/>
-                    </a:p>
-                    <a:p>
-                      <a:pPr algn="ctr" latinLnBrk="1"/>
-                      <a:endParaRPr lang="ko-KR" altLang="en-US" sz="1600" dirty="0">
-                        <a:latin typeface="프리젠테이션 4 Regular" pitchFamily="2" charset="-127"/>
-                        <a:ea typeface="프리젠테이션 4 Regular" pitchFamily="2" charset="-127"/>
-                      </a:endParaRPr>
+                      <a:endParaRPr lang="ko-KR" altLang="en-US" sz="1100" dirty="0"/>
                     </a:p>
                   </a:txBody>
                   <a:tcPr/>
@@ -8100,12 +7763,12 @@
                     <a:p>
                       <a:pPr algn="ctr" latinLnBrk="1"/>
                       <a:r>
-                        <a:rPr lang="en-US" altLang="ko-KR" sz="1600" kern="1200" dirty="0">
+                        <a:rPr lang="en-US" altLang="ko-KR" sz="1100" kern="1200" dirty="0">
                           <a:effectLst/>
                         </a:rPr>
                         <a:t>-0.231679</a:t>
                       </a:r>
-                      <a:endParaRPr lang="ko-KR" altLang="en-US" sz="1600" dirty="0">
+                      <a:endParaRPr lang="ko-KR" altLang="en-US" sz="1100" dirty="0">
                         <a:latin typeface="프리젠테이션 4 Regular" pitchFamily="2" charset="-127"/>
                         <a:ea typeface="프리젠테이션 4 Regular" pitchFamily="2" charset="-127"/>
                       </a:endParaRPr>
@@ -8120,7 +7783,7 @@
                     <a:p>
                       <a:pPr algn="ctr"/>
                       <a:r>
-                        <a:rPr lang="en-US" altLang="ko-KR" sz="1600" dirty="0">
+                        <a:rPr lang="en-US" altLang="ko-KR" sz="1100" dirty="0">
                           <a:effectLst/>
                         </a:rPr>
                         <a:t>[-0.5, 0.07]</a:t>
@@ -8136,7 +7799,7 @@
                     <a:p>
                       <a:pPr algn="ctr"/>
                       <a:r>
-                        <a:rPr lang="en-US" altLang="ko-KR" sz="1600" dirty="0">
+                        <a:rPr lang="en-US" altLang="ko-KR" sz="1100" dirty="0">
                           <a:effectLst/>
                         </a:rPr>
                         <a:t>0.134947</a:t>
@@ -8151,7 +7814,7 @@
                   </a:ext>
                 </a:extLst>
               </a:tr>
-              <a:tr h="579120">
+              <a:tr h="292220">
                 <a:tc>
                   <a:txBody>
                     <a:bodyPr/>
@@ -8159,10 +7822,10 @@
                     <a:p>
                       <a:pPr algn="ctr" latinLnBrk="1"/>
                       <a:r>
-                        <a:rPr lang="en-US" altLang="ko-KR" sz="1600" dirty="0"/>
+                        <a:rPr lang="en-US" altLang="ko-KR" sz="1100" dirty="0"/>
                         <a:t>NKT1</a:t>
                       </a:r>
-                      <a:endParaRPr lang="ko-KR" altLang="en-US" sz="1600" dirty="0">
+                      <a:endParaRPr lang="ko-KR" altLang="en-US" sz="1100" dirty="0">
                         <a:latin typeface="프리젠테이션 4 Regular" pitchFamily="2" charset="-127"/>
                         <a:ea typeface="프리젠테이션 4 Regular" pitchFamily="2" charset="-127"/>
                       </a:endParaRPr>
@@ -8193,13 +7856,13 @@
                         <a:defRPr/>
                       </a:pPr>
                       <a:r>
-                        <a:rPr lang="en-US" altLang="ko-KR" sz="1600" dirty="0">
+                        <a:rPr lang="en-US" altLang="ko-KR" sz="1100" dirty="0">
                           <a:latin typeface="프리젠테이션 4 Regular" pitchFamily="2" charset="-127"/>
                           <a:ea typeface="프리젠테이션 4 Regular" pitchFamily="2" charset="-127"/>
                         </a:rPr>
                         <a:t>BMI</a:t>
                       </a:r>
-                      <a:endParaRPr lang="ko-KR" altLang="en-US" sz="1600" dirty="0">
+                      <a:endParaRPr lang="ko-KR" altLang="en-US" sz="1100" dirty="0">
                         <a:latin typeface="프리젠테이션 4 Regular" pitchFamily="2" charset="-127"/>
                         <a:ea typeface="프리젠테이션 4 Regular" pitchFamily="2" charset="-127"/>
                       </a:endParaRPr>
@@ -8230,14 +7893,27 @@
                         <a:defRPr/>
                       </a:pPr>
                       <a:r>
-                        <a:rPr lang="en-US" altLang="ko-KR" sz="1600" dirty="0" err="1"/>
+                        <a:rPr lang="en-US" altLang="ko-KR" sz="1100" dirty="0" err="1"/>
                         <a:t>pearson</a:t>
                       </a:r>
-                      <a:endParaRPr lang="ko-KR" altLang="en-US" sz="1600" dirty="0"/>
+                      <a:endParaRPr lang="ko-KR" altLang="en-US" sz="1100" dirty="0"/>
                     </a:p>
+                  </a:txBody>
+                  <a:tcPr/>
+                </a:tc>
+                <a:tc>
+                  <a:txBody>
+                    <a:bodyPr/>
+                    <a:lstStyle/>
                     <a:p>
                       <a:pPr algn="ctr" latinLnBrk="1"/>
-                      <a:endParaRPr lang="ko-KR" altLang="en-US" sz="1600" dirty="0">
+                      <a:r>
+                        <a:rPr lang="en-US" altLang="ko-KR" sz="1100" kern="1200" dirty="0">
+                          <a:effectLst/>
+                        </a:rPr>
+                        <a:t>-0.138999</a:t>
+                      </a:r>
+                      <a:endParaRPr lang="ko-KR" altLang="en-US" sz="1100" dirty="0">
                         <a:latin typeface="프리젠테이션 4 Regular" pitchFamily="2" charset="-127"/>
                         <a:ea typeface="프리젠테이션 4 Regular" pitchFamily="2" charset="-127"/>
                       </a:endParaRPr>
@@ -8252,32 +7928,12 @@
                     <a:p>
                       <a:pPr algn="ctr" latinLnBrk="1"/>
                       <a:r>
-                        <a:rPr lang="en-US" altLang="ko-KR" sz="1600" kern="1200" dirty="0">
-                          <a:effectLst/>
-                        </a:rPr>
-                        <a:t>-0.138999</a:t>
-                      </a:r>
-                      <a:endParaRPr lang="ko-KR" altLang="en-US" sz="1600" dirty="0">
-                        <a:latin typeface="프리젠테이션 4 Regular" pitchFamily="2" charset="-127"/>
-                        <a:ea typeface="프리젠테이션 4 Regular" pitchFamily="2" charset="-127"/>
-                      </a:endParaRPr>
-                    </a:p>
-                  </a:txBody>
-                  <a:tcPr/>
-                </a:tc>
-                <a:tc>
-                  <a:txBody>
-                    <a:bodyPr/>
-                    <a:lstStyle/>
-                    <a:p>
-                      <a:pPr algn="ctr" latinLnBrk="1"/>
-                      <a:r>
-                        <a:rPr lang="en-US" altLang="ko-KR" sz="1600" kern="1200" dirty="0">
+                        <a:rPr lang="en-US" altLang="ko-KR" sz="1100" kern="1200" dirty="0">
                           <a:effectLst/>
                         </a:rPr>
                         <a:t>[-0.42, 0.17]</a:t>
                       </a:r>
-                      <a:endParaRPr lang="ko-KR" altLang="en-US" sz="1600" dirty="0">
+                      <a:endParaRPr lang="ko-KR" altLang="en-US" sz="1100" dirty="0">
                         <a:latin typeface="프리젠테이션 4 Regular" pitchFamily="2" charset="-127"/>
                         <a:ea typeface="프리젠테이션 4 Regular" pitchFamily="2" charset="-127"/>
                       </a:endParaRPr>
@@ -8292,7 +7948,7 @@
                     <a:p>
                       <a:pPr algn="ctr"/>
                       <a:r>
-                        <a:rPr lang="en-US" altLang="ko-KR" sz="1600" dirty="0">
+                        <a:rPr lang="en-US" altLang="ko-KR" sz="1100" dirty="0">
                           <a:effectLst/>
                         </a:rPr>
                         <a:t>0.374033</a:t>
@@ -8307,7 +7963,7 @@
                   </a:ext>
                 </a:extLst>
               </a:tr>
-              <a:tr h="579120">
+              <a:tr h="274381">
                 <a:tc>
                   <a:txBody>
                     <a:bodyPr/>
@@ -8315,35 +7971,13 @@
                     <a:p>
                       <a:pPr algn="ctr" latinLnBrk="1"/>
                       <a:r>
-                        <a:rPr lang="en-US" altLang="ko-KR" sz="1600" dirty="0"/>
-                        <a:t>T</a:t>
-                      </a:r>
-                      <a:endParaRPr lang="ko-KR" altLang="en-US" sz="1600" dirty="0">
-                        <a:latin typeface="프리젠테이션 4 Regular" pitchFamily="2" charset="-127"/>
-                        <a:ea typeface="프리젠테이션 4 Regular" pitchFamily="2" charset="-127"/>
-                      </a:endParaRPr>
-                    </a:p>
-                  </a:txBody>
-                  <a:tcPr>
-                    <a:solidFill>
-                      <a:schemeClr val="bg2"/>
-                    </a:solidFill>
-                  </a:tcPr>
-                </a:tc>
-                <a:tc>
-                  <a:txBody>
-                    <a:bodyPr/>
-                    <a:lstStyle/>
-                    <a:p>
-                      <a:pPr algn="ctr" latinLnBrk="1"/>
-                      <a:r>
-                        <a:rPr lang="en-US" altLang="ko-KR" sz="1600" dirty="0">
+                        <a:rPr lang="en-US" altLang="ko-KR" sz="1100" dirty="0">
                           <a:latin typeface="프리젠테이션 4 Regular" pitchFamily="2" charset="-127"/>
                           <a:ea typeface="프리젠테이션 4 Regular" pitchFamily="2" charset="-127"/>
                         </a:rPr>
-                        <a:t>BMI</a:t>
+                        <a:t>T</a:t>
                       </a:r>
-                      <a:endParaRPr lang="ko-KR" altLang="en-US" sz="1600" dirty="0">
+                      <a:endParaRPr lang="ko-KR" altLang="en-US" sz="1100" dirty="0">
                         <a:latin typeface="프리젠테이션 4 Regular" pitchFamily="2" charset="-127"/>
                         <a:ea typeface="프리젠테이션 4 Regular" pitchFamily="2" charset="-127"/>
                       </a:endParaRPr>
@@ -8378,14 +8012,98 @@
                         <a:defRPr/>
                       </a:pPr>
                       <a:r>
-                        <a:rPr lang="en-US" altLang="ko-KR" sz="1600" dirty="0" err="1"/>
+                        <a:rPr lang="en-US" altLang="ko-KR" sz="1100" dirty="0">
+                          <a:latin typeface="프리젠테이션 4 Regular" pitchFamily="2" charset="-127"/>
+                          <a:ea typeface="프리젠테이션 4 Regular" pitchFamily="2" charset="-127"/>
+                        </a:rPr>
+                        <a:t>BMI</a:t>
+                      </a:r>
+                      <a:endParaRPr lang="ko-KR" altLang="en-US" sz="1100" dirty="0">
+                        <a:latin typeface="프리젠테이션 4 Regular" pitchFamily="2" charset="-127"/>
+                        <a:ea typeface="프리젠테이션 4 Regular" pitchFamily="2" charset="-127"/>
+                      </a:endParaRPr>
+                    </a:p>
+                  </a:txBody>
+                  <a:tcPr>
+                    <a:solidFill>
+                      <a:schemeClr val="bg2"/>
+                    </a:solidFill>
+                  </a:tcPr>
+                </a:tc>
+                <a:tc>
+                  <a:txBody>
+                    <a:bodyPr/>
+                    <a:lstStyle/>
+                    <a:p>
+                      <a:pPr marL="0" marR="0" lvl="0" indent="0" algn="ctr" defTabSz="914400" rtl="0" eaLnBrk="1" fontAlgn="auto" latinLnBrk="1" hangingPunct="1">
+                        <a:lnSpc>
+                          <a:spcPct val="100000"/>
+                        </a:lnSpc>
+                        <a:spcBef>
+                          <a:spcPts val="0"/>
+                        </a:spcBef>
+                        <a:spcAft>
+                          <a:spcPts val="0"/>
+                        </a:spcAft>
+                        <a:buClrTx/>
+                        <a:buSzTx/>
+                        <a:buFontTx/>
+                        <a:buNone/>
+                        <a:tabLst/>
+                        <a:defRPr/>
+                      </a:pPr>
+                      <a:r>
+                        <a:rPr lang="en-US" altLang="ko-KR" sz="1100" dirty="0" err="1"/>
                         <a:t>pearson</a:t>
                       </a:r>
-                      <a:endParaRPr lang="ko-KR" altLang="en-US" sz="1600" dirty="0"/>
+                      <a:endParaRPr lang="ko-KR" altLang="en-US" sz="1100" dirty="0"/>
                     </a:p>
+                  </a:txBody>
+                  <a:tcPr>
+                    <a:solidFill>
+                      <a:schemeClr val="bg2"/>
+                    </a:solidFill>
+                  </a:tcPr>
+                </a:tc>
+                <a:tc>
+                  <a:txBody>
+                    <a:bodyPr/>
+                    <a:lstStyle/>
                     <a:p>
                       <a:pPr algn="ctr" latinLnBrk="1"/>
-                      <a:endParaRPr lang="ko-KR" altLang="en-US" sz="1600" dirty="0">
+                      <a:r>
+                        <a:rPr lang="en-US" altLang="ko-KR" sz="1100" dirty="0">
+                          <a:latin typeface="프리젠테이션 4 Regular" pitchFamily="2" charset="-127"/>
+                          <a:ea typeface="프리젠테이션 4 Regular" pitchFamily="2" charset="-127"/>
+                        </a:rPr>
+                        <a:t>0.353325</a:t>
+                      </a:r>
+                      <a:endParaRPr lang="ko-KR" altLang="en-US" sz="1100" dirty="0">
+                        <a:latin typeface="프리젠테이션 4 Regular" pitchFamily="2" charset="-127"/>
+                        <a:ea typeface="프리젠테이션 4 Regular" pitchFamily="2" charset="-127"/>
+                      </a:endParaRPr>
+                    </a:p>
+                  </a:txBody>
+                  <a:tcPr>
+                    <a:solidFill>
+                      <a:schemeClr val="bg2"/>
+                    </a:solidFill>
+                  </a:tcPr>
+                </a:tc>
+                <a:tc>
+                  <a:txBody>
+                    <a:bodyPr/>
+                    <a:lstStyle/>
+                    <a:p>
+                      <a:pPr algn="ctr" latinLnBrk="1"/>
+                      <a:r>
+                        <a:rPr lang="en-US" altLang="ko-KR" sz="1100" dirty="0">
+                          <a:latin typeface="프리젠테이션 4 Regular" pitchFamily="2" charset="-127"/>
+                          <a:ea typeface="프리젠테이션 4 Regular" pitchFamily="2" charset="-127"/>
+                        </a:rPr>
+                        <a:t>[0.06, 0.59]</a:t>
+                      </a:r>
+                      <a:endParaRPr lang="ko-KR" altLang="en-US" sz="1100" dirty="0">
                         <a:latin typeface="프리젠테이션 4 Regular" pitchFamily="2" charset="-127"/>
                         <a:ea typeface="프리젠테이션 4 Regular" pitchFamily="2" charset="-127"/>
                       </a:endParaRPr>
@@ -8404,14 +8122,409 @@
                     <a:p>
                       <a:pPr algn="ctr"/>
                       <a:r>
-                        <a:rPr lang="en-US" altLang="ko-KR" sz="1600" dirty="0">
+                        <a:rPr lang="en-US" altLang="ko-KR" sz="1100" dirty="0">
                           <a:effectLst/>
                         </a:rPr>
-                        <a:t>0.353325</a:t>
+                        <a:t>0.020117</a:t>
                       </a:r>
                     </a:p>
                   </a:txBody>
                   <a:tcPr marL="76200" marR="76200" marT="38100" marB="38100" anchor="ctr">
+                    <a:solidFill>
+                      <a:schemeClr val="bg2"/>
+                    </a:solidFill>
+                  </a:tcPr>
+                </a:tc>
+                <a:extLst>
+                  <a:ext uri="{0D108BD9-81ED-4DB2-BD59-A6C34878D82A}">
+                    <a16:rowId xmlns:a16="http://schemas.microsoft.com/office/drawing/2014/main" val="60529638"/>
+                  </a:ext>
+                </a:extLst>
+              </a:tr>
+              <a:tr h="352604">
+                <a:tc>
+                  <a:txBody>
+                    <a:bodyPr/>
+                    <a:lstStyle/>
+                    <a:p>
+                      <a:pPr algn="ctr" latinLnBrk="1"/>
+                      <a:r>
+                        <a:rPr lang="en-US" altLang="ko-KR" sz="1100" dirty="0"/>
+                        <a:t>B</a:t>
+                      </a:r>
+                      <a:endParaRPr lang="ko-KR" altLang="en-US" sz="1100" dirty="0">
+                        <a:latin typeface="프리젠테이션 4 Regular" pitchFamily="2" charset="-127"/>
+                        <a:ea typeface="프리젠테이션 4 Regular" pitchFamily="2" charset="-127"/>
+                      </a:endParaRPr>
+                    </a:p>
+                  </a:txBody>
+                  <a:tcPr>
+                    <a:noFill/>
+                  </a:tcPr>
+                </a:tc>
+                <a:tc>
+                  <a:txBody>
+                    <a:bodyPr/>
+                    <a:lstStyle/>
+                    <a:p>
+                      <a:pPr algn="ctr" latinLnBrk="1"/>
+                      <a:r>
+                        <a:rPr lang="en-US" altLang="ko-KR" sz="1100" dirty="0">
+                          <a:latin typeface="프리젠테이션 4 Regular" pitchFamily="2" charset="-127"/>
+                          <a:ea typeface="프리젠테이션 4 Regular" pitchFamily="2" charset="-127"/>
+                        </a:rPr>
+                        <a:t>BMI + SEX</a:t>
+                      </a:r>
+                      <a:endParaRPr lang="ko-KR" altLang="en-US" sz="1100" dirty="0">
+                        <a:latin typeface="프리젠테이션 4 Regular" pitchFamily="2" charset="-127"/>
+                        <a:ea typeface="프리젠테이션 4 Regular" pitchFamily="2" charset="-127"/>
+                      </a:endParaRPr>
+                    </a:p>
+                  </a:txBody>
+                  <a:tcPr>
+                    <a:noFill/>
+                  </a:tcPr>
+                </a:tc>
+                <a:tc>
+                  <a:txBody>
+                    <a:bodyPr/>
+                    <a:lstStyle/>
+                    <a:p>
+                      <a:pPr algn="ctr" latinLnBrk="1"/>
+                      <a:r>
+                        <a:rPr lang="en-US" altLang="ko-KR" sz="1100" dirty="0" err="1"/>
+                        <a:t>pearson</a:t>
+                      </a:r>
+                      <a:endParaRPr lang="ko-KR" altLang="en-US" sz="1100" dirty="0">
+                        <a:latin typeface="프리젠테이션 4 Regular" pitchFamily="2" charset="-127"/>
+                        <a:ea typeface="프리젠테이션 4 Regular" pitchFamily="2" charset="-127"/>
+                      </a:endParaRPr>
+                    </a:p>
+                  </a:txBody>
+                  <a:tcPr>
+                    <a:noFill/>
+                  </a:tcPr>
+                </a:tc>
+                <a:tc>
+                  <a:txBody>
+                    <a:bodyPr/>
+                    <a:lstStyle/>
+                    <a:p>
+                      <a:pPr algn="ctr" latinLnBrk="1"/>
+                      <a:r>
+                        <a:rPr lang="en-US" altLang="ko-KR" sz="1100" b="0" i="0" kern="1200" dirty="0">
+                          <a:solidFill>
+                            <a:schemeClr val="tx1"/>
+                          </a:solidFill>
+                          <a:effectLst/>
+                          <a:latin typeface="+mn-lt"/>
+                          <a:ea typeface="+mn-ea"/>
+                          <a:cs typeface="+mn-cs"/>
+                        </a:rPr>
+                        <a:t>0.10035</a:t>
+                      </a:r>
+                      <a:endParaRPr lang="ko-KR" altLang="en-US" sz="1100" dirty="0">
+                        <a:latin typeface="프리젠테이션 4 Regular" pitchFamily="2" charset="-127"/>
+                        <a:ea typeface="프리젠테이션 4 Regular" pitchFamily="2" charset="-127"/>
+                      </a:endParaRPr>
+                    </a:p>
+                  </a:txBody>
+                  <a:tcPr>
+                    <a:noFill/>
+                  </a:tcPr>
+                </a:tc>
+                <a:tc>
+                  <a:txBody>
+                    <a:bodyPr/>
+                    <a:lstStyle/>
+                    <a:p>
+                      <a:pPr algn="ctr" latinLnBrk="1"/>
+                      <a:r>
+                        <a:rPr lang="en-US" altLang="ko-KR" sz="1100" b="0" i="0" kern="1200" dirty="0">
+                          <a:solidFill>
+                            <a:schemeClr val="tx1"/>
+                          </a:solidFill>
+                          <a:effectLst/>
+                          <a:latin typeface="+mn-lt"/>
+                          <a:ea typeface="+mn-ea"/>
+                          <a:cs typeface="+mn-cs"/>
+                        </a:rPr>
+                        <a:t>[-0.21, 0.39]</a:t>
+                      </a:r>
+                      <a:endParaRPr lang="ko-KR" altLang="en-US" sz="1100" dirty="0">
+                        <a:latin typeface="프리젠테이션 4 Regular" pitchFamily="2" charset="-127"/>
+                        <a:ea typeface="프리젠테이션 4 Regular" pitchFamily="2" charset="-127"/>
+                      </a:endParaRPr>
+                    </a:p>
+                  </a:txBody>
+                  <a:tcPr>
+                    <a:noFill/>
+                  </a:tcPr>
+                </a:tc>
+                <a:tc>
+                  <a:txBody>
+                    <a:bodyPr/>
+                    <a:lstStyle/>
+                    <a:p>
+                      <a:pPr algn="ctr" latinLnBrk="1"/>
+                      <a:r>
+                        <a:rPr lang="en-US" altLang="ko-KR" sz="1100" b="0" i="0" kern="1200" dirty="0">
+                          <a:solidFill>
+                            <a:schemeClr val="tx1"/>
+                          </a:solidFill>
+                          <a:effectLst/>
+                          <a:latin typeface="+mn-lt"/>
+                          <a:ea typeface="+mn-ea"/>
+                          <a:cs typeface="+mn-cs"/>
+                        </a:rPr>
+                        <a:t>0.527183</a:t>
+                      </a:r>
+                      <a:endParaRPr lang="ko-KR" altLang="en-US" sz="1100" dirty="0">
+                        <a:latin typeface="프리젠테이션 4 Regular" pitchFamily="2" charset="-127"/>
+                        <a:ea typeface="프리젠테이션 4 Regular" pitchFamily="2" charset="-127"/>
+                      </a:endParaRPr>
+                    </a:p>
+                  </a:txBody>
+                  <a:tcPr>
+                    <a:noFill/>
+                  </a:tcPr>
+                </a:tc>
+                <a:extLst>
+                  <a:ext uri="{0D108BD9-81ED-4DB2-BD59-A6C34878D82A}">
+                    <a16:rowId xmlns:a16="http://schemas.microsoft.com/office/drawing/2014/main" val="2096857672"/>
+                  </a:ext>
+                </a:extLst>
+              </a:tr>
+              <a:tr h="352604">
+                <a:tc>
+                  <a:txBody>
+                    <a:bodyPr/>
+                    <a:lstStyle/>
+                    <a:p>
+                      <a:pPr algn="ctr" latinLnBrk="1"/>
+                      <a:r>
+                        <a:rPr lang="en-US" altLang="ko-KR" sz="1100" dirty="0"/>
+                        <a:t>CD11b</a:t>
+                      </a:r>
+                      <a:endParaRPr lang="ko-KR" altLang="en-US" sz="1100" dirty="0">
+                        <a:latin typeface="프리젠테이션 4 Regular" pitchFamily="2" charset="-127"/>
+                        <a:ea typeface="프리젠테이션 4 Regular" pitchFamily="2" charset="-127"/>
+                      </a:endParaRPr>
+                    </a:p>
+                  </a:txBody>
+                  <a:tcPr>
+                    <a:noFill/>
+                  </a:tcPr>
+                </a:tc>
+                <a:tc>
+                  <a:txBody>
+                    <a:bodyPr/>
+                    <a:lstStyle/>
+                    <a:p>
+                      <a:pPr algn="ctr" latinLnBrk="1"/>
+                      <a:r>
+                        <a:rPr lang="en-US" altLang="ko-KR" sz="1100" dirty="0">
+                          <a:latin typeface="프리젠테이션 4 Regular" pitchFamily="2" charset="-127"/>
+                          <a:ea typeface="프리젠테이션 4 Regular" pitchFamily="2" charset="-127"/>
+                        </a:rPr>
+                        <a:t>BMI + SEX</a:t>
+                      </a:r>
+                      <a:endParaRPr lang="ko-KR" altLang="en-US" sz="1100" dirty="0">
+                        <a:latin typeface="프리젠테이션 4 Regular" pitchFamily="2" charset="-127"/>
+                        <a:ea typeface="프리젠테이션 4 Regular" pitchFamily="2" charset="-127"/>
+                      </a:endParaRPr>
+                    </a:p>
+                  </a:txBody>
+                  <a:tcPr>
+                    <a:noFill/>
+                  </a:tcPr>
+                </a:tc>
+                <a:tc>
+                  <a:txBody>
+                    <a:bodyPr/>
+                    <a:lstStyle/>
+                    <a:p>
+                      <a:pPr algn="ctr" latinLnBrk="1"/>
+                      <a:r>
+                        <a:rPr lang="en-US" altLang="ko-KR" sz="1100" dirty="0" err="1"/>
+                        <a:t>pearson</a:t>
+                      </a:r>
+                      <a:endParaRPr lang="ko-KR" altLang="en-US" sz="1100" dirty="0">
+                        <a:latin typeface="프리젠테이션 4 Regular" pitchFamily="2" charset="-127"/>
+                        <a:ea typeface="프리젠테이션 4 Regular" pitchFamily="2" charset="-127"/>
+                      </a:endParaRPr>
+                    </a:p>
+                  </a:txBody>
+                  <a:tcPr>
+                    <a:noFill/>
+                  </a:tcPr>
+                </a:tc>
+                <a:tc>
+                  <a:txBody>
+                    <a:bodyPr/>
+                    <a:lstStyle/>
+                    <a:p>
+                      <a:pPr algn="ctr" latinLnBrk="1"/>
+                      <a:r>
+                        <a:rPr lang="en-US" altLang="ko-KR" sz="1100" b="0" i="0" kern="1200" dirty="0">
+                          <a:solidFill>
+                            <a:schemeClr val="tx1"/>
+                          </a:solidFill>
+                          <a:effectLst/>
+                          <a:latin typeface="+mn-lt"/>
+                          <a:ea typeface="+mn-ea"/>
+                          <a:cs typeface="+mn-cs"/>
+                        </a:rPr>
+                        <a:t>-0.262178</a:t>
+                      </a:r>
+                      <a:endParaRPr lang="ko-KR" altLang="en-US" sz="1100" dirty="0">
+                        <a:latin typeface="프리젠테이션 4 Regular" pitchFamily="2" charset="-127"/>
+                        <a:ea typeface="프리젠테이션 4 Regular" pitchFamily="2" charset="-127"/>
+                      </a:endParaRPr>
+                    </a:p>
+                  </a:txBody>
+                  <a:tcPr>
+                    <a:noFill/>
+                  </a:tcPr>
+                </a:tc>
+                <a:tc>
+                  <a:txBody>
+                    <a:bodyPr/>
+                    <a:lstStyle/>
+                    <a:p>
+                      <a:pPr algn="ctr"/>
+                      <a:r>
+                        <a:rPr lang="en-US" altLang="ko-KR" sz="1100" b="0" i="0" kern="1200" dirty="0">
+                          <a:solidFill>
+                            <a:schemeClr val="tx1"/>
+                          </a:solidFill>
+                          <a:effectLst/>
+                          <a:latin typeface="+mn-lt"/>
+                          <a:ea typeface="+mn-ea"/>
+                          <a:cs typeface="+mn-cs"/>
+                        </a:rPr>
+                        <a:t>[-0.52, 0.05]</a:t>
+                      </a:r>
+                      <a:endParaRPr lang="en-US" altLang="ko-KR" sz="1100" dirty="0">
+                        <a:effectLst/>
+                      </a:endParaRPr>
+                    </a:p>
+                  </a:txBody>
+                  <a:tcPr marL="76200" marR="76200" marT="38100" marB="38100" anchor="ctr">
+                    <a:noFill/>
+                  </a:tcPr>
+                </a:tc>
+                <a:tc>
+                  <a:txBody>
+                    <a:bodyPr/>
+                    <a:lstStyle/>
+                    <a:p>
+                      <a:pPr algn="ctr"/>
+                      <a:r>
+                        <a:rPr lang="en-US" altLang="ko-KR" sz="1100" b="0" i="0" kern="1200" dirty="0">
+                          <a:solidFill>
+                            <a:schemeClr val="tx1"/>
+                          </a:solidFill>
+                          <a:effectLst/>
+                          <a:latin typeface="+mn-lt"/>
+                          <a:ea typeface="+mn-ea"/>
+                          <a:cs typeface="+mn-cs"/>
+                        </a:rPr>
+                        <a:t>0.093481</a:t>
+                      </a:r>
+                      <a:endParaRPr lang="en-US" altLang="ko-KR" sz="1100" dirty="0">
+                        <a:effectLst/>
+                      </a:endParaRPr>
+                    </a:p>
+                  </a:txBody>
+                  <a:tcPr marL="76200" marR="76200" marT="38100" marB="38100" anchor="ctr">
+                    <a:noFill/>
+                  </a:tcPr>
+                </a:tc>
+                <a:extLst>
+                  <a:ext uri="{0D108BD9-81ED-4DB2-BD59-A6C34878D82A}">
+                    <a16:rowId xmlns:a16="http://schemas.microsoft.com/office/drawing/2014/main" val="2354667451"/>
+                  </a:ext>
+                </a:extLst>
+              </a:tr>
+              <a:tr h="290378">
+                <a:tc>
+                  <a:txBody>
+                    <a:bodyPr/>
+                    <a:lstStyle/>
+                    <a:p>
+                      <a:pPr algn="ctr" latinLnBrk="1"/>
+                      <a:r>
+                        <a:rPr lang="en-US" altLang="ko-KR" sz="1100" dirty="0"/>
+                        <a:t>HLADR</a:t>
+                      </a:r>
+                      <a:endParaRPr lang="ko-KR" altLang="en-US" sz="1100" dirty="0">
+                        <a:latin typeface="프리젠테이션 4 Regular" pitchFamily="2" charset="-127"/>
+                        <a:ea typeface="프리젠테이션 4 Regular" pitchFamily="2" charset="-127"/>
+                      </a:endParaRPr>
+                    </a:p>
+                  </a:txBody>
+                  <a:tcPr>
+                    <a:solidFill>
+                      <a:schemeClr val="bg2"/>
+                    </a:solidFill>
+                  </a:tcPr>
+                </a:tc>
+                <a:tc>
+                  <a:txBody>
+                    <a:bodyPr/>
+                    <a:lstStyle/>
+                    <a:p>
+                      <a:pPr algn="ctr" latinLnBrk="1"/>
+                      <a:r>
+                        <a:rPr lang="en-US" altLang="ko-KR" sz="1100" dirty="0">
+                          <a:latin typeface="프리젠테이션 4 Regular" pitchFamily="2" charset="-127"/>
+                          <a:ea typeface="프리젠테이션 4 Regular" pitchFamily="2" charset="-127"/>
+                        </a:rPr>
+                        <a:t>BMI + SEX</a:t>
+                      </a:r>
+                      <a:endParaRPr lang="ko-KR" altLang="en-US" sz="1100" dirty="0">
+                        <a:latin typeface="프리젠테이션 4 Regular" pitchFamily="2" charset="-127"/>
+                        <a:ea typeface="프리젠테이션 4 Regular" pitchFamily="2" charset="-127"/>
+                      </a:endParaRPr>
+                    </a:p>
+                  </a:txBody>
+                  <a:tcPr>
+                    <a:solidFill>
+                      <a:schemeClr val="bg2"/>
+                    </a:solidFill>
+                  </a:tcPr>
+                </a:tc>
+                <a:tc>
+                  <a:txBody>
+                    <a:bodyPr/>
+                    <a:lstStyle/>
+                    <a:p>
+                      <a:pPr marL="0" marR="0" lvl="0" indent="0" algn="ctr" defTabSz="914400" rtl="0" eaLnBrk="1" fontAlgn="auto" latinLnBrk="1" hangingPunct="1">
+                        <a:lnSpc>
+                          <a:spcPct val="100000"/>
+                        </a:lnSpc>
+                        <a:spcBef>
+                          <a:spcPts val="0"/>
+                        </a:spcBef>
+                        <a:spcAft>
+                          <a:spcPts val="0"/>
+                        </a:spcAft>
+                        <a:buClrTx/>
+                        <a:buSzTx/>
+                        <a:buFontTx/>
+                        <a:buNone/>
+                        <a:tabLst/>
+                        <a:defRPr/>
+                      </a:pPr>
+                      <a:r>
+                        <a:rPr lang="en-US" altLang="ko-KR" sz="1100" dirty="0" err="1"/>
+                        <a:t>pearson</a:t>
+                      </a:r>
+                      <a:endParaRPr lang="ko-KR" altLang="en-US" sz="1100" dirty="0"/>
+                    </a:p>
+                  </a:txBody>
+                  <a:tcPr>
                     <a:solidFill>
                       <a:schemeClr val="bg2"/>
                     </a:solidFill>
@@ -8424,12 +8537,18 @@
                     <a:p>
                       <a:pPr algn="ctr"/>
                       <a:r>
-                        <a:rPr lang="en-US" altLang="ko-KR" sz="1600" kern="1200" dirty="0">
+                        <a:rPr lang="en-US" altLang="ko-KR" sz="1100" b="0" i="0" kern="1200" dirty="0">
+                          <a:solidFill>
+                            <a:schemeClr val="tx1"/>
+                          </a:solidFill>
                           <a:effectLst/>
+                          <a:latin typeface="+mn-lt"/>
+                          <a:ea typeface="+mn-ea"/>
+                          <a:cs typeface="+mn-cs"/>
                         </a:rPr>
-                        <a:t>[0.06, 0.59]</a:t>
+                        <a:t>-0.323769</a:t>
                       </a:r>
-                      <a:endParaRPr lang="ko-KR" altLang="en-US" sz="1600" dirty="0">
+                      <a:endParaRPr lang="en-US" altLang="ko-KR" sz="1100" dirty="0">
                         <a:effectLst/>
                       </a:endParaRPr>
                     </a:p>
@@ -8447,11 +8566,49 @@
                     <a:p>
                       <a:pPr algn="ctr"/>
                       <a:r>
-                        <a:rPr lang="en-US" altLang="ko-KR" sz="1600" dirty="0">
+                        <a:rPr lang="en-US" altLang="ko-KR" sz="1100" b="0" i="0" kern="1200" dirty="0">
+                          <a:solidFill>
+                            <a:schemeClr val="tx1"/>
+                          </a:solidFill>
                           <a:effectLst/>
+                          <a:latin typeface="+mn-lt"/>
+                          <a:ea typeface="+mn-ea"/>
+                          <a:cs typeface="+mn-cs"/>
                         </a:rPr>
-                        <a:t>0.020117</a:t>
+                        <a:t>[-0.57, -0.02]</a:t>
                       </a:r>
+                      <a:endParaRPr lang="ko-KR" altLang="en-US" sz="1100" dirty="0">
+                        <a:effectLst/>
+                      </a:endParaRPr>
+                    </a:p>
+                  </a:txBody>
+                  <a:tcPr marL="76200" marR="76200" marT="38100" marB="38100" anchor="ctr">
+                    <a:solidFill>
+                      <a:schemeClr val="bg2"/>
+                    </a:solidFill>
+                  </a:tcPr>
+                </a:tc>
+                <a:tc>
+                  <a:txBody>
+                    <a:bodyPr/>
+                    <a:lstStyle/>
+                    <a:p>
+                      <a:pPr algn="ctr"/>
+                      <a:r>
+                        <a:rPr lang="en-US" altLang="ko-KR" sz="1100" b="0" i="0" kern="1200" dirty="0">
+                          <a:solidFill>
+                            <a:schemeClr val="tx1"/>
+                          </a:solidFill>
+                          <a:effectLst/>
+                          <a:latin typeface="+mn-lt"/>
+                          <a:ea typeface="+mn-ea"/>
+                          <a:cs typeface="+mn-cs"/>
+                        </a:rPr>
+                        <a:t>0.03647</a:t>
+                      </a:r>
+                      <a:endParaRPr lang="en-US" altLang="ko-KR" sz="1100" dirty="0">
+                        <a:effectLst/>
+                      </a:endParaRPr>
                     </a:p>
                   </a:txBody>
                   <a:tcPr marL="76200" marR="76200" marT="38100" marB="38100" anchor="ctr">
@@ -8462,7 +8619,546 @@
                 </a:tc>
                 <a:extLst>
                   <a:ext uri="{0D108BD9-81ED-4DB2-BD59-A6C34878D82A}">
-                    <a16:rowId xmlns:a16="http://schemas.microsoft.com/office/drawing/2014/main" val="1301682945"/>
+                    <a16:rowId xmlns:a16="http://schemas.microsoft.com/office/drawing/2014/main" val="1905241846"/>
+                  </a:ext>
+                </a:extLst>
+              </a:tr>
+              <a:tr h="352604">
+                <a:tc>
+                  <a:txBody>
+                    <a:bodyPr/>
+                    <a:lstStyle/>
+                    <a:p>
+                      <a:pPr algn="ctr" latinLnBrk="1"/>
+                      <a:r>
+                        <a:rPr lang="en-US" altLang="ko-KR" sz="1100" dirty="0"/>
+                        <a:t>NK</a:t>
+                      </a:r>
+                      <a:endParaRPr lang="ko-KR" altLang="en-US" sz="1100" dirty="0">
+                        <a:latin typeface="프리젠테이션 4 Regular" pitchFamily="2" charset="-127"/>
+                        <a:ea typeface="프리젠테이션 4 Regular" pitchFamily="2" charset="-127"/>
+                      </a:endParaRPr>
+                    </a:p>
+                  </a:txBody>
+                  <a:tcPr>
+                    <a:noFill/>
+                  </a:tcPr>
+                </a:tc>
+                <a:tc>
+                  <a:txBody>
+                    <a:bodyPr/>
+                    <a:lstStyle/>
+                    <a:p>
+                      <a:pPr marL="0" marR="0" lvl="0" indent="0" algn="ctr" defTabSz="914400" rtl="0" eaLnBrk="1" fontAlgn="auto" latinLnBrk="1" hangingPunct="1">
+                        <a:lnSpc>
+                          <a:spcPct val="100000"/>
+                        </a:lnSpc>
+                        <a:spcBef>
+                          <a:spcPts val="0"/>
+                        </a:spcBef>
+                        <a:spcAft>
+                          <a:spcPts val="0"/>
+                        </a:spcAft>
+                        <a:buClrTx/>
+                        <a:buSzTx/>
+                        <a:buFontTx/>
+                        <a:buNone/>
+                        <a:tabLst/>
+                        <a:defRPr/>
+                      </a:pPr>
+                      <a:r>
+                        <a:rPr lang="en-US" altLang="ko-KR" sz="1100" dirty="0">
+                          <a:latin typeface="프리젠테이션 4 Regular" pitchFamily="2" charset="-127"/>
+                          <a:ea typeface="프리젠테이션 4 Regular" pitchFamily="2" charset="-127"/>
+                        </a:rPr>
+                        <a:t>BMI + SEX</a:t>
+                      </a:r>
+                      <a:endParaRPr lang="ko-KR" altLang="en-US" sz="1100" dirty="0">
+                        <a:latin typeface="프리젠테이션 4 Regular" pitchFamily="2" charset="-127"/>
+                        <a:ea typeface="프리젠테이션 4 Regular" pitchFamily="2" charset="-127"/>
+                      </a:endParaRPr>
+                    </a:p>
+                  </a:txBody>
+                  <a:tcPr>
+                    <a:noFill/>
+                  </a:tcPr>
+                </a:tc>
+                <a:tc>
+                  <a:txBody>
+                    <a:bodyPr/>
+                    <a:lstStyle/>
+                    <a:p>
+                      <a:pPr marL="0" marR="0" lvl="0" indent="0" algn="ctr" defTabSz="914400" rtl="0" eaLnBrk="1" fontAlgn="auto" latinLnBrk="1" hangingPunct="1">
+                        <a:lnSpc>
+                          <a:spcPct val="100000"/>
+                        </a:lnSpc>
+                        <a:spcBef>
+                          <a:spcPts val="0"/>
+                        </a:spcBef>
+                        <a:spcAft>
+                          <a:spcPts val="0"/>
+                        </a:spcAft>
+                        <a:buClrTx/>
+                        <a:buSzTx/>
+                        <a:buFontTx/>
+                        <a:buNone/>
+                        <a:tabLst/>
+                        <a:defRPr/>
+                      </a:pPr>
+                      <a:r>
+                        <a:rPr lang="en-US" altLang="ko-KR" sz="1100" dirty="0" err="1"/>
+                        <a:t>pearson</a:t>
+                      </a:r>
+                      <a:endParaRPr lang="ko-KR" altLang="en-US" sz="1100" dirty="0"/>
+                    </a:p>
+                  </a:txBody>
+                  <a:tcPr>
+                    <a:noFill/>
+                  </a:tcPr>
+                </a:tc>
+                <a:tc>
+                  <a:txBody>
+                    <a:bodyPr/>
+                    <a:lstStyle/>
+                    <a:p>
+                      <a:pPr algn="ctr" latinLnBrk="1"/>
+                      <a:r>
+                        <a:rPr lang="en-US" altLang="ko-KR" sz="1100" b="0" i="0" kern="1200" dirty="0">
+                          <a:solidFill>
+                            <a:schemeClr val="tx1"/>
+                          </a:solidFill>
+                          <a:effectLst/>
+                          <a:latin typeface="+mn-lt"/>
+                          <a:ea typeface="+mn-ea"/>
+                          <a:cs typeface="+mn-cs"/>
+                        </a:rPr>
+                        <a:t>-0.202946</a:t>
+                      </a:r>
+                      <a:endParaRPr lang="ko-KR" altLang="en-US" sz="1100" dirty="0">
+                        <a:latin typeface="프리젠테이션 4 Regular" pitchFamily="2" charset="-127"/>
+                        <a:ea typeface="프리젠테이션 4 Regular" pitchFamily="2" charset="-127"/>
+                      </a:endParaRPr>
+                    </a:p>
+                  </a:txBody>
+                  <a:tcPr>
+                    <a:noFill/>
+                  </a:tcPr>
+                </a:tc>
+                <a:tc>
+                  <a:txBody>
+                    <a:bodyPr/>
+                    <a:lstStyle/>
+                    <a:p>
+                      <a:pPr algn="ctr"/>
+                      <a:r>
+                        <a:rPr lang="en-US" altLang="ko-KR" sz="1100" b="0" i="0" kern="1200" dirty="0">
+                          <a:solidFill>
+                            <a:schemeClr val="tx1"/>
+                          </a:solidFill>
+                          <a:effectLst/>
+                          <a:latin typeface="+mn-lt"/>
+                          <a:ea typeface="+mn-ea"/>
+                          <a:cs typeface="+mn-cs"/>
+                        </a:rPr>
+                        <a:t>[-0.48, 0.11]</a:t>
+                      </a:r>
+                      <a:endParaRPr lang="en-US" altLang="ko-KR" sz="1100" dirty="0">
+                        <a:effectLst/>
+                      </a:endParaRPr>
+                    </a:p>
+                  </a:txBody>
+                  <a:tcPr marL="76200" marR="76200" marT="38100" marB="38100" anchor="ctr">
+                    <a:noFill/>
+                  </a:tcPr>
+                </a:tc>
+                <a:tc>
+                  <a:txBody>
+                    <a:bodyPr/>
+                    <a:lstStyle/>
+                    <a:p>
+                      <a:pPr algn="ctr"/>
+                      <a:r>
+                        <a:rPr lang="en-US" altLang="ko-KR" sz="1100" b="0" i="0" kern="1200" dirty="0">
+                          <a:solidFill>
+                            <a:schemeClr val="tx1"/>
+                          </a:solidFill>
+                          <a:effectLst/>
+                          <a:latin typeface="+mn-lt"/>
+                          <a:ea typeface="+mn-ea"/>
+                          <a:cs typeface="+mn-cs"/>
+                        </a:rPr>
+                        <a:t>0.197393</a:t>
+                      </a:r>
+                      <a:endParaRPr lang="en-US" altLang="ko-KR" sz="1100" dirty="0">
+                        <a:effectLst/>
+                      </a:endParaRPr>
+                    </a:p>
+                  </a:txBody>
+                  <a:tcPr marL="76200" marR="76200" marT="38100" marB="38100" anchor="ctr">
+                    <a:noFill/>
+                  </a:tcPr>
+                </a:tc>
+                <a:extLst>
+                  <a:ext uri="{0D108BD9-81ED-4DB2-BD59-A6C34878D82A}">
+                    <a16:rowId xmlns:a16="http://schemas.microsoft.com/office/drawing/2014/main" val="3271683042"/>
+                  </a:ext>
+                </a:extLst>
+              </a:tr>
+              <a:tr h="352604">
+                <a:tc>
+                  <a:txBody>
+                    <a:bodyPr/>
+                    <a:lstStyle/>
+                    <a:p>
+                      <a:pPr algn="ctr" latinLnBrk="1"/>
+                      <a:r>
+                        <a:rPr lang="en-US" altLang="ko-KR" sz="1100" dirty="0"/>
+                        <a:t>NKT1</a:t>
+                      </a:r>
+                      <a:endParaRPr lang="ko-KR" altLang="en-US" sz="1100" dirty="0">
+                        <a:latin typeface="프리젠테이션 4 Regular" pitchFamily="2" charset="-127"/>
+                        <a:ea typeface="프리젠테이션 4 Regular" pitchFamily="2" charset="-127"/>
+                      </a:endParaRPr>
+                    </a:p>
+                  </a:txBody>
+                  <a:tcPr>
+                    <a:noFill/>
+                  </a:tcPr>
+                </a:tc>
+                <a:tc>
+                  <a:txBody>
+                    <a:bodyPr/>
+                    <a:lstStyle/>
+                    <a:p>
+                      <a:pPr marL="0" marR="0" lvl="0" indent="0" algn="ctr" defTabSz="914400" rtl="0" eaLnBrk="1" fontAlgn="auto" latinLnBrk="1" hangingPunct="1">
+                        <a:lnSpc>
+                          <a:spcPct val="100000"/>
+                        </a:lnSpc>
+                        <a:spcBef>
+                          <a:spcPts val="0"/>
+                        </a:spcBef>
+                        <a:spcAft>
+                          <a:spcPts val="0"/>
+                        </a:spcAft>
+                        <a:buClrTx/>
+                        <a:buSzTx/>
+                        <a:buFontTx/>
+                        <a:buNone/>
+                        <a:tabLst/>
+                        <a:defRPr/>
+                      </a:pPr>
+                      <a:r>
+                        <a:rPr lang="en-US" altLang="ko-KR" sz="1100" dirty="0">
+                          <a:latin typeface="프리젠테이션 4 Regular" pitchFamily="2" charset="-127"/>
+                          <a:ea typeface="프리젠테이션 4 Regular" pitchFamily="2" charset="-127"/>
+                        </a:rPr>
+                        <a:t>BMI + SEX</a:t>
+                      </a:r>
+                      <a:endParaRPr lang="ko-KR" altLang="en-US" sz="1100" dirty="0">
+                        <a:latin typeface="프리젠테이션 4 Regular" pitchFamily="2" charset="-127"/>
+                        <a:ea typeface="프리젠테이션 4 Regular" pitchFamily="2" charset="-127"/>
+                      </a:endParaRPr>
+                    </a:p>
+                  </a:txBody>
+                  <a:tcPr>
+                    <a:noFill/>
+                  </a:tcPr>
+                </a:tc>
+                <a:tc>
+                  <a:txBody>
+                    <a:bodyPr/>
+                    <a:lstStyle/>
+                    <a:p>
+                      <a:pPr marL="0" marR="0" lvl="0" indent="0" algn="ctr" defTabSz="914400" rtl="0" eaLnBrk="1" fontAlgn="auto" latinLnBrk="1" hangingPunct="1">
+                        <a:lnSpc>
+                          <a:spcPct val="100000"/>
+                        </a:lnSpc>
+                        <a:spcBef>
+                          <a:spcPts val="0"/>
+                        </a:spcBef>
+                        <a:spcAft>
+                          <a:spcPts val="0"/>
+                        </a:spcAft>
+                        <a:buClrTx/>
+                        <a:buSzTx/>
+                        <a:buFontTx/>
+                        <a:buNone/>
+                        <a:tabLst/>
+                        <a:defRPr/>
+                      </a:pPr>
+                      <a:r>
+                        <a:rPr lang="en-US" altLang="ko-KR" sz="1100" dirty="0" err="1"/>
+                        <a:t>pearson</a:t>
+                      </a:r>
+                      <a:endParaRPr lang="ko-KR" altLang="en-US" sz="1100" dirty="0"/>
+                    </a:p>
+                  </a:txBody>
+                  <a:tcPr>
+                    <a:noFill/>
+                  </a:tcPr>
+                </a:tc>
+                <a:tc>
+                  <a:txBody>
+                    <a:bodyPr/>
+                    <a:lstStyle/>
+                    <a:p>
+                      <a:pPr algn="ctr" latinLnBrk="1"/>
+                      <a:r>
+                        <a:rPr lang="en-US" altLang="ko-KR" sz="1100" b="0" i="0" kern="1200" dirty="0">
+                          <a:solidFill>
+                            <a:schemeClr val="tx1"/>
+                          </a:solidFill>
+                          <a:effectLst/>
+                          <a:latin typeface="+mn-lt"/>
+                          <a:ea typeface="+mn-ea"/>
+                          <a:cs typeface="+mn-cs"/>
+                        </a:rPr>
+                        <a:t>-0.120495</a:t>
+                      </a:r>
+                      <a:endParaRPr lang="ko-KR" altLang="en-US" sz="1100" dirty="0">
+                        <a:latin typeface="프리젠테이션 4 Regular" pitchFamily="2" charset="-127"/>
+                        <a:ea typeface="프리젠테이션 4 Regular" pitchFamily="2" charset="-127"/>
+                      </a:endParaRPr>
+                    </a:p>
+                  </a:txBody>
+                  <a:tcPr>
+                    <a:noFill/>
+                  </a:tcPr>
+                </a:tc>
+                <a:tc>
+                  <a:txBody>
+                    <a:bodyPr/>
+                    <a:lstStyle/>
+                    <a:p>
+                      <a:pPr algn="ctr" latinLnBrk="1"/>
+                      <a:r>
+                        <a:rPr lang="en-US" altLang="ko-KR" sz="1100" b="0" i="0" kern="1200" dirty="0">
+                          <a:solidFill>
+                            <a:schemeClr val="tx1"/>
+                          </a:solidFill>
+                          <a:effectLst/>
+                          <a:latin typeface="+mn-lt"/>
+                          <a:ea typeface="+mn-ea"/>
+                          <a:cs typeface="+mn-cs"/>
+                        </a:rPr>
+                        <a:t>[-0.41, 0.19]</a:t>
+                      </a:r>
+                      <a:endParaRPr lang="ko-KR" altLang="en-US" sz="1100" dirty="0">
+                        <a:latin typeface="프리젠테이션 4 Regular" pitchFamily="2" charset="-127"/>
+                        <a:ea typeface="프리젠테이션 4 Regular" pitchFamily="2" charset="-127"/>
+                      </a:endParaRPr>
+                    </a:p>
+                  </a:txBody>
+                  <a:tcPr>
+                    <a:noFill/>
+                  </a:tcPr>
+                </a:tc>
+                <a:tc>
+                  <a:txBody>
+                    <a:bodyPr/>
+                    <a:lstStyle/>
+                    <a:p>
+                      <a:pPr algn="ctr"/>
+                      <a:r>
+                        <a:rPr lang="en-US" altLang="ko-KR" sz="1100" b="0" i="0" kern="1200" dirty="0">
+                          <a:solidFill>
+                            <a:schemeClr val="tx1"/>
+                          </a:solidFill>
+                          <a:effectLst/>
+                          <a:latin typeface="+mn-lt"/>
+                          <a:ea typeface="+mn-ea"/>
+                          <a:cs typeface="+mn-cs"/>
+                        </a:rPr>
+                        <a:t>0.447189</a:t>
+                      </a:r>
+                      <a:endParaRPr lang="en-US" altLang="ko-KR" sz="1100" dirty="0">
+                        <a:effectLst/>
+                      </a:endParaRPr>
+                    </a:p>
+                  </a:txBody>
+                  <a:tcPr marL="76200" marR="76200" marT="38100" marB="38100" anchor="ctr">
+                    <a:noFill/>
+                  </a:tcPr>
+                </a:tc>
+                <a:extLst>
+                  <a:ext uri="{0D108BD9-81ED-4DB2-BD59-A6C34878D82A}">
+                    <a16:rowId xmlns:a16="http://schemas.microsoft.com/office/drawing/2014/main" val="1765941834"/>
+                  </a:ext>
+                </a:extLst>
+              </a:tr>
+              <a:tr h="352604">
+                <a:tc>
+                  <a:txBody>
+                    <a:bodyPr/>
+                    <a:lstStyle/>
+                    <a:p>
+                      <a:pPr algn="ctr" latinLnBrk="1"/>
+                      <a:r>
+                        <a:rPr lang="en-US" altLang="ko-KR" sz="1100" dirty="0"/>
+                        <a:t>T</a:t>
+                      </a:r>
+                      <a:endParaRPr lang="ko-KR" altLang="en-US" sz="1100" dirty="0">
+                        <a:latin typeface="프리젠테이션 4 Regular" pitchFamily="2" charset="-127"/>
+                        <a:ea typeface="프리젠테이션 4 Regular" pitchFamily="2" charset="-127"/>
+                      </a:endParaRPr>
+                    </a:p>
+                  </a:txBody>
+                  <a:tcPr>
+                    <a:solidFill>
+                      <a:schemeClr val="bg2"/>
+                    </a:solidFill>
+                  </a:tcPr>
+                </a:tc>
+                <a:tc>
+                  <a:txBody>
+                    <a:bodyPr/>
+                    <a:lstStyle/>
+                    <a:p>
+                      <a:pPr algn="ctr" latinLnBrk="1"/>
+                      <a:r>
+                        <a:rPr lang="en-US" altLang="ko-KR" sz="1100" dirty="0">
+                          <a:latin typeface="프리젠테이션 4 Regular" pitchFamily="2" charset="-127"/>
+                          <a:ea typeface="프리젠테이션 4 Regular" pitchFamily="2" charset="-127"/>
+                        </a:rPr>
+                        <a:t>BMI + SEX</a:t>
+                      </a:r>
+                      <a:endParaRPr lang="ko-KR" altLang="en-US" sz="1100" dirty="0">
+                        <a:latin typeface="프리젠테이션 4 Regular" pitchFamily="2" charset="-127"/>
+                        <a:ea typeface="프리젠테이션 4 Regular" pitchFamily="2" charset="-127"/>
+                      </a:endParaRPr>
+                    </a:p>
+                  </a:txBody>
+                  <a:tcPr>
+                    <a:solidFill>
+                      <a:schemeClr val="bg2"/>
+                    </a:solidFill>
+                  </a:tcPr>
+                </a:tc>
+                <a:tc>
+                  <a:txBody>
+                    <a:bodyPr/>
+                    <a:lstStyle/>
+                    <a:p>
+                      <a:pPr marL="0" marR="0" lvl="0" indent="0" algn="ctr" defTabSz="914400" rtl="0" eaLnBrk="1" fontAlgn="auto" latinLnBrk="1" hangingPunct="1">
+                        <a:lnSpc>
+                          <a:spcPct val="100000"/>
+                        </a:lnSpc>
+                        <a:spcBef>
+                          <a:spcPts val="0"/>
+                        </a:spcBef>
+                        <a:spcAft>
+                          <a:spcPts val="0"/>
+                        </a:spcAft>
+                        <a:buClrTx/>
+                        <a:buSzTx/>
+                        <a:buFontTx/>
+                        <a:buNone/>
+                        <a:tabLst/>
+                        <a:defRPr/>
+                      </a:pPr>
+                      <a:r>
+                        <a:rPr lang="en-US" altLang="ko-KR" sz="1100" dirty="0" err="1"/>
+                        <a:t>pearson</a:t>
+                      </a:r>
+                      <a:endParaRPr lang="ko-KR" altLang="en-US" sz="1100" dirty="0"/>
+                    </a:p>
+                  </a:txBody>
+                  <a:tcPr>
+                    <a:solidFill>
+                      <a:schemeClr val="bg2"/>
+                    </a:solidFill>
+                  </a:tcPr>
+                </a:tc>
+                <a:tc>
+                  <a:txBody>
+                    <a:bodyPr/>
+                    <a:lstStyle/>
+                    <a:p>
+                      <a:pPr algn="ctr"/>
+                      <a:r>
+                        <a:rPr lang="en-US" altLang="ko-KR" sz="1100" b="0" i="0" kern="1200" dirty="0">
+                          <a:solidFill>
+                            <a:schemeClr val="tx1"/>
+                          </a:solidFill>
+                          <a:effectLst/>
+                          <a:latin typeface="+mn-lt"/>
+                          <a:ea typeface="+mn-ea"/>
+                          <a:cs typeface="+mn-cs"/>
+                        </a:rPr>
+                        <a:t>0.348037</a:t>
+                      </a:r>
+                      <a:endParaRPr lang="en-US" altLang="ko-KR" sz="1100" dirty="0">
+                        <a:effectLst/>
+                      </a:endParaRPr>
+                    </a:p>
+                  </a:txBody>
+                  <a:tcPr marL="76200" marR="76200" marT="38100" marB="38100" anchor="ctr">
+                    <a:solidFill>
+                      <a:schemeClr val="bg2"/>
+                    </a:solidFill>
+                  </a:tcPr>
+                </a:tc>
+                <a:tc>
+                  <a:txBody>
+                    <a:bodyPr/>
+                    <a:lstStyle/>
+                    <a:p>
+                      <a:pPr algn="ctr"/>
+                      <a:r>
+                        <a:rPr lang="en-US" altLang="ko-KR" sz="1100" b="0" i="0" kern="1200" dirty="0">
+                          <a:solidFill>
+                            <a:schemeClr val="tx1"/>
+                          </a:solidFill>
+                          <a:effectLst/>
+                          <a:latin typeface="+mn-lt"/>
+                          <a:ea typeface="+mn-ea"/>
+                          <a:cs typeface="+mn-cs"/>
+                        </a:rPr>
+                        <a:t>[0.05, 0.59]</a:t>
+                      </a:r>
+                      <a:endParaRPr lang="ko-KR" altLang="en-US" sz="1100" dirty="0">
+                        <a:effectLst/>
+                      </a:endParaRPr>
+                    </a:p>
+                  </a:txBody>
+                  <a:tcPr marL="76200" marR="76200" marT="38100" marB="38100" anchor="ctr">
+                    <a:solidFill>
+                      <a:schemeClr val="bg2"/>
+                    </a:solidFill>
+                  </a:tcPr>
+                </a:tc>
+                <a:tc>
+                  <a:txBody>
+                    <a:bodyPr/>
+                    <a:lstStyle/>
+                    <a:p>
+                      <a:pPr algn="ctr"/>
+                      <a:r>
+                        <a:rPr lang="en-US" altLang="ko-KR" sz="1100" b="0" i="0" kern="1200" dirty="0">
+                          <a:solidFill>
+                            <a:schemeClr val="tx1"/>
+                          </a:solidFill>
+                          <a:effectLst/>
+                          <a:latin typeface="+mn-lt"/>
+                          <a:ea typeface="+mn-ea"/>
+                          <a:cs typeface="+mn-cs"/>
+                        </a:rPr>
+                        <a:t>0.023908</a:t>
+                      </a:r>
+                      <a:endParaRPr lang="en-US" altLang="ko-KR" sz="1100" dirty="0">
+                        <a:effectLst/>
+                      </a:endParaRPr>
+                    </a:p>
+                  </a:txBody>
+                  <a:tcPr marL="76200" marR="76200" marT="38100" marB="38100" anchor="ctr">
+                    <a:solidFill>
+                      <a:schemeClr val="bg2"/>
+                    </a:solidFill>
+                  </a:tcPr>
+                </a:tc>
+                <a:extLst>
+                  <a:ext uri="{0D108BD9-81ED-4DB2-BD59-A6C34878D82A}">
+                    <a16:rowId xmlns:a16="http://schemas.microsoft.com/office/drawing/2014/main" val="549252989"/>
                   </a:ext>
                 </a:extLst>
               </a:tr>
@@ -8470,275 +9166,6 @@
           </a:graphicData>
         </a:graphic>
       </p:graphicFrame>
-      <p:sp>
-        <p:nvSpPr>
-          <p:cNvPr id="13" name="내용 개체 틀 2">
-            <a:extLst>
-              <a:ext uri="{FF2B5EF4-FFF2-40B4-BE49-F238E27FC236}">
-                <a16:creationId xmlns:a16="http://schemas.microsoft.com/office/drawing/2014/main" id="{6873B8AD-86D3-4E65-A3FB-04A8FC815271}"/>
-              </a:ext>
-            </a:extLst>
-          </p:cNvPr>
-          <p:cNvSpPr txBox="1">
-            <a:spLocks/>
-          </p:cNvSpPr>
-          <p:nvPr/>
-        </p:nvSpPr>
-        <p:spPr>
-          <a:xfrm>
-            <a:off x="1137137" y="6330214"/>
-            <a:ext cx="10515600" cy="489444"/>
-          </a:xfrm>
-          <a:prstGeom prst="rect">
-            <a:avLst/>
-          </a:prstGeom>
-        </p:spPr>
-        <p:txBody>
-          <a:bodyPr vert="horz" lIns="91440" tIns="45720" rIns="91440" bIns="45720" rtlCol="0">
-            <a:normAutofit/>
-          </a:bodyPr>
-          <a:lstStyle>
-            <a:lvl1pPr marL="228600" indent="-228600" algn="l" defTabSz="914400" rtl="0" eaLnBrk="1" latinLnBrk="1" hangingPunct="1">
-              <a:lnSpc>
-                <a:spcPct val="90000"/>
-              </a:lnSpc>
-              <a:spcBef>
-                <a:spcPts val="1000"/>
-              </a:spcBef>
-              <a:buFont typeface="Arial" panose="020B0604020202020204" pitchFamily="34" charset="0"/>
-              <a:buChar char="•"/>
-              <a:defRPr sz="2800" kern="1200">
-                <a:solidFill>
-                  <a:schemeClr val="tx1"/>
-                </a:solidFill>
-                <a:latin typeface="+mn-lt"/>
-                <a:ea typeface="+mn-ea"/>
-                <a:cs typeface="+mn-cs"/>
-              </a:defRPr>
-            </a:lvl1pPr>
-            <a:lvl2pPr marL="685800" indent="-228600" algn="l" defTabSz="914400" rtl="0" eaLnBrk="1" latinLnBrk="1" hangingPunct="1">
-              <a:lnSpc>
-                <a:spcPct val="90000"/>
-              </a:lnSpc>
-              <a:spcBef>
-                <a:spcPts val="500"/>
-              </a:spcBef>
-              <a:buFont typeface="Arial" panose="020B0604020202020204" pitchFamily="34" charset="0"/>
-              <a:buChar char="•"/>
-              <a:defRPr sz="2400" kern="1200">
-                <a:solidFill>
-                  <a:schemeClr val="tx1"/>
-                </a:solidFill>
-                <a:latin typeface="+mn-lt"/>
-                <a:ea typeface="+mn-ea"/>
-                <a:cs typeface="+mn-cs"/>
-              </a:defRPr>
-            </a:lvl2pPr>
-            <a:lvl3pPr marL="1143000" indent="-228600" algn="l" defTabSz="914400" rtl="0" eaLnBrk="1" latinLnBrk="1" hangingPunct="1">
-              <a:lnSpc>
-                <a:spcPct val="90000"/>
-              </a:lnSpc>
-              <a:spcBef>
-                <a:spcPts val="500"/>
-              </a:spcBef>
-              <a:buFont typeface="Arial" panose="020B0604020202020204" pitchFamily="34" charset="0"/>
-              <a:buChar char="•"/>
-              <a:defRPr sz="2000" kern="1200">
-                <a:solidFill>
-                  <a:schemeClr val="tx1"/>
-                </a:solidFill>
-                <a:latin typeface="+mn-lt"/>
-                <a:ea typeface="+mn-ea"/>
-                <a:cs typeface="+mn-cs"/>
-              </a:defRPr>
-            </a:lvl3pPr>
-            <a:lvl4pPr marL="1600200" indent="-228600" algn="l" defTabSz="914400" rtl="0" eaLnBrk="1" latinLnBrk="1" hangingPunct="1">
-              <a:lnSpc>
-                <a:spcPct val="90000"/>
-              </a:lnSpc>
-              <a:spcBef>
-                <a:spcPts val="500"/>
-              </a:spcBef>
-              <a:buFont typeface="Arial" panose="020B0604020202020204" pitchFamily="34" charset="0"/>
-              <a:buChar char="•"/>
-              <a:defRPr sz="1800" kern="1200">
-                <a:solidFill>
-                  <a:schemeClr val="tx1"/>
-                </a:solidFill>
-                <a:latin typeface="+mn-lt"/>
-                <a:ea typeface="+mn-ea"/>
-                <a:cs typeface="+mn-cs"/>
-              </a:defRPr>
-            </a:lvl4pPr>
-            <a:lvl5pPr marL="2057400" indent="-228600" algn="l" defTabSz="914400" rtl="0" eaLnBrk="1" latinLnBrk="1" hangingPunct="1">
-              <a:lnSpc>
-                <a:spcPct val="90000"/>
-              </a:lnSpc>
-              <a:spcBef>
-                <a:spcPts val="500"/>
-              </a:spcBef>
-              <a:buFont typeface="Arial" panose="020B0604020202020204" pitchFamily="34" charset="0"/>
-              <a:buChar char="•"/>
-              <a:defRPr sz="1800" kern="1200">
-                <a:solidFill>
-                  <a:schemeClr val="tx1"/>
-                </a:solidFill>
-                <a:latin typeface="+mn-lt"/>
-                <a:ea typeface="+mn-ea"/>
-                <a:cs typeface="+mn-cs"/>
-              </a:defRPr>
-            </a:lvl5pPr>
-            <a:lvl6pPr marL="2514600" indent="-228600" algn="l" defTabSz="914400" rtl="0" eaLnBrk="1" latinLnBrk="1" hangingPunct="1">
-              <a:lnSpc>
-                <a:spcPct val="90000"/>
-              </a:lnSpc>
-              <a:spcBef>
-                <a:spcPts val="500"/>
-              </a:spcBef>
-              <a:buFont typeface="Arial" panose="020B0604020202020204" pitchFamily="34" charset="0"/>
-              <a:buChar char="•"/>
-              <a:defRPr sz="1800" kern="1200">
-                <a:solidFill>
-                  <a:schemeClr val="tx1"/>
-                </a:solidFill>
-                <a:latin typeface="+mn-lt"/>
-                <a:ea typeface="+mn-ea"/>
-                <a:cs typeface="+mn-cs"/>
-              </a:defRPr>
-            </a:lvl6pPr>
-            <a:lvl7pPr marL="2971800" indent="-228600" algn="l" defTabSz="914400" rtl="0" eaLnBrk="1" latinLnBrk="1" hangingPunct="1">
-              <a:lnSpc>
-                <a:spcPct val="90000"/>
-              </a:lnSpc>
-              <a:spcBef>
-                <a:spcPts val="500"/>
-              </a:spcBef>
-              <a:buFont typeface="Arial" panose="020B0604020202020204" pitchFamily="34" charset="0"/>
-              <a:buChar char="•"/>
-              <a:defRPr sz="1800" kern="1200">
-                <a:solidFill>
-                  <a:schemeClr val="tx1"/>
-                </a:solidFill>
-                <a:latin typeface="+mn-lt"/>
-                <a:ea typeface="+mn-ea"/>
-                <a:cs typeface="+mn-cs"/>
-              </a:defRPr>
-            </a:lvl7pPr>
-            <a:lvl8pPr marL="3429000" indent="-228600" algn="l" defTabSz="914400" rtl="0" eaLnBrk="1" latinLnBrk="1" hangingPunct="1">
-              <a:lnSpc>
-                <a:spcPct val="90000"/>
-              </a:lnSpc>
-              <a:spcBef>
-                <a:spcPts val="500"/>
-              </a:spcBef>
-              <a:buFont typeface="Arial" panose="020B0604020202020204" pitchFamily="34" charset="0"/>
-              <a:buChar char="•"/>
-              <a:defRPr sz="1800" kern="1200">
-                <a:solidFill>
-                  <a:schemeClr val="tx1"/>
-                </a:solidFill>
-                <a:latin typeface="+mn-lt"/>
-                <a:ea typeface="+mn-ea"/>
-                <a:cs typeface="+mn-cs"/>
-              </a:defRPr>
-            </a:lvl8pPr>
-            <a:lvl9pPr marL="3886200" indent="-228600" algn="l" defTabSz="914400" rtl="0" eaLnBrk="1" latinLnBrk="1" hangingPunct="1">
-              <a:lnSpc>
-                <a:spcPct val="90000"/>
-              </a:lnSpc>
-              <a:spcBef>
-                <a:spcPts val="500"/>
-              </a:spcBef>
-              <a:buFont typeface="Arial" panose="020B0604020202020204" pitchFamily="34" charset="0"/>
-              <a:buChar char="•"/>
-              <a:defRPr sz="1800" kern="1200">
-                <a:solidFill>
-                  <a:schemeClr val="tx1"/>
-                </a:solidFill>
-                <a:latin typeface="+mn-lt"/>
-                <a:ea typeface="+mn-ea"/>
-                <a:cs typeface="+mn-cs"/>
-              </a:defRPr>
-            </a:lvl9pPr>
-          </a:lstStyle>
-          <a:p>
-            <a:pPr marL="0" indent="0">
-              <a:buFont typeface="Arial" panose="020B0604020202020204" pitchFamily="34" charset="0"/>
-              <a:buNone/>
-            </a:pPr>
-            <a:r>
-              <a:rPr lang="ko-KR" altLang="en-US" sz="2000" dirty="0">
-                <a:latin typeface="프리젠테이션 4 Regular" pitchFamily="2" charset="-127"/>
-                <a:ea typeface="프리젠테이션 4 Regular" pitchFamily="2" charset="-127"/>
-              </a:rPr>
-              <a:t>결과 </a:t>
-            </a:r>
-            <a:r>
-              <a:rPr lang="en-US" altLang="ko-KR" sz="2000" dirty="0">
-                <a:latin typeface="프리젠테이션 4 Regular" pitchFamily="2" charset="-127"/>
-                <a:ea typeface="프리젠테이션 4 Regular" pitchFamily="2" charset="-127"/>
-              </a:rPr>
-              <a:t>: BMI</a:t>
-            </a:r>
-            <a:r>
-              <a:rPr lang="ko-KR" altLang="en-US" sz="2000" dirty="0">
-                <a:latin typeface="프리젠테이션 4 Regular" pitchFamily="2" charset="-127"/>
-                <a:ea typeface="프리젠테이션 4 Regular" pitchFamily="2" charset="-127"/>
-              </a:rPr>
-              <a:t>를 통제변수로 두었을 때</a:t>
-            </a:r>
-            <a:r>
-              <a:rPr lang="en-US" altLang="ko-KR" sz="2000" dirty="0">
-                <a:latin typeface="프리젠테이션 4 Regular" pitchFamily="2" charset="-127"/>
-                <a:ea typeface="프리젠테이션 4 Regular" pitchFamily="2" charset="-127"/>
-              </a:rPr>
-              <a:t>, HLADR </a:t>
-            </a:r>
-            <a:r>
-              <a:rPr lang="ko-KR" altLang="en-US" sz="2000" dirty="0">
-                <a:latin typeface="프리젠테이션 4 Regular" pitchFamily="2" charset="-127"/>
-                <a:ea typeface="프리젠테이션 4 Regular" pitchFamily="2" charset="-127"/>
-              </a:rPr>
-              <a:t>와 </a:t>
-            </a:r>
-            <a:r>
-              <a:rPr lang="en-US" altLang="ko-KR" sz="2000" dirty="0">
-                <a:latin typeface="프리젠테이션 4 Regular" pitchFamily="2" charset="-127"/>
-                <a:ea typeface="프리젠테이션 4 Regular" pitchFamily="2" charset="-127"/>
-              </a:rPr>
-              <a:t>T</a:t>
-            </a:r>
-            <a:r>
-              <a:rPr lang="ko-KR" altLang="en-US" sz="2000" dirty="0">
-                <a:latin typeface="프리젠테이션 4 Regular" pitchFamily="2" charset="-127"/>
-                <a:ea typeface="프리젠테이션 4 Regular" pitchFamily="2" charset="-127"/>
-              </a:rPr>
-              <a:t>만 </a:t>
-            </a:r>
-            <a:r>
-              <a:rPr lang="en-US" altLang="ko-KR" sz="2000" dirty="0">
-                <a:latin typeface="프리젠테이션 4 Regular" pitchFamily="2" charset="-127"/>
-                <a:ea typeface="프리젠테이션 4 Regular" pitchFamily="2" charset="-127"/>
-              </a:rPr>
-              <a:t>age</a:t>
-            </a:r>
-            <a:r>
-              <a:rPr lang="ko-KR" altLang="en-US" sz="2000" dirty="0">
-                <a:latin typeface="프리젠테이션 4 Regular" pitchFamily="2" charset="-127"/>
-                <a:ea typeface="프리젠테이션 4 Regular" pitchFamily="2" charset="-127"/>
-              </a:rPr>
-              <a:t>와 유의미한 결과를 보였습니다</a:t>
-            </a:r>
-            <a:r>
-              <a:rPr lang="en-US" altLang="ko-KR" sz="2000" dirty="0">
-                <a:latin typeface="프리젠테이션 4 Regular" pitchFamily="2" charset="-127"/>
-                <a:ea typeface="프리젠테이션 4 Regular" pitchFamily="2" charset="-127"/>
-              </a:rPr>
-              <a:t>. </a:t>
-            </a:r>
-          </a:p>
-        </p:txBody>
-      </p:sp>
       <p:sp>
         <p:nvSpPr>
           <p:cNvPr id="4" name="직사각형 3">
@@ -8753,8 +9180,8 @@
         </p:nvSpPr>
         <p:spPr>
           <a:xfrm>
-            <a:off x="946637" y="1393149"/>
-            <a:ext cx="4656993" cy="840380"/>
+            <a:off x="946637" y="1455656"/>
+            <a:ext cx="10132041" cy="460166"/>
           </a:xfrm>
           <a:prstGeom prst="rect">
             <a:avLst/>
@@ -8786,178 +9213,60 @@
           <a:lstStyle/>
           <a:p>
             <a:r>
+              <a:rPr lang="en-US" altLang="ko-KR">
+                <a:latin typeface="프리젠테이션 4 Regular" pitchFamily="2" charset="-127"/>
+                <a:ea typeface="프리젠테이션 4 Regular" pitchFamily="2" charset="-127"/>
+              </a:rPr>
+              <a:t>CI95%</a:t>
+            </a:r>
+            <a:r>
+              <a:rPr lang="ko-KR" altLang="en-US" dirty="0">
+                <a:latin typeface="프리젠테이션 4 Regular" pitchFamily="2" charset="-127"/>
+                <a:ea typeface="프리젠테이션 4 Regular" pitchFamily="2" charset="-127"/>
+              </a:rPr>
+              <a:t> 지표</a:t>
+            </a:r>
+            <a:r>
               <a:rPr lang="en-US" altLang="ko-KR" dirty="0">
                 <a:latin typeface="프리젠테이션 4 Regular" pitchFamily="2" charset="-127"/>
                 <a:ea typeface="프리젠테이션 4 Regular" pitchFamily="2" charset="-127"/>
               </a:rPr>
-              <a:t>CI95%</a:t>
+              <a:t>: </a:t>
             </a:r>
             <a:r>
               <a:rPr lang="ko-KR" altLang="en-US" dirty="0">
                 <a:latin typeface="프리젠테이션 4 Regular" pitchFamily="2" charset="-127"/>
                 <a:ea typeface="프리젠테이션 4 Regular" pitchFamily="2" charset="-127"/>
               </a:rPr>
-              <a:t> 지표</a:t>
+              <a:t>부분상관계수 𝑟에 대한 </a:t>
             </a:r>
             <a:r>
               <a:rPr lang="en-US" altLang="ko-KR" dirty="0">
                 <a:latin typeface="프리젠테이션 4 Regular" pitchFamily="2" charset="-127"/>
                 <a:ea typeface="프리젠테이션 4 Regular" pitchFamily="2" charset="-127"/>
               </a:rPr>
-              <a:t>: </a:t>
+              <a:t>95% </a:t>
             </a:r>
             <a:r>
               <a:rPr lang="ko-KR" altLang="en-US" dirty="0">
                 <a:latin typeface="프리젠테이션 4 Regular" pitchFamily="2" charset="-127"/>
                 <a:ea typeface="프리젠테이션 4 Regular" pitchFamily="2" charset="-127"/>
               </a:rPr>
-              <a:t>부분상관계수 𝑟에 대한 </a:t>
+              <a:t>신뢰구간</a:t>
             </a:r>
             <a:r>
               <a:rPr lang="en-US" altLang="ko-KR" dirty="0">
                 <a:latin typeface="프리젠테이션 4 Regular" pitchFamily="2" charset="-127"/>
                 <a:ea typeface="프리젠테이션 4 Regular" pitchFamily="2" charset="-127"/>
               </a:rPr>
-              <a:t>95% </a:t>
+              <a:t>(Confidence Interval)- 0</a:t>
             </a:r>
             <a:r>
               <a:rPr lang="ko-KR" altLang="en-US" dirty="0">
                 <a:latin typeface="프리젠테이션 4 Regular" pitchFamily="2" charset="-127"/>
                 <a:ea typeface="프리젠테이션 4 Regular" pitchFamily="2" charset="-127"/>
               </a:rPr>
-              <a:t>신뢰구간</a:t>
-            </a:r>
-            <a:r>
-              <a:rPr lang="en-US" altLang="ko-KR" dirty="0">
-                <a:latin typeface="프리젠테이션 4 Regular" pitchFamily="2" charset="-127"/>
-                <a:ea typeface="프리젠테이션 4 Regular" pitchFamily="2" charset="-127"/>
-              </a:rPr>
-              <a:t>(Confidence Interval)</a:t>
-            </a:r>
-          </a:p>
-          <a:p>
-            <a:r>
-              <a:rPr lang="en-US" altLang="ko-KR" dirty="0">
-                <a:latin typeface="프리젠테이션 4 Regular" pitchFamily="2" charset="-127"/>
-                <a:ea typeface="프리젠테이션 4 Regular" pitchFamily="2" charset="-127"/>
-              </a:rPr>
-              <a:t>- 0</a:t>
-            </a:r>
-            <a:r>
-              <a:rPr lang="ko-KR" altLang="en-US" dirty="0">
-                <a:latin typeface="프리젠테이션 4 Regular" pitchFamily="2" charset="-127"/>
-                <a:ea typeface="프리젠테이션 4 Regular" pitchFamily="2" charset="-127"/>
-              </a:rPr>
               <a:t>을 포함하지 않으면 유의미한 결과라고 판단</a:t>
-            </a:r>
-            <a:endParaRPr lang="en-US" altLang="ko-KR" dirty="0">
-              <a:latin typeface="프리젠테이션 4 Regular" pitchFamily="2" charset="-127"/>
-              <a:ea typeface="프리젠테이션 4 Regular" pitchFamily="2" charset="-127"/>
-            </a:endParaRPr>
-          </a:p>
-        </p:txBody>
-      </p:sp>
-      <p:sp>
-        <p:nvSpPr>
-          <p:cNvPr id="7" name="직사각형 6">
-            <a:extLst>
-              <a:ext uri="{FF2B5EF4-FFF2-40B4-BE49-F238E27FC236}">
-                <a16:creationId xmlns:a16="http://schemas.microsoft.com/office/drawing/2014/main" id="{FE7D22F1-08AB-410A-A498-C28521C3E115}"/>
-              </a:ext>
-            </a:extLst>
-          </p:cNvPr>
-          <p:cNvSpPr/>
-          <p:nvPr/>
-        </p:nvSpPr>
-        <p:spPr>
-          <a:xfrm>
-            <a:off x="5858606" y="1392337"/>
-            <a:ext cx="4656993" cy="840380"/>
-          </a:xfrm>
-          <a:prstGeom prst="rect">
-            <a:avLst/>
-          </a:prstGeom>
-          <a:solidFill>
-            <a:schemeClr val="accent1">
-              <a:lumMod val="75000"/>
-            </a:schemeClr>
-          </a:solidFill>
-        </p:spPr>
-        <p:style>
-          <a:lnRef idx="2">
-            <a:schemeClr val="accent1">
-              <a:shade val="50000"/>
-            </a:schemeClr>
-          </a:lnRef>
-          <a:fillRef idx="1">
-            <a:schemeClr val="accent1"/>
-          </a:fillRef>
-          <a:effectRef idx="0">
-            <a:schemeClr val="accent1"/>
-          </a:effectRef>
-          <a:fontRef idx="minor">
-            <a:schemeClr val="lt1"/>
-          </a:fontRef>
-        </p:style>
-        <p:txBody>
-          <a:bodyPr rtlCol="0" anchor="ctr"/>
-          <a:lstStyle/>
-          <a:p>
-            <a:r>
-              <a:rPr lang="en-US" altLang="ko-KR" dirty="0">
-                <a:latin typeface="프리젠테이션 4 Regular" pitchFamily="2" charset="-127"/>
-                <a:ea typeface="프리젠테이션 4 Regular" pitchFamily="2" charset="-127"/>
-              </a:rPr>
-              <a:t>R</a:t>
-            </a:r>
-            <a:r>
-              <a:rPr lang="ko-KR" altLang="en-US" dirty="0">
-                <a:latin typeface="프리젠테이션 4 Regular" pitchFamily="2" charset="-127"/>
-                <a:ea typeface="프리젠테이션 4 Regular" pitchFamily="2" charset="-127"/>
-              </a:rPr>
-              <a:t>지표</a:t>
-            </a:r>
-            <a:r>
-              <a:rPr lang="en-US" altLang="ko-KR" dirty="0">
-                <a:latin typeface="프리젠테이션 4 Regular" pitchFamily="2" charset="-127"/>
-                <a:ea typeface="프리젠테이션 4 Regular" pitchFamily="2" charset="-127"/>
-              </a:rPr>
-              <a:t>: BMI</a:t>
-            </a:r>
-            <a:r>
-              <a:rPr lang="ko-KR" altLang="en-US" dirty="0">
-                <a:latin typeface="프리젠테이션 4 Regular" pitchFamily="2" charset="-127"/>
-                <a:ea typeface="프리젠테이션 4 Regular" pitchFamily="2" charset="-127"/>
-              </a:rPr>
-              <a:t>를 통제한 뒤에도 </a:t>
-            </a:r>
-            <a:r>
-              <a:rPr lang="en-US" altLang="ko-KR" dirty="0">
-                <a:latin typeface="프리젠테이션 4 Regular" pitchFamily="2" charset="-127"/>
-                <a:ea typeface="프리젠테이션 4 Regular" pitchFamily="2" charset="-127"/>
-              </a:rPr>
-              <a:t>Age</a:t>
-            </a:r>
-            <a:r>
-              <a:rPr lang="ko-KR" altLang="en-US" dirty="0">
-                <a:latin typeface="프리젠테이션 4 Regular" pitchFamily="2" charset="-127"/>
-                <a:ea typeface="프리젠테이션 4 Regular" pitchFamily="2" charset="-127"/>
-              </a:rPr>
-              <a:t>와 </a:t>
-            </a:r>
-            <a:r>
-              <a:rPr lang="en-US" altLang="ko-KR" dirty="0">
-                <a:latin typeface="프리젠테이션 4 Regular" pitchFamily="2" charset="-127"/>
-                <a:ea typeface="프리젠테이션 4 Regular" pitchFamily="2" charset="-127"/>
-              </a:rPr>
-              <a:t>PAN%</a:t>
-            </a:r>
-            <a:r>
-              <a:rPr lang="ko-KR" altLang="en-US" dirty="0">
-                <a:latin typeface="프리젠테이션 4 Regular" pitchFamily="2" charset="-127"/>
-                <a:ea typeface="프리젠테이션 4 Regular" pitchFamily="2" charset="-127"/>
-              </a:rPr>
-              <a:t>의가 얼마나 같이 변하는지 나타내는 상관계수</a:t>
             </a:r>
             <a:endParaRPr lang="en-US" altLang="ko-KR" dirty="0">
               <a:latin typeface="프리젠테이션 4 Regular" pitchFamily="2" charset="-127"/>
@@ -9030,1518 +9339,6 @@
                 <a:ea typeface="프리젠테이션 5 Medium" pitchFamily="2" charset="-127"/>
               </a:rPr>
               <a:t>Task1. PAN% </a:t>
-            </a:r>
-            <a:r>
-              <a:rPr lang="ko-KR" altLang="en-US" dirty="0"/>
-              <a:t>↔</a:t>
-            </a:r>
-            <a:r>
-              <a:rPr lang="en-US" altLang="ko-KR" sz="3600" dirty="0">
-                <a:latin typeface="프리젠테이션 5 Medium" pitchFamily="2" charset="-127"/>
-                <a:ea typeface="프리젠테이션 5 Medium" pitchFamily="2" charset="-127"/>
-              </a:rPr>
-              <a:t> Age, partial</a:t>
-            </a:r>
-            <a:r>
-              <a:rPr lang="ko-KR" altLang="en-US" sz="3600" dirty="0">
-                <a:latin typeface="프리젠테이션 5 Medium" pitchFamily="2" charset="-127"/>
-                <a:ea typeface="프리젠테이션 5 Medium" pitchFamily="2" charset="-127"/>
-              </a:rPr>
-              <a:t> </a:t>
-            </a:r>
-            <a:r>
-              <a:rPr lang="en-US" altLang="ko-KR" sz="3600" dirty="0">
-                <a:latin typeface="프리젠테이션 5 Medium" pitchFamily="2" charset="-127"/>
-                <a:ea typeface="프리젠테이션 5 Medium" pitchFamily="2" charset="-127"/>
-              </a:rPr>
-              <a:t>correlation</a:t>
-            </a:r>
-            <a:r>
-              <a:rPr lang="ko-KR" altLang="en-US" sz="3600" dirty="0">
-                <a:latin typeface="프리젠테이션 5 Medium" pitchFamily="2" charset="-127"/>
-                <a:ea typeface="프리젠테이션 5 Medium" pitchFamily="2" charset="-127"/>
-              </a:rPr>
-              <a:t> </a:t>
-            </a:r>
-            <a:r>
-              <a:rPr lang="en-US" altLang="ko-KR" sz="3600" dirty="0">
-                <a:latin typeface="프리젠테이션 5 Medium" pitchFamily="2" charset="-127"/>
-                <a:ea typeface="프리젠테이션 5 Medium" pitchFamily="2" charset="-127"/>
-              </a:rPr>
-              <a:t>analysis</a:t>
-            </a:r>
-            <a:endParaRPr lang="ko-KR" altLang="en-US" sz="3600" dirty="0">
-              <a:latin typeface="프리젠테이션 5 Medium" pitchFamily="2" charset="-127"/>
-              <a:ea typeface="프리젠테이션 5 Medium" pitchFamily="2" charset="-127"/>
-            </a:endParaRPr>
-          </a:p>
-        </p:txBody>
-      </p:sp>
-      <p:sp>
-        <p:nvSpPr>
-          <p:cNvPr id="3" name="내용 개체 틀 2">
-            <a:extLst>
-              <a:ext uri="{FF2B5EF4-FFF2-40B4-BE49-F238E27FC236}">
-                <a16:creationId xmlns:a16="http://schemas.microsoft.com/office/drawing/2014/main" id="{BA7632E5-1D37-485F-B68F-BADA4B1FB2F0}"/>
-              </a:ext>
-            </a:extLst>
-          </p:cNvPr>
-          <p:cNvSpPr>
-            <a:spLocks noGrp="1"/>
-          </p:cNvSpPr>
-          <p:nvPr>
-            <p:ph idx="1"/>
-          </p:nvPr>
-        </p:nvSpPr>
-        <p:spPr>
-          <a:xfrm>
-            <a:off x="946637" y="1016850"/>
-            <a:ext cx="10515600" cy="343027"/>
-          </a:xfrm>
-        </p:spPr>
-        <p:txBody>
-          <a:bodyPr>
-            <a:normAutofit lnSpcReduction="10000"/>
-          </a:bodyPr>
-          <a:lstStyle/>
-          <a:p>
-            <a:pPr marL="0" indent="0">
-              <a:buNone/>
-            </a:pPr>
-            <a:r>
-              <a:rPr lang="en-US" altLang="ko-KR" sz="2000" dirty="0" err="1">
-                <a:highlight>
-                  <a:srgbClr val="FFFF00"/>
-                </a:highlight>
-                <a:latin typeface="프리젠테이션 4 Regular" pitchFamily="2" charset="-127"/>
-                <a:ea typeface="프리젠테이션 4 Regular" pitchFamily="2" charset="-127"/>
-              </a:rPr>
-              <a:t>BMI+Sex</a:t>
-            </a:r>
-            <a:r>
-              <a:rPr lang="ko-KR" altLang="en-US" sz="2000" dirty="0">
-                <a:latin typeface="프리젠테이션 4 Regular" pitchFamily="2" charset="-127"/>
-                <a:ea typeface="프리젠테이션 4 Regular" pitchFamily="2" charset="-127"/>
-              </a:rPr>
-              <a:t>를 통제변수로 둔 후</a:t>
-            </a:r>
-            <a:r>
-              <a:rPr lang="en-US" altLang="ko-KR" sz="2000" dirty="0">
-                <a:latin typeface="프리젠테이션 4 Regular" pitchFamily="2" charset="-127"/>
-                <a:ea typeface="프리젠테이션 4 Regular" pitchFamily="2" charset="-127"/>
-              </a:rPr>
-              <a:t>,  </a:t>
-            </a:r>
-            <a:r>
-              <a:rPr lang="ko-KR" altLang="en-US" sz="2000" dirty="0">
-                <a:latin typeface="프리젠테이션 4 Regular" pitchFamily="2" charset="-127"/>
-                <a:ea typeface="프리젠테이션 4 Regular" pitchFamily="2" charset="-127"/>
-              </a:rPr>
-              <a:t>각 </a:t>
-            </a:r>
-            <a:r>
-              <a:rPr lang="en-US" altLang="ko-KR" sz="2000" dirty="0">
-                <a:solidFill>
-                  <a:srgbClr val="FF0000"/>
-                </a:solidFill>
-                <a:latin typeface="프리젠테이션 4 Regular" pitchFamily="2" charset="-127"/>
-                <a:ea typeface="프리젠테이션 4 Regular" pitchFamily="2" charset="-127"/>
-              </a:rPr>
-              <a:t>PAN%</a:t>
-            </a:r>
-            <a:r>
-              <a:rPr lang="ko-KR" altLang="en-US" sz="2000" dirty="0">
-                <a:solidFill>
-                  <a:srgbClr val="FF0000"/>
-                </a:solidFill>
-                <a:latin typeface="프리젠테이션 4 Regular" pitchFamily="2" charset="-127"/>
-                <a:ea typeface="프리젠테이션 4 Regular" pitchFamily="2" charset="-127"/>
-              </a:rPr>
-              <a:t> </a:t>
-            </a:r>
-            <a:r>
-              <a:rPr lang="en-US" altLang="ko-KR" sz="2000" dirty="0">
-                <a:solidFill>
-                  <a:srgbClr val="FF0000"/>
-                </a:solidFill>
-                <a:latin typeface="프리젠테이션 4 Regular" pitchFamily="2" charset="-127"/>
-                <a:ea typeface="프리젠테이션 4 Regular" pitchFamily="2" charset="-127"/>
-              </a:rPr>
-              <a:t>&amp; </a:t>
-            </a:r>
-            <a:r>
-              <a:rPr lang="ko-KR" altLang="en-US" sz="2000" dirty="0">
-                <a:solidFill>
-                  <a:srgbClr val="FF0000"/>
-                </a:solidFill>
-                <a:latin typeface="프리젠테이션 4 Regular" pitchFamily="2" charset="-127"/>
-                <a:ea typeface="프리젠테이션 4 Regular" pitchFamily="2" charset="-127"/>
-              </a:rPr>
-              <a:t>나이</a:t>
-            </a:r>
-            <a:r>
-              <a:rPr lang="ko-KR" altLang="en-US" sz="2000" dirty="0">
-                <a:latin typeface="프리젠테이션 4 Regular" pitchFamily="2" charset="-127"/>
-                <a:ea typeface="프리젠테이션 4 Regular" pitchFamily="2" charset="-127"/>
-              </a:rPr>
-              <a:t>와 </a:t>
-            </a:r>
-            <a:r>
-              <a:rPr lang="en-US" altLang="ko-KR" sz="2000" dirty="0">
-                <a:highlight>
-                  <a:srgbClr val="FFFF00"/>
-                </a:highlight>
-                <a:latin typeface="프리젠테이션 4 Regular" pitchFamily="2" charset="-127"/>
-                <a:ea typeface="프리젠테이션 4 Regular" pitchFamily="2" charset="-127"/>
-              </a:rPr>
-              <a:t>partial correlation </a:t>
-            </a:r>
-            <a:r>
-              <a:rPr lang="ko-KR" altLang="en-US" sz="2000" dirty="0">
-                <a:highlight>
-                  <a:srgbClr val="FFFF00"/>
-                </a:highlight>
-                <a:latin typeface="프리젠테이션 4 Regular" pitchFamily="2" charset="-127"/>
-                <a:ea typeface="프리젠테이션 4 Regular" pitchFamily="2" charset="-127"/>
-              </a:rPr>
-              <a:t>분석 </a:t>
-            </a:r>
-            <a:r>
-              <a:rPr lang="en-US" altLang="ko-KR" sz="2000" dirty="0">
-                <a:latin typeface="프리젠테이션 4 Regular" pitchFamily="2" charset="-127"/>
-                <a:ea typeface="프리젠테이션 4 Regular" pitchFamily="2" charset="-127"/>
-              </a:rPr>
-              <a:t>(</a:t>
-            </a:r>
-            <a:r>
-              <a:rPr lang="ko-KR" altLang="en-US" sz="2000" dirty="0">
-                <a:latin typeface="프리젠테이션 4 Regular" pitchFamily="2" charset="-127"/>
-                <a:ea typeface="프리젠테이션 4 Regular" pitchFamily="2" charset="-127"/>
-              </a:rPr>
-              <a:t>일대일로</a:t>
-            </a:r>
-            <a:r>
-              <a:rPr lang="en-US" altLang="ko-KR" sz="2000" dirty="0">
-                <a:latin typeface="프리젠테이션 4 Regular" pitchFamily="2" charset="-127"/>
-                <a:ea typeface="프리젠테이션 4 Regular" pitchFamily="2" charset="-127"/>
-              </a:rPr>
-              <a:t>)</a:t>
-            </a:r>
-          </a:p>
-          <a:p>
-            <a:pPr marL="0" indent="0">
-              <a:buNone/>
-            </a:pPr>
-            <a:endParaRPr lang="en-US" altLang="ko-KR" sz="2000" dirty="0">
-              <a:latin typeface="프리젠테이션 4 Regular" pitchFamily="2" charset="-127"/>
-              <a:ea typeface="프리젠테이션 4 Regular" pitchFamily="2" charset="-127"/>
-            </a:endParaRPr>
-          </a:p>
-        </p:txBody>
-      </p:sp>
-      <p:graphicFrame>
-        <p:nvGraphicFramePr>
-          <p:cNvPr id="12" name="표 11">
-            <a:extLst>
-              <a:ext uri="{FF2B5EF4-FFF2-40B4-BE49-F238E27FC236}">
-                <a16:creationId xmlns:a16="http://schemas.microsoft.com/office/drawing/2014/main" id="{5FE71F43-6A34-4415-A038-A510DFAE493E}"/>
-              </a:ext>
-            </a:extLst>
-          </p:cNvPr>
-          <p:cNvGraphicFramePr>
-            <a:graphicFrameLocks noGrp="1"/>
-          </p:cNvGraphicFramePr>
-          <p:nvPr>
-            <p:extLst>
-              <p:ext uri="{D42A27DB-BD31-4B8C-83A1-F6EECF244321}">
-                <p14:modId xmlns:p14="http://schemas.microsoft.com/office/powerpoint/2010/main" val="1818462248"/>
-              </p:ext>
-            </p:extLst>
-          </p:nvPr>
-        </p:nvGraphicFramePr>
-        <p:xfrm>
-          <a:off x="1264482" y="1603673"/>
-          <a:ext cx="9180000" cy="3810000"/>
-        </p:xfrm>
-        <a:graphic>
-          <a:graphicData uri="http://schemas.openxmlformats.org/drawingml/2006/table">
-            <a:tbl>
-              <a:tblPr firstRow="1" bandRow="1">
-                <a:tableStyleId>{F2DE63D5-997A-4646-A377-4702673A728D}</a:tableStyleId>
-              </a:tblPr>
-              <a:tblGrid>
-                <a:gridCol w="1530000">
-                  <a:extLst>
-                    <a:ext uri="{9D8B030D-6E8A-4147-A177-3AD203B41FA5}">
-                      <a16:colId xmlns:a16="http://schemas.microsoft.com/office/drawing/2014/main" val="3817914715"/>
-                    </a:ext>
-                  </a:extLst>
-                </a:gridCol>
-                <a:gridCol w="1530000">
-                  <a:extLst>
-                    <a:ext uri="{9D8B030D-6E8A-4147-A177-3AD203B41FA5}">
-                      <a16:colId xmlns:a16="http://schemas.microsoft.com/office/drawing/2014/main" val="1328710090"/>
-                    </a:ext>
-                  </a:extLst>
-                </a:gridCol>
-                <a:gridCol w="1530000">
-                  <a:extLst>
-                    <a:ext uri="{9D8B030D-6E8A-4147-A177-3AD203B41FA5}">
-                      <a16:colId xmlns:a16="http://schemas.microsoft.com/office/drawing/2014/main" val="2892634231"/>
-                    </a:ext>
-                  </a:extLst>
-                </a:gridCol>
-                <a:gridCol w="1530000">
-                  <a:extLst>
-                    <a:ext uri="{9D8B030D-6E8A-4147-A177-3AD203B41FA5}">
-                      <a16:colId xmlns:a16="http://schemas.microsoft.com/office/drawing/2014/main" val="2291883617"/>
-                    </a:ext>
-                  </a:extLst>
-                </a:gridCol>
-                <a:gridCol w="1530000">
-                  <a:extLst>
-                    <a:ext uri="{9D8B030D-6E8A-4147-A177-3AD203B41FA5}">
-                      <a16:colId xmlns:a16="http://schemas.microsoft.com/office/drawing/2014/main" val="3169242423"/>
-                    </a:ext>
-                  </a:extLst>
-                </a:gridCol>
-                <a:gridCol w="1530000">
-                  <a:extLst>
-                    <a:ext uri="{9D8B030D-6E8A-4147-A177-3AD203B41FA5}">
-                      <a16:colId xmlns:a16="http://schemas.microsoft.com/office/drawing/2014/main" val="4222895381"/>
-                    </a:ext>
-                  </a:extLst>
-                </a:gridCol>
-              </a:tblGrid>
-              <a:tr h="267728">
-                <a:tc>
-                  <a:txBody>
-                    <a:bodyPr/>
-                    <a:lstStyle/>
-                    <a:p>
-                      <a:pPr algn="ctr" latinLnBrk="1"/>
-                      <a:r>
-                        <a:rPr lang="en-US" altLang="ko-KR" sz="1600" dirty="0"/>
-                        <a:t>PAN%</a:t>
-                      </a:r>
-                      <a:endParaRPr lang="ko-KR" altLang="en-US" sz="1600" dirty="0">
-                        <a:latin typeface="프리젠테이션 4 Regular" pitchFamily="2" charset="-127"/>
-                        <a:ea typeface="프리젠테이션 4 Regular" pitchFamily="2" charset="-127"/>
-                      </a:endParaRPr>
-                    </a:p>
-                  </a:txBody>
-                  <a:tcPr/>
-                </a:tc>
-                <a:tc>
-                  <a:txBody>
-                    <a:bodyPr/>
-                    <a:lstStyle/>
-                    <a:p>
-                      <a:pPr algn="ctr" latinLnBrk="1"/>
-                      <a:r>
-                        <a:rPr lang="en-US" altLang="ko-KR" sz="1600" dirty="0" err="1">
-                          <a:latin typeface="프리젠테이션 4 Regular" pitchFamily="2" charset="-127"/>
-                          <a:ea typeface="프리젠테이션 4 Regular" pitchFamily="2" charset="-127"/>
-                        </a:rPr>
-                        <a:t>covar</a:t>
-                      </a:r>
-                      <a:endParaRPr lang="ko-KR" altLang="en-US" sz="1600" dirty="0">
-                        <a:latin typeface="프리젠테이션 4 Regular" pitchFamily="2" charset="-127"/>
-                        <a:ea typeface="프리젠테이션 4 Regular" pitchFamily="2" charset="-127"/>
-                      </a:endParaRPr>
-                    </a:p>
-                  </a:txBody>
-                  <a:tcPr/>
-                </a:tc>
-                <a:tc>
-                  <a:txBody>
-                    <a:bodyPr/>
-                    <a:lstStyle/>
-                    <a:p>
-                      <a:pPr algn="ctr" latinLnBrk="1"/>
-                      <a:r>
-                        <a:rPr lang="en-US" altLang="ko-KR" sz="1600" dirty="0"/>
-                        <a:t>Correlation </a:t>
-                      </a:r>
-                      <a:endParaRPr lang="ko-KR" altLang="en-US" sz="1600" dirty="0">
-                        <a:latin typeface="프리젠테이션 4 Regular" pitchFamily="2" charset="-127"/>
-                        <a:ea typeface="프리젠테이션 4 Regular" pitchFamily="2" charset="-127"/>
-                      </a:endParaRPr>
-                    </a:p>
-                  </a:txBody>
-                  <a:tcPr/>
-                </a:tc>
-                <a:tc>
-                  <a:txBody>
-                    <a:bodyPr/>
-                    <a:lstStyle/>
-                    <a:p>
-                      <a:pPr algn="ctr" latinLnBrk="1"/>
-                      <a:r>
-                        <a:rPr lang="en-US" altLang="ko-KR" sz="1600" dirty="0"/>
-                        <a:t>r</a:t>
-                      </a:r>
-                      <a:endParaRPr lang="ko-KR" altLang="en-US" sz="1600" dirty="0">
-                        <a:latin typeface="프리젠테이션 4 Regular" pitchFamily="2" charset="-127"/>
-                        <a:ea typeface="프리젠테이션 4 Regular" pitchFamily="2" charset="-127"/>
-                      </a:endParaRPr>
-                    </a:p>
-                  </a:txBody>
-                  <a:tcPr/>
-                </a:tc>
-                <a:tc>
-                  <a:txBody>
-                    <a:bodyPr/>
-                    <a:lstStyle/>
-                    <a:p>
-                      <a:pPr algn="ctr" latinLnBrk="1"/>
-                      <a:r>
-                        <a:rPr lang="en-US" altLang="ko-KR" sz="1600" dirty="0"/>
-                        <a:t>CI95%</a:t>
-                      </a:r>
-                      <a:endParaRPr lang="ko-KR" altLang="en-US" sz="1600" dirty="0">
-                        <a:latin typeface="프리젠테이션 4 Regular" pitchFamily="2" charset="-127"/>
-                        <a:ea typeface="프리젠테이션 4 Regular" pitchFamily="2" charset="-127"/>
-                      </a:endParaRPr>
-                    </a:p>
-                  </a:txBody>
-                  <a:tcPr/>
-                </a:tc>
-                <a:tc>
-                  <a:txBody>
-                    <a:bodyPr/>
-                    <a:lstStyle/>
-                    <a:p>
-                      <a:pPr algn="ctr" latinLnBrk="1"/>
-                      <a:r>
-                        <a:rPr lang="en-US" altLang="ko-KR" sz="1600" dirty="0"/>
-                        <a:t> p-</a:t>
-                      </a:r>
-                      <a:r>
-                        <a:rPr lang="en-US" altLang="ko-KR" sz="1600" dirty="0" err="1"/>
-                        <a:t>val</a:t>
-                      </a:r>
-                      <a:endParaRPr lang="ko-KR" altLang="en-US" sz="1600" dirty="0">
-                        <a:latin typeface="프리젠테이션 4 Regular" pitchFamily="2" charset="-127"/>
-                        <a:ea typeface="프리젠테이션 4 Regular" pitchFamily="2" charset="-127"/>
-                      </a:endParaRPr>
-                    </a:p>
-                  </a:txBody>
-                  <a:tcPr/>
-                </a:tc>
-                <a:extLst>
-                  <a:ext uri="{0D108BD9-81ED-4DB2-BD59-A6C34878D82A}">
-                    <a16:rowId xmlns:a16="http://schemas.microsoft.com/office/drawing/2014/main" val="329325752"/>
-                  </a:ext>
-                </a:extLst>
-              </a:tr>
-              <a:tr h="579120">
-                <a:tc>
-                  <a:txBody>
-                    <a:bodyPr/>
-                    <a:lstStyle/>
-                    <a:p>
-                      <a:pPr algn="ctr" latinLnBrk="1"/>
-                      <a:r>
-                        <a:rPr lang="en-US" altLang="ko-KR" sz="1600" dirty="0"/>
-                        <a:t>B</a:t>
-                      </a:r>
-                      <a:endParaRPr lang="ko-KR" altLang="en-US" sz="1600" dirty="0">
-                        <a:latin typeface="프리젠테이션 4 Regular" pitchFamily="2" charset="-127"/>
-                        <a:ea typeface="프리젠테이션 4 Regular" pitchFamily="2" charset="-127"/>
-                      </a:endParaRPr>
-                    </a:p>
-                  </a:txBody>
-                  <a:tcPr/>
-                </a:tc>
-                <a:tc>
-                  <a:txBody>
-                    <a:bodyPr/>
-                    <a:lstStyle/>
-                    <a:p>
-                      <a:pPr algn="ctr" latinLnBrk="1"/>
-                      <a:r>
-                        <a:rPr lang="en-US" altLang="ko-KR" sz="1600" dirty="0">
-                          <a:latin typeface="프리젠테이션 4 Regular" pitchFamily="2" charset="-127"/>
-                          <a:ea typeface="프리젠테이션 4 Regular" pitchFamily="2" charset="-127"/>
-                        </a:rPr>
-                        <a:t>BMI + SEX</a:t>
-                      </a:r>
-                      <a:endParaRPr lang="ko-KR" altLang="en-US" sz="1600" dirty="0">
-                        <a:latin typeface="프리젠테이션 4 Regular" pitchFamily="2" charset="-127"/>
-                        <a:ea typeface="프리젠테이션 4 Regular" pitchFamily="2" charset="-127"/>
-                      </a:endParaRPr>
-                    </a:p>
-                  </a:txBody>
-                  <a:tcPr/>
-                </a:tc>
-                <a:tc>
-                  <a:txBody>
-                    <a:bodyPr/>
-                    <a:lstStyle/>
-                    <a:p>
-                      <a:pPr algn="ctr" latinLnBrk="1"/>
-                      <a:r>
-                        <a:rPr lang="en-US" altLang="ko-KR" sz="1600" dirty="0" err="1"/>
-                        <a:t>pearson</a:t>
-                      </a:r>
-                      <a:endParaRPr lang="ko-KR" altLang="en-US" sz="1600" dirty="0">
-                        <a:latin typeface="프리젠테이션 4 Regular" pitchFamily="2" charset="-127"/>
-                        <a:ea typeface="프리젠테이션 4 Regular" pitchFamily="2" charset="-127"/>
-                      </a:endParaRPr>
-                    </a:p>
-                  </a:txBody>
-                  <a:tcPr/>
-                </a:tc>
-                <a:tc>
-                  <a:txBody>
-                    <a:bodyPr/>
-                    <a:lstStyle/>
-                    <a:p>
-                      <a:pPr algn="ctr" latinLnBrk="1"/>
-                      <a:r>
-                        <a:rPr lang="en-US" altLang="ko-KR" sz="1800" b="0" i="0" kern="1200" dirty="0">
-                          <a:solidFill>
-                            <a:schemeClr val="tx1"/>
-                          </a:solidFill>
-                          <a:effectLst/>
-                          <a:latin typeface="+mn-lt"/>
-                          <a:ea typeface="+mn-ea"/>
-                          <a:cs typeface="+mn-cs"/>
-                        </a:rPr>
-                        <a:t>0.10035</a:t>
-                      </a:r>
-                      <a:endParaRPr lang="ko-KR" altLang="en-US" sz="1600" dirty="0">
-                        <a:latin typeface="프리젠테이션 4 Regular" pitchFamily="2" charset="-127"/>
-                        <a:ea typeface="프리젠테이션 4 Regular" pitchFamily="2" charset="-127"/>
-                      </a:endParaRPr>
-                    </a:p>
-                  </a:txBody>
-                  <a:tcPr/>
-                </a:tc>
-                <a:tc>
-                  <a:txBody>
-                    <a:bodyPr/>
-                    <a:lstStyle/>
-                    <a:p>
-                      <a:pPr algn="ctr" latinLnBrk="1"/>
-                      <a:r>
-                        <a:rPr lang="en-US" altLang="ko-KR" sz="1800" b="0" i="0" kern="1200" dirty="0">
-                          <a:solidFill>
-                            <a:schemeClr val="tx1"/>
-                          </a:solidFill>
-                          <a:effectLst/>
-                          <a:latin typeface="+mn-lt"/>
-                          <a:ea typeface="+mn-ea"/>
-                          <a:cs typeface="+mn-cs"/>
-                        </a:rPr>
-                        <a:t>[-0.21, 0.39]</a:t>
-                      </a:r>
-                      <a:endParaRPr lang="ko-KR" altLang="en-US" sz="1600" dirty="0">
-                        <a:latin typeface="프리젠테이션 4 Regular" pitchFamily="2" charset="-127"/>
-                        <a:ea typeface="프리젠테이션 4 Regular" pitchFamily="2" charset="-127"/>
-                      </a:endParaRPr>
-                    </a:p>
-                  </a:txBody>
-                  <a:tcPr/>
-                </a:tc>
-                <a:tc>
-                  <a:txBody>
-                    <a:bodyPr/>
-                    <a:lstStyle/>
-                    <a:p>
-                      <a:pPr algn="ctr" latinLnBrk="1"/>
-                      <a:r>
-                        <a:rPr lang="en-US" altLang="ko-KR" sz="1800" b="0" i="0" kern="1200" dirty="0">
-                          <a:solidFill>
-                            <a:schemeClr val="tx1"/>
-                          </a:solidFill>
-                          <a:effectLst/>
-                          <a:latin typeface="+mn-lt"/>
-                          <a:ea typeface="+mn-ea"/>
-                          <a:cs typeface="+mn-cs"/>
-                        </a:rPr>
-                        <a:t>0.527183</a:t>
-                      </a:r>
-                      <a:endParaRPr lang="ko-KR" altLang="en-US" sz="1600" dirty="0">
-                        <a:latin typeface="프리젠테이션 4 Regular" pitchFamily="2" charset="-127"/>
-                        <a:ea typeface="프리젠테이션 4 Regular" pitchFamily="2" charset="-127"/>
-                      </a:endParaRPr>
-                    </a:p>
-                  </a:txBody>
-                  <a:tcPr/>
-                </a:tc>
-                <a:extLst>
-                  <a:ext uri="{0D108BD9-81ED-4DB2-BD59-A6C34878D82A}">
-                    <a16:rowId xmlns:a16="http://schemas.microsoft.com/office/drawing/2014/main" val="2513259529"/>
-                  </a:ext>
-                </a:extLst>
-              </a:tr>
-              <a:tr h="579120">
-                <a:tc>
-                  <a:txBody>
-                    <a:bodyPr/>
-                    <a:lstStyle/>
-                    <a:p>
-                      <a:pPr algn="ctr" latinLnBrk="1"/>
-                      <a:r>
-                        <a:rPr lang="en-US" altLang="ko-KR" sz="1600" dirty="0"/>
-                        <a:t>CD11b</a:t>
-                      </a:r>
-                      <a:endParaRPr lang="ko-KR" altLang="en-US" sz="1600" dirty="0">
-                        <a:latin typeface="프리젠테이션 4 Regular" pitchFamily="2" charset="-127"/>
-                        <a:ea typeface="프리젠테이션 4 Regular" pitchFamily="2" charset="-127"/>
-                      </a:endParaRPr>
-                    </a:p>
-                  </a:txBody>
-                  <a:tcPr/>
-                </a:tc>
-                <a:tc>
-                  <a:txBody>
-                    <a:bodyPr/>
-                    <a:lstStyle/>
-                    <a:p>
-                      <a:pPr algn="ctr" latinLnBrk="1"/>
-                      <a:r>
-                        <a:rPr lang="en-US" altLang="ko-KR" sz="1600" dirty="0">
-                          <a:latin typeface="프리젠테이션 4 Regular" pitchFamily="2" charset="-127"/>
-                          <a:ea typeface="프리젠테이션 4 Regular" pitchFamily="2" charset="-127"/>
-                        </a:rPr>
-                        <a:t>BMI + SEX</a:t>
-                      </a:r>
-                      <a:endParaRPr lang="ko-KR" altLang="en-US" sz="1600" dirty="0">
-                        <a:latin typeface="프리젠테이션 4 Regular" pitchFamily="2" charset="-127"/>
-                        <a:ea typeface="프리젠테이션 4 Regular" pitchFamily="2" charset="-127"/>
-                      </a:endParaRPr>
-                    </a:p>
-                  </a:txBody>
-                  <a:tcPr/>
-                </a:tc>
-                <a:tc>
-                  <a:txBody>
-                    <a:bodyPr/>
-                    <a:lstStyle/>
-                    <a:p>
-                      <a:pPr algn="ctr" latinLnBrk="1"/>
-                      <a:r>
-                        <a:rPr lang="en-US" altLang="ko-KR" sz="1600" dirty="0" err="1"/>
-                        <a:t>pearson</a:t>
-                      </a:r>
-                      <a:endParaRPr lang="ko-KR" altLang="en-US" sz="1600" dirty="0">
-                        <a:latin typeface="프리젠테이션 4 Regular" pitchFamily="2" charset="-127"/>
-                        <a:ea typeface="프리젠테이션 4 Regular" pitchFamily="2" charset="-127"/>
-                      </a:endParaRPr>
-                    </a:p>
-                  </a:txBody>
-                  <a:tcPr/>
-                </a:tc>
-                <a:tc>
-                  <a:txBody>
-                    <a:bodyPr/>
-                    <a:lstStyle/>
-                    <a:p>
-                      <a:pPr algn="ctr" latinLnBrk="1"/>
-                      <a:r>
-                        <a:rPr lang="en-US" altLang="ko-KR" sz="1800" b="0" i="0" kern="1200" dirty="0">
-                          <a:solidFill>
-                            <a:schemeClr val="tx1"/>
-                          </a:solidFill>
-                          <a:effectLst/>
-                          <a:latin typeface="+mn-lt"/>
-                          <a:ea typeface="+mn-ea"/>
-                          <a:cs typeface="+mn-cs"/>
-                        </a:rPr>
-                        <a:t>-0.262178</a:t>
-                      </a:r>
-                      <a:endParaRPr lang="ko-KR" altLang="en-US" sz="1600" dirty="0">
-                        <a:latin typeface="프리젠테이션 4 Regular" pitchFamily="2" charset="-127"/>
-                        <a:ea typeface="프리젠테이션 4 Regular" pitchFamily="2" charset="-127"/>
-                      </a:endParaRPr>
-                    </a:p>
-                  </a:txBody>
-                  <a:tcPr/>
-                </a:tc>
-                <a:tc>
-                  <a:txBody>
-                    <a:bodyPr/>
-                    <a:lstStyle/>
-                    <a:p>
-                      <a:pPr algn="ctr"/>
-                      <a:r>
-                        <a:rPr lang="en-US" altLang="ko-KR" sz="1800" b="0" i="0" kern="1200" dirty="0">
-                          <a:solidFill>
-                            <a:schemeClr val="tx1"/>
-                          </a:solidFill>
-                          <a:effectLst/>
-                          <a:latin typeface="+mn-lt"/>
-                          <a:ea typeface="+mn-ea"/>
-                          <a:cs typeface="+mn-cs"/>
-                        </a:rPr>
-                        <a:t>[-0.52, 0.05]</a:t>
-                      </a:r>
-                      <a:endParaRPr lang="en-US" altLang="ko-KR" sz="1600" dirty="0">
-                        <a:effectLst/>
-                      </a:endParaRPr>
-                    </a:p>
-                  </a:txBody>
-                  <a:tcPr marL="76200" marR="76200" marT="38100" marB="38100" anchor="ctr"/>
-                </a:tc>
-                <a:tc>
-                  <a:txBody>
-                    <a:bodyPr/>
-                    <a:lstStyle/>
-                    <a:p>
-                      <a:pPr algn="ctr"/>
-                      <a:r>
-                        <a:rPr lang="en-US" altLang="ko-KR" sz="1800" b="0" i="0" kern="1200" dirty="0">
-                          <a:solidFill>
-                            <a:schemeClr val="tx1"/>
-                          </a:solidFill>
-                          <a:effectLst/>
-                          <a:latin typeface="+mn-lt"/>
-                          <a:ea typeface="+mn-ea"/>
-                          <a:cs typeface="+mn-cs"/>
-                        </a:rPr>
-                        <a:t>0.093481</a:t>
-                      </a:r>
-                      <a:endParaRPr lang="en-US" altLang="ko-KR" sz="1600" dirty="0">
-                        <a:effectLst/>
-                      </a:endParaRPr>
-                    </a:p>
-                  </a:txBody>
-                  <a:tcPr marL="76200" marR="76200" marT="38100" marB="38100" anchor="ctr"/>
-                </a:tc>
-                <a:extLst>
-                  <a:ext uri="{0D108BD9-81ED-4DB2-BD59-A6C34878D82A}">
-                    <a16:rowId xmlns:a16="http://schemas.microsoft.com/office/drawing/2014/main" val="2701143451"/>
-                  </a:ext>
-                </a:extLst>
-              </a:tr>
-              <a:tr h="579120">
-                <a:tc>
-                  <a:txBody>
-                    <a:bodyPr/>
-                    <a:lstStyle/>
-                    <a:p>
-                      <a:pPr algn="ctr" latinLnBrk="1"/>
-                      <a:r>
-                        <a:rPr lang="en-US" altLang="ko-KR" sz="1600" dirty="0"/>
-                        <a:t>HLADR</a:t>
-                      </a:r>
-                      <a:endParaRPr lang="ko-KR" altLang="en-US" sz="1600" dirty="0">
-                        <a:latin typeface="프리젠테이션 4 Regular" pitchFamily="2" charset="-127"/>
-                        <a:ea typeface="프리젠테이션 4 Regular" pitchFamily="2" charset="-127"/>
-                      </a:endParaRPr>
-                    </a:p>
-                  </a:txBody>
-                  <a:tcPr>
-                    <a:solidFill>
-                      <a:schemeClr val="bg2"/>
-                    </a:solidFill>
-                  </a:tcPr>
-                </a:tc>
-                <a:tc>
-                  <a:txBody>
-                    <a:bodyPr/>
-                    <a:lstStyle/>
-                    <a:p>
-                      <a:pPr algn="ctr" latinLnBrk="1"/>
-                      <a:r>
-                        <a:rPr lang="en-US" altLang="ko-KR" sz="1600" dirty="0">
-                          <a:latin typeface="프리젠테이션 4 Regular" pitchFamily="2" charset="-127"/>
-                          <a:ea typeface="프리젠테이션 4 Regular" pitchFamily="2" charset="-127"/>
-                        </a:rPr>
-                        <a:t>BMI + SEX</a:t>
-                      </a:r>
-                      <a:endParaRPr lang="ko-KR" altLang="en-US" sz="1600" dirty="0">
-                        <a:latin typeface="프리젠테이션 4 Regular" pitchFamily="2" charset="-127"/>
-                        <a:ea typeface="프리젠테이션 4 Regular" pitchFamily="2" charset="-127"/>
-                      </a:endParaRPr>
-                    </a:p>
-                  </a:txBody>
-                  <a:tcPr>
-                    <a:solidFill>
-                      <a:schemeClr val="bg2"/>
-                    </a:solidFill>
-                  </a:tcPr>
-                </a:tc>
-                <a:tc>
-                  <a:txBody>
-                    <a:bodyPr/>
-                    <a:lstStyle/>
-                    <a:p>
-                      <a:pPr marL="0" marR="0" lvl="0" indent="0" algn="ctr" defTabSz="914400" rtl="0" eaLnBrk="1" fontAlgn="auto" latinLnBrk="1" hangingPunct="1">
-                        <a:lnSpc>
-                          <a:spcPct val="100000"/>
-                        </a:lnSpc>
-                        <a:spcBef>
-                          <a:spcPts val="0"/>
-                        </a:spcBef>
-                        <a:spcAft>
-                          <a:spcPts val="0"/>
-                        </a:spcAft>
-                        <a:buClrTx/>
-                        <a:buSzTx/>
-                        <a:buFontTx/>
-                        <a:buNone/>
-                        <a:tabLst/>
-                        <a:defRPr/>
-                      </a:pPr>
-                      <a:r>
-                        <a:rPr lang="en-US" altLang="ko-KR" sz="1600" dirty="0" err="1"/>
-                        <a:t>pearson</a:t>
-                      </a:r>
-                      <a:endParaRPr lang="ko-KR" altLang="en-US" sz="1600" dirty="0"/>
-                    </a:p>
-                    <a:p>
-                      <a:pPr algn="ctr" latinLnBrk="1"/>
-                      <a:endParaRPr lang="ko-KR" altLang="en-US" sz="1600" dirty="0">
-                        <a:latin typeface="프리젠테이션 4 Regular" pitchFamily="2" charset="-127"/>
-                        <a:ea typeface="프리젠테이션 4 Regular" pitchFamily="2" charset="-127"/>
-                      </a:endParaRPr>
-                    </a:p>
-                  </a:txBody>
-                  <a:tcPr>
-                    <a:solidFill>
-                      <a:schemeClr val="bg2"/>
-                    </a:solidFill>
-                  </a:tcPr>
-                </a:tc>
-                <a:tc>
-                  <a:txBody>
-                    <a:bodyPr/>
-                    <a:lstStyle/>
-                    <a:p>
-                      <a:pPr algn="ctr"/>
-                      <a:r>
-                        <a:rPr lang="en-US" altLang="ko-KR" sz="1800" b="0" i="0" kern="1200" dirty="0">
-                          <a:solidFill>
-                            <a:schemeClr val="tx1"/>
-                          </a:solidFill>
-                          <a:effectLst/>
-                          <a:latin typeface="+mn-lt"/>
-                          <a:ea typeface="+mn-ea"/>
-                          <a:cs typeface="+mn-cs"/>
-                        </a:rPr>
-                        <a:t>-0.323769</a:t>
-                      </a:r>
-                      <a:endParaRPr lang="en-US" altLang="ko-KR" sz="1600" dirty="0">
-                        <a:effectLst/>
-                      </a:endParaRPr>
-                    </a:p>
-                  </a:txBody>
-                  <a:tcPr marL="76200" marR="76200" marT="38100" marB="38100" anchor="ctr">
-                    <a:solidFill>
-                      <a:schemeClr val="bg2"/>
-                    </a:solidFill>
-                  </a:tcPr>
-                </a:tc>
-                <a:tc>
-                  <a:txBody>
-                    <a:bodyPr/>
-                    <a:lstStyle/>
-                    <a:p>
-                      <a:pPr algn="ctr"/>
-                      <a:r>
-                        <a:rPr lang="en-US" altLang="ko-KR" sz="1800" b="0" i="0" kern="1200" dirty="0">
-                          <a:solidFill>
-                            <a:schemeClr val="tx1"/>
-                          </a:solidFill>
-                          <a:effectLst/>
-                          <a:latin typeface="+mn-lt"/>
-                          <a:ea typeface="+mn-ea"/>
-                          <a:cs typeface="+mn-cs"/>
-                        </a:rPr>
-                        <a:t>[-0.57, -0.02]</a:t>
-                      </a:r>
-                      <a:endParaRPr lang="ko-KR" altLang="en-US" sz="1600" dirty="0">
-                        <a:effectLst/>
-                      </a:endParaRPr>
-                    </a:p>
-                  </a:txBody>
-                  <a:tcPr marL="76200" marR="76200" marT="38100" marB="38100" anchor="ctr">
-                    <a:solidFill>
-                      <a:schemeClr val="bg2"/>
-                    </a:solidFill>
-                  </a:tcPr>
-                </a:tc>
-                <a:tc>
-                  <a:txBody>
-                    <a:bodyPr/>
-                    <a:lstStyle/>
-                    <a:p>
-                      <a:pPr algn="ctr"/>
-                      <a:r>
-                        <a:rPr lang="en-US" altLang="ko-KR" sz="1800" b="0" i="0" kern="1200" dirty="0">
-                          <a:solidFill>
-                            <a:schemeClr val="tx1"/>
-                          </a:solidFill>
-                          <a:effectLst/>
-                          <a:latin typeface="+mn-lt"/>
-                          <a:ea typeface="+mn-ea"/>
-                          <a:cs typeface="+mn-cs"/>
-                        </a:rPr>
-                        <a:t>0.03647</a:t>
-                      </a:r>
-                      <a:endParaRPr lang="en-US" altLang="ko-KR" sz="1600" dirty="0">
-                        <a:effectLst/>
-                      </a:endParaRPr>
-                    </a:p>
-                  </a:txBody>
-                  <a:tcPr marL="76200" marR="76200" marT="38100" marB="38100" anchor="ctr">
-                    <a:solidFill>
-                      <a:schemeClr val="bg2"/>
-                    </a:solidFill>
-                  </a:tcPr>
-                </a:tc>
-                <a:extLst>
-                  <a:ext uri="{0D108BD9-81ED-4DB2-BD59-A6C34878D82A}">
-                    <a16:rowId xmlns:a16="http://schemas.microsoft.com/office/drawing/2014/main" val="830179066"/>
-                  </a:ext>
-                </a:extLst>
-              </a:tr>
-              <a:tr h="579120">
-                <a:tc>
-                  <a:txBody>
-                    <a:bodyPr/>
-                    <a:lstStyle/>
-                    <a:p>
-                      <a:pPr algn="ctr" latinLnBrk="1"/>
-                      <a:r>
-                        <a:rPr lang="en-US" altLang="ko-KR" sz="1600" dirty="0"/>
-                        <a:t>NK</a:t>
-                      </a:r>
-                      <a:endParaRPr lang="ko-KR" altLang="en-US" sz="1600" dirty="0">
-                        <a:latin typeface="프리젠테이션 4 Regular" pitchFamily="2" charset="-127"/>
-                        <a:ea typeface="프리젠테이션 4 Regular" pitchFamily="2" charset="-127"/>
-                      </a:endParaRPr>
-                    </a:p>
-                  </a:txBody>
-                  <a:tcPr>
-                    <a:noFill/>
-                  </a:tcPr>
-                </a:tc>
-                <a:tc>
-                  <a:txBody>
-                    <a:bodyPr/>
-                    <a:lstStyle/>
-                    <a:p>
-                      <a:pPr marL="0" marR="0" lvl="0" indent="0" algn="ctr" defTabSz="914400" rtl="0" eaLnBrk="1" fontAlgn="auto" latinLnBrk="1" hangingPunct="1">
-                        <a:lnSpc>
-                          <a:spcPct val="100000"/>
-                        </a:lnSpc>
-                        <a:spcBef>
-                          <a:spcPts val="0"/>
-                        </a:spcBef>
-                        <a:spcAft>
-                          <a:spcPts val="0"/>
-                        </a:spcAft>
-                        <a:buClrTx/>
-                        <a:buSzTx/>
-                        <a:buFontTx/>
-                        <a:buNone/>
-                        <a:tabLst/>
-                        <a:defRPr/>
-                      </a:pPr>
-                      <a:r>
-                        <a:rPr lang="en-US" altLang="ko-KR" sz="1600" dirty="0">
-                          <a:latin typeface="프리젠테이션 4 Regular" pitchFamily="2" charset="-127"/>
-                          <a:ea typeface="프리젠테이션 4 Regular" pitchFamily="2" charset="-127"/>
-                        </a:rPr>
-                        <a:t>BMI + SEX</a:t>
-                      </a:r>
-                      <a:endParaRPr lang="ko-KR" altLang="en-US" sz="1600" dirty="0">
-                        <a:latin typeface="프리젠테이션 4 Regular" pitchFamily="2" charset="-127"/>
-                        <a:ea typeface="프리젠테이션 4 Regular" pitchFamily="2" charset="-127"/>
-                      </a:endParaRPr>
-                    </a:p>
-                    <a:p>
-                      <a:pPr algn="ctr" latinLnBrk="1"/>
-                      <a:endParaRPr lang="ko-KR" altLang="en-US" sz="1600" dirty="0">
-                        <a:latin typeface="프리젠테이션 4 Regular" pitchFamily="2" charset="-127"/>
-                        <a:ea typeface="프리젠테이션 4 Regular" pitchFamily="2" charset="-127"/>
-                      </a:endParaRPr>
-                    </a:p>
-                  </a:txBody>
-                  <a:tcPr>
-                    <a:noFill/>
-                  </a:tcPr>
-                </a:tc>
-                <a:tc>
-                  <a:txBody>
-                    <a:bodyPr/>
-                    <a:lstStyle/>
-                    <a:p>
-                      <a:pPr marL="0" marR="0" lvl="0" indent="0" algn="ctr" defTabSz="914400" rtl="0" eaLnBrk="1" fontAlgn="auto" latinLnBrk="1" hangingPunct="1">
-                        <a:lnSpc>
-                          <a:spcPct val="100000"/>
-                        </a:lnSpc>
-                        <a:spcBef>
-                          <a:spcPts val="0"/>
-                        </a:spcBef>
-                        <a:spcAft>
-                          <a:spcPts val="0"/>
-                        </a:spcAft>
-                        <a:buClrTx/>
-                        <a:buSzTx/>
-                        <a:buFontTx/>
-                        <a:buNone/>
-                        <a:tabLst/>
-                        <a:defRPr/>
-                      </a:pPr>
-                      <a:r>
-                        <a:rPr lang="en-US" altLang="ko-KR" sz="1600" dirty="0" err="1"/>
-                        <a:t>pearson</a:t>
-                      </a:r>
-                      <a:endParaRPr lang="ko-KR" altLang="en-US" sz="1600" dirty="0"/>
-                    </a:p>
-                    <a:p>
-                      <a:pPr algn="ctr" latinLnBrk="1"/>
-                      <a:endParaRPr lang="ko-KR" altLang="en-US" sz="1600" dirty="0">
-                        <a:latin typeface="프리젠테이션 4 Regular" pitchFamily="2" charset="-127"/>
-                        <a:ea typeface="프리젠테이션 4 Regular" pitchFamily="2" charset="-127"/>
-                      </a:endParaRPr>
-                    </a:p>
-                  </a:txBody>
-                  <a:tcPr>
-                    <a:noFill/>
-                  </a:tcPr>
-                </a:tc>
-                <a:tc>
-                  <a:txBody>
-                    <a:bodyPr/>
-                    <a:lstStyle/>
-                    <a:p>
-                      <a:pPr algn="ctr" latinLnBrk="1"/>
-                      <a:r>
-                        <a:rPr lang="en-US" altLang="ko-KR" sz="1800" b="0" i="0" kern="1200" dirty="0">
-                          <a:solidFill>
-                            <a:schemeClr val="tx1"/>
-                          </a:solidFill>
-                          <a:effectLst/>
-                          <a:latin typeface="+mn-lt"/>
-                          <a:ea typeface="+mn-ea"/>
-                          <a:cs typeface="+mn-cs"/>
-                        </a:rPr>
-                        <a:t>-0.202946</a:t>
-                      </a:r>
-                      <a:endParaRPr lang="ko-KR" altLang="en-US" sz="1600" dirty="0">
-                        <a:latin typeface="프리젠테이션 4 Regular" pitchFamily="2" charset="-127"/>
-                        <a:ea typeface="프리젠테이션 4 Regular" pitchFamily="2" charset="-127"/>
-                      </a:endParaRPr>
-                    </a:p>
-                  </a:txBody>
-                  <a:tcPr>
-                    <a:noFill/>
-                  </a:tcPr>
-                </a:tc>
-                <a:tc>
-                  <a:txBody>
-                    <a:bodyPr/>
-                    <a:lstStyle/>
-                    <a:p>
-                      <a:pPr algn="ctr"/>
-                      <a:r>
-                        <a:rPr lang="en-US" altLang="ko-KR" sz="1800" b="0" i="0" kern="1200" dirty="0">
-                          <a:solidFill>
-                            <a:schemeClr val="tx1"/>
-                          </a:solidFill>
-                          <a:effectLst/>
-                          <a:latin typeface="+mn-lt"/>
-                          <a:ea typeface="+mn-ea"/>
-                          <a:cs typeface="+mn-cs"/>
-                        </a:rPr>
-                        <a:t>[-0.48, 0.11]</a:t>
-                      </a:r>
-                      <a:endParaRPr lang="en-US" altLang="ko-KR" sz="1600" dirty="0">
-                        <a:effectLst/>
-                      </a:endParaRPr>
-                    </a:p>
-                  </a:txBody>
-                  <a:tcPr marL="76200" marR="76200" marT="38100" marB="38100" anchor="ctr">
-                    <a:noFill/>
-                  </a:tcPr>
-                </a:tc>
-                <a:tc>
-                  <a:txBody>
-                    <a:bodyPr/>
-                    <a:lstStyle/>
-                    <a:p>
-                      <a:pPr algn="ctr"/>
-                      <a:r>
-                        <a:rPr lang="en-US" altLang="ko-KR" sz="1800" b="0" i="0" kern="1200" dirty="0">
-                          <a:solidFill>
-                            <a:schemeClr val="tx1"/>
-                          </a:solidFill>
-                          <a:effectLst/>
-                          <a:latin typeface="+mn-lt"/>
-                          <a:ea typeface="+mn-ea"/>
-                          <a:cs typeface="+mn-cs"/>
-                        </a:rPr>
-                        <a:t>0.197393</a:t>
-                      </a:r>
-                      <a:endParaRPr lang="en-US" altLang="ko-KR" sz="1600" dirty="0">
-                        <a:effectLst/>
-                      </a:endParaRPr>
-                    </a:p>
-                  </a:txBody>
-                  <a:tcPr marL="76200" marR="76200" marT="38100" marB="38100" anchor="ctr">
-                    <a:noFill/>
-                  </a:tcPr>
-                </a:tc>
-                <a:extLst>
-                  <a:ext uri="{0D108BD9-81ED-4DB2-BD59-A6C34878D82A}">
-                    <a16:rowId xmlns:a16="http://schemas.microsoft.com/office/drawing/2014/main" val="897869477"/>
-                  </a:ext>
-                </a:extLst>
-              </a:tr>
-              <a:tr h="579120">
-                <a:tc>
-                  <a:txBody>
-                    <a:bodyPr/>
-                    <a:lstStyle/>
-                    <a:p>
-                      <a:pPr algn="ctr" latinLnBrk="1"/>
-                      <a:r>
-                        <a:rPr lang="en-US" altLang="ko-KR" sz="1600" dirty="0"/>
-                        <a:t>NKT1</a:t>
-                      </a:r>
-                      <a:endParaRPr lang="ko-KR" altLang="en-US" sz="1600" dirty="0">
-                        <a:latin typeface="프리젠테이션 4 Regular" pitchFamily="2" charset="-127"/>
-                        <a:ea typeface="프리젠테이션 4 Regular" pitchFamily="2" charset="-127"/>
-                      </a:endParaRPr>
-                    </a:p>
-                  </a:txBody>
-                  <a:tcPr>
-                    <a:noFill/>
-                  </a:tcPr>
-                </a:tc>
-                <a:tc>
-                  <a:txBody>
-                    <a:bodyPr/>
-                    <a:lstStyle/>
-                    <a:p>
-                      <a:pPr marL="0" marR="0" lvl="0" indent="0" algn="ctr" defTabSz="914400" rtl="0" eaLnBrk="1" fontAlgn="auto" latinLnBrk="1" hangingPunct="1">
-                        <a:lnSpc>
-                          <a:spcPct val="100000"/>
-                        </a:lnSpc>
-                        <a:spcBef>
-                          <a:spcPts val="0"/>
-                        </a:spcBef>
-                        <a:spcAft>
-                          <a:spcPts val="0"/>
-                        </a:spcAft>
-                        <a:buClrTx/>
-                        <a:buSzTx/>
-                        <a:buFontTx/>
-                        <a:buNone/>
-                        <a:tabLst/>
-                        <a:defRPr/>
-                      </a:pPr>
-                      <a:r>
-                        <a:rPr lang="en-US" altLang="ko-KR" sz="1600" dirty="0">
-                          <a:latin typeface="프리젠테이션 4 Regular" pitchFamily="2" charset="-127"/>
-                          <a:ea typeface="프리젠테이션 4 Regular" pitchFamily="2" charset="-127"/>
-                        </a:rPr>
-                        <a:t>BMI + SEX</a:t>
-                      </a:r>
-                      <a:endParaRPr lang="ko-KR" altLang="en-US" sz="1600" dirty="0">
-                        <a:latin typeface="프리젠테이션 4 Regular" pitchFamily="2" charset="-127"/>
-                        <a:ea typeface="프리젠테이션 4 Regular" pitchFamily="2" charset="-127"/>
-                      </a:endParaRPr>
-                    </a:p>
-                    <a:p>
-                      <a:pPr algn="ctr" latinLnBrk="1"/>
-                      <a:endParaRPr lang="ko-KR" altLang="en-US" sz="1600" dirty="0">
-                        <a:latin typeface="프리젠테이션 4 Regular" pitchFamily="2" charset="-127"/>
-                        <a:ea typeface="프리젠테이션 4 Regular" pitchFamily="2" charset="-127"/>
-                      </a:endParaRPr>
-                    </a:p>
-                  </a:txBody>
-                  <a:tcPr>
-                    <a:noFill/>
-                  </a:tcPr>
-                </a:tc>
-                <a:tc>
-                  <a:txBody>
-                    <a:bodyPr/>
-                    <a:lstStyle/>
-                    <a:p>
-                      <a:pPr marL="0" marR="0" lvl="0" indent="0" algn="ctr" defTabSz="914400" rtl="0" eaLnBrk="1" fontAlgn="auto" latinLnBrk="1" hangingPunct="1">
-                        <a:lnSpc>
-                          <a:spcPct val="100000"/>
-                        </a:lnSpc>
-                        <a:spcBef>
-                          <a:spcPts val="0"/>
-                        </a:spcBef>
-                        <a:spcAft>
-                          <a:spcPts val="0"/>
-                        </a:spcAft>
-                        <a:buClrTx/>
-                        <a:buSzTx/>
-                        <a:buFontTx/>
-                        <a:buNone/>
-                        <a:tabLst/>
-                        <a:defRPr/>
-                      </a:pPr>
-                      <a:r>
-                        <a:rPr lang="en-US" altLang="ko-KR" sz="1600" dirty="0" err="1"/>
-                        <a:t>pearson</a:t>
-                      </a:r>
-                      <a:endParaRPr lang="ko-KR" altLang="en-US" sz="1600" dirty="0"/>
-                    </a:p>
-                    <a:p>
-                      <a:pPr algn="ctr" latinLnBrk="1"/>
-                      <a:endParaRPr lang="ko-KR" altLang="en-US" sz="1600" dirty="0">
-                        <a:latin typeface="프리젠테이션 4 Regular" pitchFamily="2" charset="-127"/>
-                        <a:ea typeface="프리젠테이션 4 Regular" pitchFamily="2" charset="-127"/>
-                      </a:endParaRPr>
-                    </a:p>
-                  </a:txBody>
-                  <a:tcPr>
-                    <a:noFill/>
-                  </a:tcPr>
-                </a:tc>
-                <a:tc>
-                  <a:txBody>
-                    <a:bodyPr/>
-                    <a:lstStyle/>
-                    <a:p>
-                      <a:pPr algn="ctr" latinLnBrk="1"/>
-                      <a:r>
-                        <a:rPr lang="en-US" altLang="ko-KR" sz="1800" b="0" i="0" kern="1200" dirty="0">
-                          <a:solidFill>
-                            <a:schemeClr val="tx1"/>
-                          </a:solidFill>
-                          <a:effectLst/>
-                          <a:latin typeface="+mn-lt"/>
-                          <a:ea typeface="+mn-ea"/>
-                          <a:cs typeface="+mn-cs"/>
-                        </a:rPr>
-                        <a:t>-0.120495</a:t>
-                      </a:r>
-                      <a:endParaRPr lang="ko-KR" altLang="en-US" sz="1600" dirty="0">
-                        <a:latin typeface="프리젠테이션 4 Regular" pitchFamily="2" charset="-127"/>
-                        <a:ea typeface="프리젠테이션 4 Regular" pitchFamily="2" charset="-127"/>
-                      </a:endParaRPr>
-                    </a:p>
-                  </a:txBody>
-                  <a:tcPr>
-                    <a:noFill/>
-                  </a:tcPr>
-                </a:tc>
-                <a:tc>
-                  <a:txBody>
-                    <a:bodyPr/>
-                    <a:lstStyle/>
-                    <a:p>
-                      <a:pPr algn="ctr" latinLnBrk="1"/>
-                      <a:r>
-                        <a:rPr lang="en-US" altLang="ko-KR" sz="1800" b="0" i="0" kern="1200" dirty="0">
-                          <a:solidFill>
-                            <a:schemeClr val="tx1"/>
-                          </a:solidFill>
-                          <a:effectLst/>
-                          <a:latin typeface="+mn-lt"/>
-                          <a:ea typeface="+mn-ea"/>
-                          <a:cs typeface="+mn-cs"/>
-                        </a:rPr>
-                        <a:t>[-0.41, 0.19]</a:t>
-                      </a:r>
-                      <a:endParaRPr lang="ko-KR" altLang="en-US" sz="1600" dirty="0">
-                        <a:latin typeface="프리젠테이션 4 Regular" pitchFamily="2" charset="-127"/>
-                        <a:ea typeface="프리젠테이션 4 Regular" pitchFamily="2" charset="-127"/>
-                      </a:endParaRPr>
-                    </a:p>
-                  </a:txBody>
-                  <a:tcPr>
-                    <a:noFill/>
-                  </a:tcPr>
-                </a:tc>
-                <a:tc>
-                  <a:txBody>
-                    <a:bodyPr/>
-                    <a:lstStyle/>
-                    <a:p>
-                      <a:pPr algn="ctr"/>
-                      <a:r>
-                        <a:rPr lang="en-US" altLang="ko-KR" sz="1800" b="0" i="0" kern="1200" dirty="0">
-                          <a:solidFill>
-                            <a:schemeClr val="tx1"/>
-                          </a:solidFill>
-                          <a:effectLst/>
-                          <a:latin typeface="+mn-lt"/>
-                          <a:ea typeface="+mn-ea"/>
-                          <a:cs typeface="+mn-cs"/>
-                        </a:rPr>
-                        <a:t>0.447189</a:t>
-                      </a:r>
-                      <a:endParaRPr lang="en-US" altLang="ko-KR" sz="1600" dirty="0">
-                        <a:effectLst/>
-                      </a:endParaRPr>
-                    </a:p>
-                  </a:txBody>
-                  <a:tcPr marL="76200" marR="76200" marT="38100" marB="38100" anchor="ctr">
-                    <a:noFill/>
-                  </a:tcPr>
-                </a:tc>
-                <a:extLst>
-                  <a:ext uri="{0D108BD9-81ED-4DB2-BD59-A6C34878D82A}">
-                    <a16:rowId xmlns:a16="http://schemas.microsoft.com/office/drawing/2014/main" val="551693064"/>
-                  </a:ext>
-                </a:extLst>
-              </a:tr>
-              <a:tr h="579120">
-                <a:tc>
-                  <a:txBody>
-                    <a:bodyPr/>
-                    <a:lstStyle/>
-                    <a:p>
-                      <a:pPr algn="ctr" latinLnBrk="1"/>
-                      <a:r>
-                        <a:rPr lang="en-US" altLang="ko-KR" sz="1600" dirty="0"/>
-                        <a:t>T</a:t>
-                      </a:r>
-                      <a:endParaRPr lang="ko-KR" altLang="en-US" sz="1600" dirty="0">
-                        <a:latin typeface="프리젠테이션 4 Regular" pitchFamily="2" charset="-127"/>
-                        <a:ea typeface="프리젠테이션 4 Regular" pitchFamily="2" charset="-127"/>
-                      </a:endParaRPr>
-                    </a:p>
-                  </a:txBody>
-                  <a:tcPr>
-                    <a:solidFill>
-                      <a:schemeClr val="bg2"/>
-                    </a:solidFill>
-                  </a:tcPr>
-                </a:tc>
-                <a:tc>
-                  <a:txBody>
-                    <a:bodyPr/>
-                    <a:lstStyle/>
-                    <a:p>
-                      <a:pPr algn="ctr" latinLnBrk="1"/>
-                      <a:r>
-                        <a:rPr lang="en-US" altLang="ko-KR" sz="1600" dirty="0">
-                          <a:latin typeface="프리젠테이션 4 Regular" pitchFamily="2" charset="-127"/>
-                          <a:ea typeface="프리젠테이션 4 Regular" pitchFamily="2" charset="-127"/>
-                        </a:rPr>
-                        <a:t>BMI + SEX</a:t>
-                      </a:r>
-                      <a:endParaRPr lang="ko-KR" altLang="en-US" sz="1600" dirty="0">
-                        <a:latin typeface="프리젠테이션 4 Regular" pitchFamily="2" charset="-127"/>
-                        <a:ea typeface="프리젠테이션 4 Regular" pitchFamily="2" charset="-127"/>
-                      </a:endParaRPr>
-                    </a:p>
-                  </a:txBody>
-                  <a:tcPr>
-                    <a:solidFill>
-                      <a:schemeClr val="bg2"/>
-                    </a:solidFill>
-                  </a:tcPr>
-                </a:tc>
-                <a:tc>
-                  <a:txBody>
-                    <a:bodyPr/>
-                    <a:lstStyle/>
-                    <a:p>
-                      <a:pPr marL="0" marR="0" lvl="0" indent="0" algn="ctr" defTabSz="914400" rtl="0" eaLnBrk="1" fontAlgn="auto" latinLnBrk="1" hangingPunct="1">
-                        <a:lnSpc>
-                          <a:spcPct val="100000"/>
-                        </a:lnSpc>
-                        <a:spcBef>
-                          <a:spcPts val="0"/>
-                        </a:spcBef>
-                        <a:spcAft>
-                          <a:spcPts val="0"/>
-                        </a:spcAft>
-                        <a:buClrTx/>
-                        <a:buSzTx/>
-                        <a:buFontTx/>
-                        <a:buNone/>
-                        <a:tabLst/>
-                        <a:defRPr/>
-                      </a:pPr>
-                      <a:r>
-                        <a:rPr lang="en-US" altLang="ko-KR" sz="1600" dirty="0" err="1"/>
-                        <a:t>pearson</a:t>
-                      </a:r>
-                      <a:endParaRPr lang="ko-KR" altLang="en-US" sz="1600" dirty="0"/>
-                    </a:p>
-                    <a:p>
-                      <a:pPr algn="ctr" latinLnBrk="1"/>
-                      <a:endParaRPr lang="ko-KR" altLang="en-US" sz="1600" dirty="0">
-                        <a:latin typeface="프리젠테이션 4 Regular" pitchFamily="2" charset="-127"/>
-                        <a:ea typeface="프리젠테이션 4 Regular" pitchFamily="2" charset="-127"/>
-                      </a:endParaRPr>
-                    </a:p>
-                  </a:txBody>
-                  <a:tcPr>
-                    <a:solidFill>
-                      <a:schemeClr val="bg2"/>
-                    </a:solidFill>
-                  </a:tcPr>
-                </a:tc>
-                <a:tc>
-                  <a:txBody>
-                    <a:bodyPr/>
-                    <a:lstStyle/>
-                    <a:p>
-                      <a:pPr algn="ctr"/>
-                      <a:r>
-                        <a:rPr lang="en-US" altLang="ko-KR" sz="1800" b="0" i="0" kern="1200" dirty="0">
-                          <a:solidFill>
-                            <a:schemeClr val="tx1"/>
-                          </a:solidFill>
-                          <a:effectLst/>
-                          <a:latin typeface="+mn-lt"/>
-                          <a:ea typeface="+mn-ea"/>
-                          <a:cs typeface="+mn-cs"/>
-                        </a:rPr>
-                        <a:t>0.348037</a:t>
-                      </a:r>
-                      <a:endParaRPr lang="en-US" altLang="ko-KR" sz="1600" dirty="0">
-                        <a:effectLst/>
-                      </a:endParaRPr>
-                    </a:p>
-                  </a:txBody>
-                  <a:tcPr marL="76200" marR="76200" marT="38100" marB="38100" anchor="ctr">
-                    <a:solidFill>
-                      <a:schemeClr val="bg2"/>
-                    </a:solidFill>
-                  </a:tcPr>
-                </a:tc>
-                <a:tc>
-                  <a:txBody>
-                    <a:bodyPr/>
-                    <a:lstStyle/>
-                    <a:p>
-                      <a:pPr algn="ctr"/>
-                      <a:r>
-                        <a:rPr lang="en-US" altLang="ko-KR" sz="1800" b="0" i="0" kern="1200" dirty="0">
-                          <a:solidFill>
-                            <a:schemeClr val="tx1"/>
-                          </a:solidFill>
-                          <a:effectLst/>
-                          <a:latin typeface="+mn-lt"/>
-                          <a:ea typeface="+mn-ea"/>
-                          <a:cs typeface="+mn-cs"/>
-                        </a:rPr>
-                        <a:t>[0.05, 0.59]</a:t>
-                      </a:r>
-                      <a:endParaRPr lang="ko-KR" altLang="en-US" sz="1600" dirty="0">
-                        <a:effectLst/>
-                      </a:endParaRPr>
-                    </a:p>
-                  </a:txBody>
-                  <a:tcPr marL="76200" marR="76200" marT="38100" marB="38100" anchor="ctr">
-                    <a:solidFill>
-                      <a:schemeClr val="bg2"/>
-                    </a:solidFill>
-                  </a:tcPr>
-                </a:tc>
-                <a:tc>
-                  <a:txBody>
-                    <a:bodyPr/>
-                    <a:lstStyle/>
-                    <a:p>
-                      <a:pPr algn="ctr"/>
-                      <a:r>
-                        <a:rPr lang="en-US" altLang="ko-KR" sz="1800" b="0" i="0" kern="1200" dirty="0">
-                          <a:solidFill>
-                            <a:schemeClr val="tx1"/>
-                          </a:solidFill>
-                          <a:effectLst/>
-                          <a:latin typeface="+mn-lt"/>
-                          <a:ea typeface="+mn-ea"/>
-                          <a:cs typeface="+mn-cs"/>
-                        </a:rPr>
-                        <a:t>0.023908</a:t>
-                      </a:r>
-                      <a:endParaRPr lang="en-US" altLang="ko-KR" sz="1600" dirty="0">
-                        <a:effectLst/>
-                      </a:endParaRPr>
-                    </a:p>
-                  </a:txBody>
-                  <a:tcPr marL="76200" marR="76200" marT="38100" marB="38100" anchor="ctr">
-                    <a:solidFill>
-                      <a:schemeClr val="bg2"/>
-                    </a:solidFill>
-                  </a:tcPr>
-                </a:tc>
-                <a:extLst>
-                  <a:ext uri="{0D108BD9-81ED-4DB2-BD59-A6C34878D82A}">
-                    <a16:rowId xmlns:a16="http://schemas.microsoft.com/office/drawing/2014/main" val="1301682945"/>
-                  </a:ext>
-                </a:extLst>
-              </a:tr>
-            </a:tbl>
-          </a:graphicData>
-        </a:graphic>
-      </p:graphicFrame>
-    </p:spTree>
-    <p:extLst>
-      <p:ext uri="{BB962C8B-B14F-4D97-AF65-F5344CB8AC3E}">
-        <p14:creationId xmlns:p14="http://schemas.microsoft.com/office/powerpoint/2010/main" val="433454426"/>
-      </p:ext>
-    </p:extLst>
-  </p:cSld>
-  <p:clrMapOvr>
-    <a:masterClrMapping/>
-  </p:clrMapOvr>
-</p:sld>
-</file>
-
-<file path=ppt/slides/slide17.xml><?xml version="1.0" encoding="utf-8"?>
-<p:sld xmlns:a="http://schemas.openxmlformats.org/drawingml/2006/main" xmlns:r="http://schemas.openxmlformats.org/officeDocument/2006/relationships" xmlns:p="http://schemas.openxmlformats.org/presentationml/2006/main">
-  <p:cSld>
-    <p:spTree>
-      <p:nvGrpSpPr>
-        <p:cNvPr id="1" name=""/>
-        <p:cNvGrpSpPr/>
-        <p:nvPr/>
-      </p:nvGrpSpPr>
-      <p:grpSpPr>
-        <a:xfrm>
-          <a:off x="0" y="0"/>
-          <a:ext cx="0" cy="0"/>
-          <a:chOff x="0" y="0"/>
-          <a:chExt cx="0" cy="0"/>
-        </a:xfrm>
-      </p:grpSpPr>
-      <p:sp>
-        <p:nvSpPr>
-          <p:cNvPr id="2" name="제목 1">
-            <a:extLst>
-              <a:ext uri="{FF2B5EF4-FFF2-40B4-BE49-F238E27FC236}">
-                <a16:creationId xmlns:a16="http://schemas.microsoft.com/office/drawing/2014/main" id="{32961EE3-4D88-488C-96A8-6AD26B80C138}"/>
-              </a:ext>
-            </a:extLst>
-          </p:cNvPr>
-          <p:cNvSpPr>
-            <a:spLocks noGrp="1"/>
-          </p:cNvSpPr>
-          <p:nvPr>
-            <p:ph type="title"/>
-          </p:nvPr>
-        </p:nvSpPr>
-        <p:spPr>
-          <a:xfrm>
-            <a:off x="838200" y="365125"/>
-            <a:ext cx="10515600" cy="688423"/>
-          </a:xfrm>
-        </p:spPr>
-        <p:txBody>
-          <a:bodyPr>
-            <a:normAutofit fontScale="90000"/>
-          </a:bodyPr>
-          <a:lstStyle/>
-          <a:p>
-            <a:r>
-              <a:rPr lang="en-US" altLang="ko-KR" sz="3600" dirty="0">
-                <a:latin typeface="프리젠테이션 5 Medium" pitchFamily="2" charset="-127"/>
-                <a:ea typeface="프리젠테이션 5 Medium" pitchFamily="2" charset="-127"/>
-              </a:rPr>
-              <a:t>Task1. . PAN% </a:t>
             </a:r>
             <a:r>
               <a:rPr lang="ko-KR" altLang="en-US" sz="3600" dirty="0"/>
@@ -11001,7 +9798,7 @@
 </p:sld>
 </file>
 
-<file path=ppt/slides/slide18.xml><?xml version="1.0" encoding="utf-8"?>
+<file path=ppt/slides/slide17.xml><?xml version="1.0" encoding="utf-8"?>
 <p:sld xmlns:a="http://schemas.openxmlformats.org/drawingml/2006/main" xmlns:r="http://schemas.openxmlformats.org/officeDocument/2006/relationships" xmlns:p="http://schemas.openxmlformats.org/presentationml/2006/main">
   <p:cSld>
     <p:spTree>
@@ -12689,7 +11486,7 @@
 </p:sld>
 </file>
 
-<file path=ppt/slides/slide19.xml><?xml version="1.0" encoding="utf-8"?>
+<file path=ppt/slides/slide18.xml><?xml version="1.0" encoding="utf-8"?>
 <p:sld xmlns:a="http://schemas.openxmlformats.org/drawingml/2006/main" xmlns:r="http://schemas.openxmlformats.org/officeDocument/2006/relationships" xmlns:p="http://schemas.openxmlformats.org/presentationml/2006/main">
   <p:cSld>
     <p:spTree>
@@ -14458,1327 +13255,7 @@
 </p:sld>
 </file>
 
-<file path=ppt/slides/slide2.xml><?xml version="1.0" encoding="utf-8"?>
-<p:sld xmlns:a="http://schemas.openxmlformats.org/drawingml/2006/main" xmlns:r="http://schemas.openxmlformats.org/officeDocument/2006/relationships" xmlns:p="http://schemas.openxmlformats.org/presentationml/2006/main">
-  <p:cSld>
-    <p:spTree>
-      <p:nvGrpSpPr>
-        <p:cNvPr id="1" name=""/>
-        <p:cNvGrpSpPr/>
-        <p:nvPr/>
-      </p:nvGrpSpPr>
-      <p:grpSpPr>
-        <a:xfrm>
-          <a:off x="0" y="0"/>
-          <a:ext cx="0" cy="0"/>
-          <a:chOff x="0" y="0"/>
-          <a:chExt cx="0" cy="0"/>
-        </a:xfrm>
-      </p:grpSpPr>
-      <p:sp>
-        <p:nvSpPr>
-          <p:cNvPr id="3" name="내용 개체 틀 2">
-            <a:extLst>
-              <a:ext uri="{FF2B5EF4-FFF2-40B4-BE49-F238E27FC236}">
-                <a16:creationId xmlns:a16="http://schemas.microsoft.com/office/drawing/2014/main" id="{BA7632E5-1D37-485F-B68F-BADA4B1FB2F0}"/>
-              </a:ext>
-            </a:extLst>
-          </p:cNvPr>
-          <p:cNvSpPr>
-            <a:spLocks noGrp="1"/>
-          </p:cNvSpPr>
-          <p:nvPr>
-            <p:ph idx="1"/>
-          </p:nvPr>
-        </p:nvSpPr>
-        <p:spPr>
-          <a:xfrm>
-            <a:off x="451498" y="213288"/>
-            <a:ext cx="11563321" cy="2707632"/>
-          </a:xfrm>
-        </p:spPr>
-        <p:txBody>
-          <a:bodyPr>
-            <a:normAutofit/>
-          </a:bodyPr>
-          <a:lstStyle/>
-          <a:p>
-            <a:pPr marL="0" indent="0">
-              <a:buNone/>
-            </a:pPr>
-            <a:r>
-              <a:rPr lang="en-US" altLang="ko-KR" dirty="0">
-                <a:latin typeface="프리젠테이션 4 Regular" pitchFamily="2" charset="-127"/>
-                <a:ea typeface="프리젠테이션 4 Regular" pitchFamily="2" charset="-127"/>
-              </a:rPr>
-              <a:t>[</a:t>
-            </a:r>
-            <a:r>
-              <a:rPr lang="ko-KR" altLang="en-US" dirty="0">
-                <a:latin typeface="프리젠테이션 4 Regular" pitchFamily="2" charset="-127"/>
-                <a:ea typeface="프리젠테이션 4 Regular" pitchFamily="2" charset="-127"/>
-              </a:rPr>
-              <a:t>데이터셋</a:t>
-            </a:r>
-            <a:r>
-              <a:rPr lang="en-US" altLang="ko-KR" dirty="0">
-                <a:latin typeface="프리젠테이션 4 Regular" pitchFamily="2" charset="-127"/>
-                <a:ea typeface="프리젠테이션 4 Regular" pitchFamily="2" charset="-127"/>
-              </a:rPr>
-              <a:t>]</a:t>
-            </a:r>
-          </a:p>
-          <a:p>
-            <a:r>
-              <a:rPr lang="ko-KR" altLang="en-US" sz="2000" dirty="0">
-                <a:latin typeface="프리젠테이션 4 Regular" pitchFamily="2" charset="-127"/>
-                <a:ea typeface="프리젠테이션 4 Regular" pitchFamily="2" charset="-127"/>
-              </a:rPr>
-              <a:t>총 </a:t>
-            </a:r>
-            <a:r>
-              <a:rPr lang="en-US" altLang="ko-KR" sz="2000" dirty="0">
-                <a:latin typeface="프리젠테이션 4 Regular" pitchFamily="2" charset="-127"/>
-                <a:ea typeface="프리젠테이션 4 Regular" pitchFamily="2" charset="-127"/>
-              </a:rPr>
-              <a:t>44</a:t>
-            </a:r>
-            <a:r>
-              <a:rPr lang="ko-KR" altLang="en-US" sz="2000" dirty="0">
-                <a:latin typeface="프리젠테이션 4 Regular" pitchFamily="2" charset="-127"/>
-                <a:ea typeface="프리젠테이션 4 Regular" pitchFamily="2" charset="-127"/>
-              </a:rPr>
-              <a:t>명의 환자</a:t>
-            </a:r>
-            <a:r>
-              <a:rPr lang="en-US" altLang="ko-KR" sz="2000" dirty="0">
-                <a:latin typeface="프리젠테이션 4 Regular" pitchFamily="2" charset="-127"/>
-                <a:ea typeface="프리젠테이션 4 Regular" pitchFamily="2" charset="-127"/>
-              </a:rPr>
-              <a:t>- </a:t>
-            </a:r>
-            <a:r>
-              <a:rPr lang="ko-KR" altLang="en-US" sz="2000" dirty="0">
-                <a:latin typeface="프리젠테이션 4 Regular" pitchFamily="2" charset="-127"/>
-                <a:ea typeface="프리젠테이션 4 Regular" pitchFamily="2" charset="-127"/>
-              </a:rPr>
-              <a:t>모두 건강하고</a:t>
-            </a:r>
-            <a:r>
-              <a:rPr lang="en-US" altLang="ko-KR" sz="2000" dirty="0">
-                <a:latin typeface="프리젠테이션 4 Regular" pitchFamily="2" charset="-127"/>
-                <a:ea typeface="프리젠테이션 4 Regular" pitchFamily="2" charset="-127"/>
-              </a:rPr>
-              <a:t>, </a:t>
-            </a:r>
-            <a:r>
-              <a:rPr lang="ko-KR" altLang="en-US" sz="2000" dirty="0">
-                <a:latin typeface="프리젠테이션 4 Regular" pitchFamily="2" charset="-127"/>
-                <a:ea typeface="프리젠테이션 4 Regular" pitchFamily="2" charset="-127"/>
-              </a:rPr>
-              <a:t>위에 </a:t>
-            </a:r>
-            <a:r>
-              <a:rPr lang="en-US" altLang="ko-KR" sz="2000" dirty="0">
-                <a:latin typeface="프리젠테이션 4 Regular" pitchFamily="2" charset="-127"/>
-                <a:ea typeface="프리젠테이션 4 Regular" pitchFamily="2" charset="-127"/>
-              </a:rPr>
-              <a:t>22</a:t>
-            </a:r>
-            <a:r>
-              <a:rPr lang="ko-KR" altLang="en-US" sz="2000" dirty="0">
-                <a:latin typeface="프리젠테이션 4 Regular" pitchFamily="2" charset="-127"/>
-                <a:ea typeface="프리젠테이션 4 Regular" pitchFamily="2" charset="-127"/>
-              </a:rPr>
-              <a:t>명과 아래 </a:t>
-            </a:r>
-            <a:r>
-              <a:rPr lang="en-US" altLang="ko-KR" sz="2000" dirty="0">
-                <a:latin typeface="프리젠테이션 4 Regular" pitchFamily="2" charset="-127"/>
-                <a:ea typeface="프리젠테이션 4 Regular" pitchFamily="2" charset="-127"/>
-              </a:rPr>
-              <a:t>22</a:t>
-            </a:r>
-            <a:r>
-              <a:rPr lang="ko-KR" altLang="en-US" sz="2000" dirty="0">
-                <a:latin typeface="프리젠테이션 4 Regular" pitchFamily="2" charset="-127"/>
-                <a:ea typeface="프리젠테이션 4 Regular" pitchFamily="2" charset="-127"/>
-              </a:rPr>
-              <a:t>명은 다른 검사를 진행함</a:t>
-            </a:r>
-            <a:endParaRPr lang="en-US" altLang="ko-KR" sz="2000" dirty="0">
-              <a:latin typeface="프리젠테이션 4 Regular" pitchFamily="2" charset="-127"/>
-              <a:ea typeface="프리젠테이션 4 Regular" pitchFamily="2" charset="-127"/>
-            </a:endParaRPr>
-          </a:p>
-          <a:p>
-            <a:pPr lvl="1"/>
-            <a:r>
-              <a:rPr lang="ko-KR" altLang="en-US" sz="1600" dirty="0">
-                <a:latin typeface="프리젠테이션 4 Regular" pitchFamily="2" charset="-127"/>
-                <a:ea typeface="프리젠테이션 4 Regular" pitchFamily="2" charset="-127"/>
-              </a:rPr>
-              <a:t>위 </a:t>
-            </a:r>
-            <a:r>
-              <a:rPr lang="en-US" altLang="ko-KR" sz="1600" dirty="0">
-                <a:latin typeface="프리젠테이션 4 Regular" pitchFamily="2" charset="-127"/>
-                <a:ea typeface="프리젠테이션 4 Regular" pitchFamily="2" charset="-127"/>
-              </a:rPr>
-              <a:t>22</a:t>
-            </a:r>
-            <a:r>
-              <a:rPr lang="ko-KR" altLang="en-US" sz="1600" dirty="0">
-                <a:latin typeface="프리젠테이션 4 Regular" pitchFamily="2" charset="-127"/>
-                <a:ea typeface="프리젠테이션 4 Regular" pitchFamily="2" charset="-127"/>
-              </a:rPr>
-              <a:t>명</a:t>
-            </a:r>
-            <a:r>
-              <a:rPr lang="en-US" altLang="ko-KR" sz="1600" dirty="0">
-                <a:latin typeface="프리젠테이션 4 Regular" pitchFamily="2" charset="-127"/>
-                <a:ea typeface="프리젠테이션 4 Regular" pitchFamily="2" charset="-127"/>
-              </a:rPr>
-              <a:t> – KUMC, </a:t>
-            </a:r>
-            <a:r>
-              <a:rPr lang="ko-KR" altLang="en-US" sz="1600" dirty="0">
-                <a:latin typeface="프리젠테이션 4 Regular" pitchFamily="2" charset="-127"/>
-                <a:ea typeface="프리젠테이션 4 Regular" pitchFamily="2" charset="-127"/>
-              </a:rPr>
-              <a:t>간 주변의 지방 조직의 면역세포 비율</a:t>
-            </a:r>
-            <a:r>
-              <a:rPr lang="en-US" altLang="ko-KR" sz="1600" dirty="0">
-                <a:latin typeface="프리젠테이션 4 Regular" pitchFamily="2" charset="-127"/>
-                <a:ea typeface="프리젠테이션 4 Regular" pitchFamily="2" charset="-127"/>
-              </a:rPr>
-              <a:t>, </a:t>
-            </a:r>
-            <a:r>
-              <a:rPr lang="ko-KR" altLang="en-US" sz="1600" dirty="0">
-                <a:latin typeface="프리젠테이션 4 Regular" pitchFamily="2" charset="-127"/>
-                <a:ea typeface="프리젠테이션 4 Regular" pitchFamily="2" charset="-127"/>
-              </a:rPr>
-              <a:t>숫자 </a:t>
-            </a:r>
-            <a:endParaRPr lang="en-US" altLang="ko-KR" sz="1600" dirty="0">
-              <a:latin typeface="프리젠테이션 4 Regular" pitchFamily="2" charset="-127"/>
-              <a:ea typeface="프리젠테이션 4 Regular" pitchFamily="2" charset="-127"/>
-            </a:endParaRPr>
-          </a:p>
-          <a:p>
-            <a:pPr lvl="1"/>
-            <a:r>
-              <a:rPr lang="ko-KR" altLang="en-US" sz="1600" dirty="0">
-                <a:latin typeface="프리젠테이션 4 Regular" pitchFamily="2" charset="-127"/>
-                <a:ea typeface="프리젠테이션 4 Regular" pitchFamily="2" charset="-127"/>
-              </a:rPr>
-              <a:t>아래 </a:t>
-            </a:r>
-            <a:r>
-              <a:rPr lang="en-US" altLang="ko-KR" sz="1600" dirty="0">
-                <a:latin typeface="프리젠테이션 4 Regular" pitchFamily="2" charset="-127"/>
-                <a:ea typeface="프리젠테이션 4 Regular" pitchFamily="2" charset="-127"/>
-              </a:rPr>
-              <a:t>22</a:t>
-            </a:r>
-            <a:r>
-              <a:rPr lang="ko-KR" altLang="en-US" sz="1600" dirty="0">
-                <a:latin typeface="프리젠테이션 4 Regular" pitchFamily="2" charset="-127"/>
-                <a:ea typeface="프리젠테이션 4 Regular" pitchFamily="2" charset="-127"/>
-              </a:rPr>
-              <a:t>명 </a:t>
-            </a:r>
-            <a:r>
-              <a:rPr lang="en-US" altLang="ko-KR" sz="1600" dirty="0">
-                <a:latin typeface="프리젠테이션 4 Regular" pitchFamily="2" charset="-127"/>
-                <a:ea typeface="프리젠테이션 4 Regular" pitchFamily="2" charset="-127"/>
-              </a:rPr>
-              <a:t>– AMC, </a:t>
-            </a:r>
-            <a:r>
-              <a:rPr lang="ko-KR" altLang="en-US" sz="1600" dirty="0">
-                <a:latin typeface="프리젠테이션 4 Regular" pitchFamily="2" charset="-127"/>
-                <a:ea typeface="프리젠테이션 4 Regular" pitchFamily="2" charset="-127"/>
-              </a:rPr>
-              <a:t>신장 주변 지방 조직에의 면역세포 비율</a:t>
-            </a:r>
-            <a:r>
-              <a:rPr lang="en-US" altLang="ko-KR" sz="1600" dirty="0">
-                <a:latin typeface="프리젠테이션 4 Regular" pitchFamily="2" charset="-127"/>
-                <a:ea typeface="프리젠테이션 4 Regular" pitchFamily="2" charset="-127"/>
-              </a:rPr>
-              <a:t>, </a:t>
-            </a:r>
-            <a:r>
-              <a:rPr lang="ko-KR" altLang="en-US" sz="1600" dirty="0">
-                <a:latin typeface="프리젠테이션 4 Regular" pitchFamily="2" charset="-127"/>
-                <a:ea typeface="프리젠테이션 4 Regular" pitchFamily="2" charset="-127"/>
-              </a:rPr>
-              <a:t>숫자</a:t>
-            </a:r>
-            <a:endParaRPr lang="en-US" altLang="ko-KR" sz="1600" dirty="0">
-              <a:latin typeface="프리젠테이션 4 Regular" pitchFamily="2" charset="-127"/>
-              <a:ea typeface="프리젠테이션 4 Regular" pitchFamily="2" charset="-127"/>
-            </a:endParaRPr>
-          </a:p>
-          <a:p>
-            <a:r>
-              <a:rPr lang="ko-KR" altLang="en-US" sz="2000" dirty="0">
-                <a:latin typeface="프리젠테이션 4 Regular" pitchFamily="2" charset="-127"/>
-                <a:ea typeface="프리젠테이션 4 Regular" pitchFamily="2" charset="-127"/>
-              </a:rPr>
-              <a:t>일단 </a:t>
-            </a:r>
-            <a:r>
-              <a:rPr lang="en-US" altLang="ko-KR" sz="2000" dirty="0">
-                <a:latin typeface="프리젠테이션 4 Regular" pitchFamily="2" charset="-127"/>
-                <a:ea typeface="프리젠테이션 4 Regular" pitchFamily="2" charset="-127"/>
-              </a:rPr>
-              <a:t>D = </a:t>
-            </a:r>
-            <a:r>
-              <a:rPr lang="ko-KR" altLang="en-US" sz="2000" dirty="0">
-                <a:latin typeface="프리젠테이션 4 Regular" pitchFamily="2" charset="-127"/>
-                <a:ea typeface="프리젠테이션 4 Regular" pitchFamily="2" charset="-127"/>
-              </a:rPr>
-              <a:t>내려가면 좋은 지표</a:t>
-            </a:r>
-            <a:r>
-              <a:rPr lang="en-US" altLang="ko-KR" sz="2000" dirty="0">
-                <a:latin typeface="프리젠테이션 4 Regular" pitchFamily="2" charset="-127"/>
-                <a:ea typeface="프리젠테이션 4 Regular" pitchFamily="2" charset="-127"/>
-              </a:rPr>
-              <a:t>/ U=</a:t>
-            </a:r>
-            <a:r>
-              <a:rPr lang="ko-KR" altLang="en-US" sz="2000" dirty="0">
-                <a:latin typeface="프리젠테이션 4 Regular" pitchFamily="2" charset="-127"/>
-                <a:ea typeface="프리젠테이션 4 Regular" pitchFamily="2" charset="-127"/>
-              </a:rPr>
-              <a:t>올라가면 좋은 지표</a:t>
-            </a:r>
-            <a:r>
-              <a:rPr lang="en-US" altLang="ko-KR" sz="2000" dirty="0">
-                <a:latin typeface="프리젠테이션 4 Regular" pitchFamily="2" charset="-127"/>
-                <a:ea typeface="프리젠테이션 4 Regular" pitchFamily="2" charset="-127"/>
-              </a:rPr>
-              <a:t> -&gt; U</a:t>
-            </a:r>
-            <a:r>
-              <a:rPr lang="ko-KR" altLang="en-US" sz="2000" dirty="0">
-                <a:latin typeface="프리젠테이션 4 Regular" pitchFamily="2" charset="-127"/>
-                <a:ea typeface="프리젠테이션 4 Regular" pitchFamily="2" charset="-127"/>
-              </a:rPr>
-              <a:t>는 음수 붙여 </a:t>
-            </a:r>
-            <a:r>
-              <a:rPr lang="en-US" altLang="ko-KR" sz="2000" dirty="0">
-                <a:latin typeface="프리젠테이션 4 Regular" pitchFamily="2" charset="-127"/>
-                <a:ea typeface="프리젠테이션 4 Regular" pitchFamily="2" charset="-127"/>
-              </a:rPr>
-              <a:t>PCA</a:t>
-            </a:r>
-            <a:r>
-              <a:rPr lang="ko-KR" altLang="en-US" sz="2000" dirty="0">
-                <a:latin typeface="프리젠테이션 4 Regular" pitchFamily="2" charset="-127"/>
-                <a:ea typeface="프리젠테이션 4 Regular" pitchFamily="2" charset="-127"/>
-              </a:rPr>
-              <a:t>진행</a:t>
-            </a:r>
-            <a:endParaRPr lang="en-US" altLang="ko-KR" sz="2000" dirty="0">
-              <a:latin typeface="프리젠테이션 4 Regular" pitchFamily="2" charset="-127"/>
-              <a:ea typeface="프리젠테이션 4 Regular" pitchFamily="2" charset="-127"/>
-            </a:endParaRPr>
-          </a:p>
-          <a:p>
-            <a:r>
-              <a:rPr lang="en-US" altLang="ko-KR" sz="2000" dirty="0">
-                <a:latin typeface="프리젠테이션 4 Regular" pitchFamily="2" charset="-127"/>
-                <a:ea typeface="프리젠테이션 4 Regular" pitchFamily="2" charset="-127"/>
-              </a:rPr>
-              <a:t>BMI</a:t>
-            </a:r>
-            <a:r>
-              <a:rPr lang="ko-KR" altLang="en-US" sz="2000" dirty="0">
-                <a:latin typeface="프리젠테이션 4 Regular" pitchFamily="2" charset="-127"/>
-                <a:ea typeface="프리젠테이션 4 Regular" pitchFamily="2" charset="-127"/>
-              </a:rPr>
-              <a:t>가 적으신 분들을 대상으로는 하였지만</a:t>
-            </a:r>
-            <a:r>
-              <a:rPr lang="en-US" altLang="ko-KR" sz="2000" dirty="0">
-                <a:latin typeface="프리젠테이션 4 Regular" pitchFamily="2" charset="-127"/>
-                <a:ea typeface="프리젠테이션 4 Regular" pitchFamily="2" charset="-127"/>
-              </a:rPr>
-              <a:t>, BMI correction</a:t>
-            </a:r>
-            <a:r>
-              <a:rPr lang="ko-KR" altLang="en-US" sz="2000" dirty="0">
-                <a:latin typeface="프리젠테이션 4 Regular" pitchFamily="2" charset="-127"/>
-                <a:ea typeface="프리젠테이션 4 Regular" pitchFamily="2" charset="-127"/>
-              </a:rPr>
-              <a:t>은 필요함</a:t>
-            </a:r>
-            <a:r>
-              <a:rPr lang="en-US" altLang="ko-KR" sz="2000" dirty="0">
-                <a:latin typeface="프리젠테이션 4 Regular" pitchFamily="2" charset="-127"/>
-                <a:ea typeface="프리젠테이션 4 Regular" pitchFamily="2" charset="-127"/>
-              </a:rPr>
-              <a:t>.</a:t>
-            </a:r>
-          </a:p>
-          <a:p>
-            <a:r>
-              <a:rPr lang="ko-KR" altLang="en-US" sz="2000" dirty="0">
-                <a:latin typeface="프리젠테이션 4 Regular" pitchFamily="2" charset="-127"/>
-                <a:ea typeface="프리젠테이션 4 Regular" pitchFamily="2" charset="-127"/>
-              </a:rPr>
-              <a:t>나이 </a:t>
-            </a:r>
-            <a:r>
-              <a:rPr lang="en-US" altLang="ko-KR" sz="2000" dirty="0">
-                <a:latin typeface="프리젠테이션 4 Regular" pitchFamily="2" charset="-127"/>
-                <a:ea typeface="프리젠테이션 4 Regular" pitchFamily="2" charset="-127"/>
-              </a:rPr>
-              <a:t>correction? </a:t>
-            </a:r>
-          </a:p>
-          <a:p>
-            <a:endParaRPr lang="en-US" altLang="ko-KR" sz="2000" dirty="0">
-              <a:latin typeface="프리젠테이션 4 Regular" pitchFamily="2" charset="-127"/>
-              <a:ea typeface="프리젠테이션 4 Regular" pitchFamily="2" charset="-127"/>
-            </a:endParaRPr>
-          </a:p>
-          <a:p>
-            <a:endParaRPr lang="en-US" altLang="ko-KR" sz="2000" dirty="0">
-              <a:latin typeface="프리젠테이션 4 Regular" pitchFamily="2" charset="-127"/>
-              <a:ea typeface="프리젠테이션 4 Regular" pitchFamily="2" charset="-127"/>
-            </a:endParaRPr>
-          </a:p>
-        </p:txBody>
-      </p:sp>
-      <p:sp>
-        <p:nvSpPr>
-          <p:cNvPr id="15" name="Rectangle 3">
-            <a:extLst>
-              <a:ext uri="{FF2B5EF4-FFF2-40B4-BE49-F238E27FC236}">
-                <a16:creationId xmlns:a16="http://schemas.microsoft.com/office/drawing/2014/main" id="{0A729966-9DD8-4DDA-BEBB-8AA9AE23C6C0}"/>
-              </a:ext>
-            </a:extLst>
-          </p:cNvPr>
-          <p:cNvSpPr>
-            <a:spLocks noChangeArrowheads="1"/>
-          </p:cNvSpPr>
-          <p:nvPr/>
-        </p:nvSpPr>
-        <p:spPr bwMode="auto">
-          <a:xfrm>
-            <a:off x="0" y="-323165"/>
-            <a:ext cx="184731" cy="646331"/>
-          </a:xfrm>
-          <a:prstGeom prst="rect">
-            <a:avLst/>
-          </a:prstGeom>
-          <a:noFill/>
-          <a:ln>
-            <a:noFill/>
-          </a:ln>
-          <a:effectLst/>
-          <a:extLst>
-            <a:ext uri="{909E8E84-426E-40DD-AFC4-6F175D3DCCD1}">
-              <a14:hiddenFill xmlns:a14="http://schemas.microsoft.com/office/drawing/2010/main">
-                <a:solidFill>
-                  <a:schemeClr val="accent1"/>
-                </a:solidFill>
-              </a14:hiddenFill>
-            </a:ext>
-            <a:ext uri="{91240B29-F687-4F45-9708-019B960494DF}">
-              <a14:hiddenLine xmlns:a14="http://schemas.microsoft.com/office/drawing/2010/main" w="9525">
-                <a:solidFill>
-                  <a:schemeClr val="tx1"/>
-                </a:solidFill>
-                <a:miter lim="800000"/>
-                <a:headEnd/>
-                <a:tailEnd/>
-              </a14:hiddenLine>
-            </a:ext>
-            <a:ext uri="{AF507438-7753-43E0-B8FC-AC1667EBCBE1}">
-              <a14:hiddenEffects xmlns:a14="http://schemas.microsoft.com/office/drawing/2010/main">
-                <a:effectLst>
-                  <a:outerShdw dist="35921" dir="2700000" algn="ctr" rotWithShape="0">
-                    <a:schemeClr val="bg2"/>
-                  </a:outerShdw>
-                </a:effectLst>
-              </a14:hiddenEffects>
-            </a:ext>
-          </a:extLst>
-        </p:spPr>
-        <p:txBody>
-          <a:bodyPr vert="horz" wrap="none" lIns="91440" tIns="45720" rIns="91440" bIns="45720" numCol="1" anchor="ctr" anchorCtr="0" compatLnSpc="1">
-            <a:prstTxWarp prst="textNoShape">
-              <a:avLst/>
-            </a:prstTxWarp>
-            <a:spAutoFit/>
-          </a:bodyPr>
-          <a:lstStyle/>
-          <a:p>
-            <a:pPr marL="0" marR="0" lvl="0" indent="0" algn="l" defTabSz="914400" rtl="0" eaLnBrk="0" fontAlgn="base" latinLnBrk="0" hangingPunct="0">
-              <a:lnSpc>
-                <a:spcPct val="100000"/>
-              </a:lnSpc>
-              <a:spcBef>
-                <a:spcPct val="0"/>
-              </a:spcBef>
-              <a:spcAft>
-                <a:spcPct val="0"/>
-              </a:spcAft>
-              <a:buClrTx/>
-              <a:buSzTx/>
-              <a:buFontTx/>
-              <a:buNone/>
-              <a:tabLst/>
-            </a:pPr>
-            <a:endParaRPr kumimoji="0" lang="ko-KR" altLang="ko-KR" sz="1800" b="0" i="0" u="none" strike="noStrike" cap="none" normalizeH="0" baseline="0" dirty="0">
-              <a:ln>
-                <a:noFill/>
-              </a:ln>
-              <a:solidFill>
-                <a:schemeClr val="tx1"/>
-              </a:solidFill>
-              <a:effectLst/>
-              <a:latin typeface="Arial" panose="020B0604020202020204" pitchFamily="34" charset="0"/>
-            </a:endParaRPr>
-          </a:p>
-          <a:p>
-            <a:pPr marL="0" marR="0" lvl="0" indent="0" algn="l" defTabSz="914400" rtl="0" eaLnBrk="0" fontAlgn="base" latinLnBrk="0" hangingPunct="0">
-              <a:lnSpc>
-                <a:spcPct val="100000"/>
-              </a:lnSpc>
-              <a:spcBef>
-                <a:spcPct val="0"/>
-              </a:spcBef>
-              <a:spcAft>
-                <a:spcPct val="0"/>
-              </a:spcAft>
-              <a:buClrTx/>
-              <a:buSzTx/>
-              <a:buFontTx/>
-              <a:buNone/>
-              <a:tabLst/>
-            </a:pPr>
-            <a:endParaRPr kumimoji="0" lang="ko-KR" altLang="ko-KR" sz="1800" b="0" i="0" u="none" strike="noStrike" cap="none" normalizeH="0" baseline="0" dirty="0">
-              <a:ln>
-                <a:noFill/>
-              </a:ln>
-              <a:solidFill>
-                <a:schemeClr val="tx1"/>
-              </a:solidFill>
-              <a:effectLst/>
-              <a:latin typeface="Arial" panose="020B0604020202020204" pitchFamily="34" charset="0"/>
-            </a:endParaRPr>
-          </a:p>
-        </p:txBody>
-      </p:sp>
-      <p:sp>
-        <p:nvSpPr>
-          <p:cNvPr id="16" name="내용 개체 틀 2">
-            <a:extLst>
-              <a:ext uri="{FF2B5EF4-FFF2-40B4-BE49-F238E27FC236}">
-                <a16:creationId xmlns:a16="http://schemas.microsoft.com/office/drawing/2014/main" id="{5D00206A-E838-4DC1-8869-33970326FFDB}"/>
-              </a:ext>
-            </a:extLst>
-          </p:cNvPr>
-          <p:cNvSpPr txBox="1">
-            <a:spLocks/>
-          </p:cNvSpPr>
-          <p:nvPr/>
-        </p:nvSpPr>
-        <p:spPr>
-          <a:xfrm>
-            <a:off x="451498" y="3638966"/>
-            <a:ext cx="11563321" cy="2843466"/>
-          </a:xfrm>
-          <a:prstGeom prst="rect">
-            <a:avLst/>
-          </a:prstGeom>
-        </p:spPr>
-        <p:txBody>
-          <a:bodyPr vert="horz" lIns="91440" tIns="45720" rIns="91440" bIns="45720" rtlCol="0">
-            <a:normAutofit/>
-          </a:bodyPr>
-          <a:lstStyle>
-            <a:lvl1pPr marL="228600" indent="-228600" algn="l" defTabSz="914400" rtl="0" eaLnBrk="1" latinLnBrk="1" hangingPunct="1">
-              <a:lnSpc>
-                <a:spcPct val="90000"/>
-              </a:lnSpc>
-              <a:spcBef>
-                <a:spcPts val="1000"/>
-              </a:spcBef>
-              <a:buFont typeface="Arial" panose="020B0604020202020204" pitchFamily="34" charset="0"/>
-              <a:buChar char="•"/>
-              <a:defRPr sz="2800" kern="1200">
-                <a:solidFill>
-                  <a:schemeClr val="tx1"/>
-                </a:solidFill>
-                <a:latin typeface="+mn-lt"/>
-                <a:ea typeface="+mn-ea"/>
-                <a:cs typeface="+mn-cs"/>
-              </a:defRPr>
-            </a:lvl1pPr>
-            <a:lvl2pPr marL="685800" indent="-228600" algn="l" defTabSz="914400" rtl="0" eaLnBrk="1" latinLnBrk="1" hangingPunct="1">
-              <a:lnSpc>
-                <a:spcPct val="90000"/>
-              </a:lnSpc>
-              <a:spcBef>
-                <a:spcPts val="500"/>
-              </a:spcBef>
-              <a:buFont typeface="Arial" panose="020B0604020202020204" pitchFamily="34" charset="0"/>
-              <a:buChar char="•"/>
-              <a:defRPr sz="2400" kern="1200">
-                <a:solidFill>
-                  <a:schemeClr val="tx1"/>
-                </a:solidFill>
-                <a:latin typeface="+mn-lt"/>
-                <a:ea typeface="+mn-ea"/>
-                <a:cs typeface="+mn-cs"/>
-              </a:defRPr>
-            </a:lvl2pPr>
-            <a:lvl3pPr marL="1143000" indent="-228600" algn="l" defTabSz="914400" rtl="0" eaLnBrk="1" latinLnBrk="1" hangingPunct="1">
-              <a:lnSpc>
-                <a:spcPct val="90000"/>
-              </a:lnSpc>
-              <a:spcBef>
-                <a:spcPts val="500"/>
-              </a:spcBef>
-              <a:buFont typeface="Arial" panose="020B0604020202020204" pitchFamily="34" charset="0"/>
-              <a:buChar char="•"/>
-              <a:defRPr sz="2000" kern="1200">
-                <a:solidFill>
-                  <a:schemeClr val="tx1"/>
-                </a:solidFill>
-                <a:latin typeface="+mn-lt"/>
-                <a:ea typeface="+mn-ea"/>
-                <a:cs typeface="+mn-cs"/>
-              </a:defRPr>
-            </a:lvl3pPr>
-            <a:lvl4pPr marL="1600200" indent="-228600" algn="l" defTabSz="914400" rtl="0" eaLnBrk="1" latinLnBrk="1" hangingPunct="1">
-              <a:lnSpc>
-                <a:spcPct val="90000"/>
-              </a:lnSpc>
-              <a:spcBef>
-                <a:spcPts val="500"/>
-              </a:spcBef>
-              <a:buFont typeface="Arial" panose="020B0604020202020204" pitchFamily="34" charset="0"/>
-              <a:buChar char="•"/>
-              <a:defRPr sz="1800" kern="1200">
-                <a:solidFill>
-                  <a:schemeClr val="tx1"/>
-                </a:solidFill>
-                <a:latin typeface="+mn-lt"/>
-                <a:ea typeface="+mn-ea"/>
-                <a:cs typeface="+mn-cs"/>
-              </a:defRPr>
-            </a:lvl4pPr>
-            <a:lvl5pPr marL="2057400" indent="-228600" algn="l" defTabSz="914400" rtl="0" eaLnBrk="1" latinLnBrk="1" hangingPunct="1">
-              <a:lnSpc>
-                <a:spcPct val="90000"/>
-              </a:lnSpc>
-              <a:spcBef>
-                <a:spcPts val="500"/>
-              </a:spcBef>
-              <a:buFont typeface="Arial" panose="020B0604020202020204" pitchFamily="34" charset="0"/>
-              <a:buChar char="•"/>
-              <a:defRPr sz="1800" kern="1200">
-                <a:solidFill>
-                  <a:schemeClr val="tx1"/>
-                </a:solidFill>
-                <a:latin typeface="+mn-lt"/>
-                <a:ea typeface="+mn-ea"/>
-                <a:cs typeface="+mn-cs"/>
-              </a:defRPr>
-            </a:lvl5pPr>
-            <a:lvl6pPr marL="2514600" indent="-228600" algn="l" defTabSz="914400" rtl="0" eaLnBrk="1" latinLnBrk="1" hangingPunct="1">
-              <a:lnSpc>
-                <a:spcPct val="90000"/>
-              </a:lnSpc>
-              <a:spcBef>
-                <a:spcPts val="500"/>
-              </a:spcBef>
-              <a:buFont typeface="Arial" panose="020B0604020202020204" pitchFamily="34" charset="0"/>
-              <a:buChar char="•"/>
-              <a:defRPr sz="1800" kern="1200">
-                <a:solidFill>
-                  <a:schemeClr val="tx1"/>
-                </a:solidFill>
-                <a:latin typeface="+mn-lt"/>
-                <a:ea typeface="+mn-ea"/>
-                <a:cs typeface="+mn-cs"/>
-              </a:defRPr>
-            </a:lvl6pPr>
-            <a:lvl7pPr marL="2971800" indent="-228600" algn="l" defTabSz="914400" rtl="0" eaLnBrk="1" latinLnBrk="1" hangingPunct="1">
-              <a:lnSpc>
-                <a:spcPct val="90000"/>
-              </a:lnSpc>
-              <a:spcBef>
-                <a:spcPts val="500"/>
-              </a:spcBef>
-              <a:buFont typeface="Arial" panose="020B0604020202020204" pitchFamily="34" charset="0"/>
-              <a:buChar char="•"/>
-              <a:defRPr sz="1800" kern="1200">
-                <a:solidFill>
-                  <a:schemeClr val="tx1"/>
-                </a:solidFill>
-                <a:latin typeface="+mn-lt"/>
-                <a:ea typeface="+mn-ea"/>
-                <a:cs typeface="+mn-cs"/>
-              </a:defRPr>
-            </a:lvl7pPr>
-            <a:lvl8pPr marL="3429000" indent="-228600" algn="l" defTabSz="914400" rtl="0" eaLnBrk="1" latinLnBrk="1" hangingPunct="1">
-              <a:lnSpc>
-                <a:spcPct val="90000"/>
-              </a:lnSpc>
-              <a:spcBef>
-                <a:spcPts val="500"/>
-              </a:spcBef>
-              <a:buFont typeface="Arial" panose="020B0604020202020204" pitchFamily="34" charset="0"/>
-              <a:buChar char="•"/>
-              <a:defRPr sz="1800" kern="1200">
-                <a:solidFill>
-                  <a:schemeClr val="tx1"/>
-                </a:solidFill>
-                <a:latin typeface="+mn-lt"/>
-                <a:ea typeface="+mn-ea"/>
-                <a:cs typeface="+mn-cs"/>
-              </a:defRPr>
-            </a:lvl8pPr>
-            <a:lvl9pPr marL="3886200" indent="-228600" algn="l" defTabSz="914400" rtl="0" eaLnBrk="1" latinLnBrk="1" hangingPunct="1">
-              <a:lnSpc>
-                <a:spcPct val="90000"/>
-              </a:lnSpc>
-              <a:spcBef>
-                <a:spcPts val="500"/>
-              </a:spcBef>
-              <a:buFont typeface="Arial" panose="020B0604020202020204" pitchFamily="34" charset="0"/>
-              <a:buChar char="•"/>
-              <a:defRPr sz="1800" kern="1200">
-                <a:solidFill>
-                  <a:schemeClr val="tx1"/>
-                </a:solidFill>
-                <a:latin typeface="+mn-lt"/>
-                <a:ea typeface="+mn-ea"/>
-                <a:cs typeface="+mn-cs"/>
-              </a:defRPr>
-            </a:lvl9pPr>
-          </a:lstStyle>
-          <a:p>
-            <a:pPr marL="0" indent="0">
-              <a:buFont typeface="Arial" panose="020B0604020202020204" pitchFamily="34" charset="0"/>
-              <a:buNone/>
-            </a:pPr>
-            <a:endParaRPr lang="en-US" altLang="ko-KR" sz="2000" dirty="0">
-              <a:latin typeface="프리젠테이션 4 Regular" pitchFamily="2" charset="-127"/>
-              <a:ea typeface="프리젠테이션 4 Regular" pitchFamily="2" charset="-127"/>
-            </a:endParaRPr>
-          </a:p>
-        </p:txBody>
-      </p:sp>
-      <p:sp>
-        <p:nvSpPr>
-          <p:cNvPr id="5" name="내용 개체 틀 2">
-            <a:extLst>
-              <a:ext uri="{FF2B5EF4-FFF2-40B4-BE49-F238E27FC236}">
-                <a16:creationId xmlns:a16="http://schemas.microsoft.com/office/drawing/2014/main" id="{F1991F33-A165-421B-A2AC-9F85F89A411B}"/>
-              </a:ext>
-            </a:extLst>
-          </p:cNvPr>
-          <p:cNvSpPr txBox="1">
-            <a:spLocks/>
-          </p:cNvSpPr>
-          <p:nvPr/>
-        </p:nvSpPr>
-        <p:spPr>
-          <a:xfrm>
-            <a:off x="451498" y="3219034"/>
-            <a:ext cx="10395450" cy="3561512"/>
-          </a:xfrm>
-          <a:prstGeom prst="rect">
-            <a:avLst/>
-          </a:prstGeom>
-        </p:spPr>
-        <p:txBody>
-          <a:bodyPr vert="horz" lIns="91440" tIns="45720" rIns="91440" bIns="45720" rtlCol="0">
-            <a:normAutofit/>
-          </a:bodyPr>
-          <a:lstStyle>
-            <a:lvl1pPr marL="228600" indent="-228600" algn="l" defTabSz="914400" rtl="0" eaLnBrk="1" latinLnBrk="1" hangingPunct="1">
-              <a:lnSpc>
-                <a:spcPct val="90000"/>
-              </a:lnSpc>
-              <a:spcBef>
-                <a:spcPts val="1000"/>
-              </a:spcBef>
-              <a:buFont typeface="Arial" panose="020B0604020202020204" pitchFamily="34" charset="0"/>
-              <a:buChar char="•"/>
-              <a:defRPr sz="2800" kern="1200">
-                <a:solidFill>
-                  <a:schemeClr val="tx1"/>
-                </a:solidFill>
-                <a:latin typeface="+mn-lt"/>
-                <a:ea typeface="+mn-ea"/>
-                <a:cs typeface="+mn-cs"/>
-              </a:defRPr>
-            </a:lvl1pPr>
-            <a:lvl2pPr marL="685800" indent="-228600" algn="l" defTabSz="914400" rtl="0" eaLnBrk="1" latinLnBrk="1" hangingPunct="1">
-              <a:lnSpc>
-                <a:spcPct val="90000"/>
-              </a:lnSpc>
-              <a:spcBef>
-                <a:spcPts val="500"/>
-              </a:spcBef>
-              <a:buFont typeface="Arial" panose="020B0604020202020204" pitchFamily="34" charset="0"/>
-              <a:buChar char="•"/>
-              <a:defRPr sz="2400" kern="1200">
-                <a:solidFill>
-                  <a:schemeClr val="tx1"/>
-                </a:solidFill>
-                <a:latin typeface="+mn-lt"/>
-                <a:ea typeface="+mn-ea"/>
-                <a:cs typeface="+mn-cs"/>
-              </a:defRPr>
-            </a:lvl2pPr>
-            <a:lvl3pPr marL="1143000" indent="-228600" algn="l" defTabSz="914400" rtl="0" eaLnBrk="1" latinLnBrk="1" hangingPunct="1">
-              <a:lnSpc>
-                <a:spcPct val="90000"/>
-              </a:lnSpc>
-              <a:spcBef>
-                <a:spcPts val="500"/>
-              </a:spcBef>
-              <a:buFont typeface="Arial" panose="020B0604020202020204" pitchFamily="34" charset="0"/>
-              <a:buChar char="•"/>
-              <a:defRPr sz="2000" kern="1200">
-                <a:solidFill>
-                  <a:schemeClr val="tx1"/>
-                </a:solidFill>
-                <a:latin typeface="+mn-lt"/>
-                <a:ea typeface="+mn-ea"/>
-                <a:cs typeface="+mn-cs"/>
-              </a:defRPr>
-            </a:lvl3pPr>
-            <a:lvl4pPr marL="1600200" indent="-228600" algn="l" defTabSz="914400" rtl="0" eaLnBrk="1" latinLnBrk="1" hangingPunct="1">
-              <a:lnSpc>
-                <a:spcPct val="90000"/>
-              </a:lnSpc>
-              <a:spcBef>
-                <a:spcPts val="500"/>
-              </a:spcBef>
-              <a:buFont typeface="Arial" panose="020B0604020202020204" pitchFamily="34" charset="0"/>
-              <a:buChar char="•"/>
-              <a:defRPr sz="1800" kern="1200">
-                <a:solidFill>
-                  <a:schemeClr val="tx1"/>
-                </a:solidFill>
-                <a:latin typeface="+mn-lt"/>
-                <a:ea typeface="+mn-ea"/>
-                <a:cs typeface="+mn-cs"/>
-              </a:defRPr>
-            </a:lvl4pPr>
-            <a:lvl5pPr marL="2057400" indent="-228600" algn="l" defTabSz="914400" rtl="0" eaLnBrk="1" latinLnBrk="1" hangingPunct="1">
-              <a:lnSpc>
-                <a:spcPct val="90000"/>
-              </a:lnSpc>
-              <a:spcBef>
-                <a:spcPts val="500"/>
-              </a:spcBef>
-              <a:buFont typeface="Arial" panose="020B0604020202020204" pitchFamily="34" charset="0"/>
-              <a:buChar char="•"/>
-              <a:defRPr sz="1800" kern="1200">
-                <a:solidFill>
-                  <a:schemeClr val="tx1"/>
-                </a:solidFill>
-                <a:latin typeface="+mn-lt"/>
-                <a:ea typeface="+mn-ea"/>
-                <a:cs typeface="+mn-cs"/>
-              </a:defRPr>
-            </a:lvl5pPr>
-            <a:lvl6pPr marL="2514600" indent="-228600" algn="l" defTabSz="914400" rtl="0" eaLnBrk="1" latinLnBrk="1" hangingPunct="1">
-              <a:lnSpc>
-                <a:spcPct val="90000"/>
-              </a:lnSpc>
-              <a:spcBef>
-                <a:spcPts val="500"/>
-              </a:spcBef>
-              <a:buFont typeface="Arial" panose="020B0604020202020204" pitchFamily="34" charset="0"/>
-              <a:buChar char="•"/>
-              <a:defRPr sz="1800" kern="1200">
-                <a:solidFill>
-                  <a:schemeClr val="tx1"/>
-                </a:solidFill>
-                <a:latin typeface="+mn-lt"/>
-                <a:ea typeface="+mn-ea"/>
-                <a:cs typeface="+mn-cs"/>
-              </a:defRPr>
-            </a:lvl6pPr>
-            <a:lvl7pPr marL="2971800" indent="-228600" algn="l" defTabSz="914400" rtl="0" eaLnBrk="1" latinLnBrk="1" hangingPunct="1">
-              <a:lnSpc>
-                <a:spcPct val="90000"/>
-              </a:lnSpc>
-              <a:spcBef>
-                <a:spcPts val="500"/>
-              </a:spcBef>
-              <a:buFont typeface="Arial" panose="020B0604020202020204" pitchFamily="34" charset="0"/>
-              <a:buChar char="•"/>
-              <a:defRPr sz="1800" kern="1200">
-                <a:solidFill>
-                  <a:schemeClr val="tx1"/>
-                </a:solidFill>
-                <a:latin typeface="+mn-lt"/>
-                <a:ea typeface="+mn-ea"/>
-                <a:cs typeface="+mn-cs"/>
-              </a:defRPr>
-            </a:lvl7pPr>
-            <a:lvl8pPr marL="3429000" indent="-228600" algn="l" defTabSz="914400" rtl="0" eaLnBrk="1" latinLnBrk="1" hangingPunct="1">
-              <a:lnSpc>
-                <a:spcPct val="90000"/>
-              </a:lnSpc>
-              <a:spcBef>
-                <a:spcPts val="500"/>
-              </a:spcBef>
-              <a:buFont typeface="Arial" panose="020B0604020202020204" pitchFamily="34" charset="0"/>
-              <a:buChar char="•"/>
-              <a:defRPr sz="1800" kern="1200">
-                <a:solidFill>
-                  <a:schemeClr val="tx1"/>
-                </a:solidFill>
-                <a:latin typeface="+mn-lt"/>
-                <a:ea typeface="+mn-ea"/>
-                <a:cs typeface="+mn-cs"/>
-              </a:defRPr>
-            </a:lvl8pPr>
-            <a:lvl9pPr marL="3886200" indent="-228600" algn="l" defTabSz="914400" rtl="0" eaLnBrk="1" latinLnBrk="1" hangingPunct="1">
-              <a:lnSpc>
-                <a:spcPct val="90000"/>
-              </a:lnSpc>
-              <a:spcBef>
-                <a:spcPts val="500"/>
-              </a:spcBef>
-              <a:buFont typeface="Arial" panose="020B0604020202020204" pitchFamily="34" charset="0"/>
-              <a:buChar char="•"/>
-              <a:defRPr sz="1800" kern="1200">
-                <a:solidFill>
-                  <a:schemeClr val="tx1"/>
-                </a:solidFill>
-                <a:latin typeface="+mn-lt"/>
-                <a:ea typeface="+mn-ea"/>
-                <a:cs typeface="+mn-cs"/>
-              </a:defRPr>
-            </a:lvl9pPr>
-          </a:lstStyle>
-          <a:p>
-            <a:pPr marL="0" indent="0">
-              <a:buFont typeface="Arial" panose="020B0604020202020204" pitchFamily="34" charset="0"/>
-              <a:buNone/>
-            </a:pPr>
-            <a:r>
-              <a:rPr lang="en-US" altLang="ko-KR" dirty="0">
-                <a:latin typeface="프리젠테이션 4 Regular" pitchFamily="2" charset="-127"/>
-                <a:ea typeface="프리젠테이션 4 Regular" pitchFamily="2" charset="-127"/>
-              </a:rPr>
-              <a:t> [Column</a:t>
-            </a:r>
-            <a:r>
-              <a:rPr lang="ko-KR" altLang="en-US" dirty="0">
-                <a:latin typeface="프리젠테이션 4 Regular" pitchFamily="2" charset="-127"/>
-                <a:ea typeface="프리젠테이션 4 Regular" pitchFamily="2" charset="-127"/>
-              </a:rPr>
-              <a:t>이해</a:t>
-            </a:r>
-            <a:r>
-              <a:rPr lang="en-US" altLang="ko-KR" dirty="0">
-                <a:latin typeface="프리젠테이션 4 Regular" pitchFamily="2" charset="-127"/>
-                <a:ea typeface="프리젠테이션 4 Regular" pitchFamily="2" charset="-127"/>
-              </a:rPr>
-              <a:t>]</a:t>
-            </a:r>
-          </a:p>
-          <a:p>
-            <a:pPr marL="0" indent="0">
-              <a:buFont typeface="Arial" panose="020B0604020202020204" pitchFamily="34" charset="0"/>
-              <a:buNone/>
-            </a:pPr>
-            <a:r>
-              <a:rPr lang="ko-KR" altLang="en-US" sz="2000" dirty="0">
-                <a:latin typeface="프리젠테이션 4 Regular" pitchFamily="2" charset="-127"/>
-                <a:ea typeface="프리젠테이션 4 Regular" pitchFamily="2" charset="-127"/>
-              </a:rPr>
-              <a:t>대사</a:t>
-            </a:r>
-            <a:r>
-              <a:rPr lang="en-US" altLang="ko-KR" sz="2000" dirty="0">
-                <a:latin typeface="프리젠테이션 4 Regular" pitchFamily="2" charset="-127"/>
-                <a:ea typeface="프리젠테이션 4 Regular" pitchFamily="2" charset="-127"/>
-              </a:rPr>
-              <a:t>, </a:t>
-            </a:r>
-            <a:r>
-              <a:rPr lang="ko-KR" altLang="en-US" sz="2000" dirty="0">
-                <a:latin typeface="프리젠테이션 4 Regular" pitchFamily="2" charset="-127"/>
-                <a:ea typeface="프리젠테이션 4 Regular" pitchFamily="2" charset="-127"/>
-              </a:rPr>
-              <a:t>간</a:t>
-            </a:r>
-            <a:r>
-              <a:rPr lang="en-US" altLang="ko-KR" sz="2000" dirty="0">
-                <a:latin typeface="프리젠테이션 4 Regular" pitchFamily="2" charset="-127"/>
-                <a:ea typeface="프리젠테이션 4 Regular" pitchFamily="2" charset="-127"/>
-              </a:rPr>
-              <a:t>, </a:t>
-            </a:r>
-            <a:r>
-              <a:rPr lang="ko-KR" altLang="en-US" sz="2000" dirty="0">
-                <a:latin typeface="프리젠테이션 4 Regular" pitchFamily="2" charset="-127"/>
-                <a:ea typeface="프리젠테이션 4 Regular" pitchFamily="2" charset="-127"/>
-              </a:rPr>
-              <a:t>신장 기능 평가 지표</a:t>
-            </a:r>
-            <a:endParaRPr lang="en-US" altLang="ko-KR" sz="2000" dirty="0">
-              <a:latin typeface="프리젠테이션 4 Regular" pitchFamily="2" charset="-127"/>
-              <a:ea typeface="프리젠테이션 4 Regular" pitchFamily="2" charset="-127"/>
-            </a:endParaRPr>
-          </a:p>
-          <a:p>
-            <a:pPr>
-              <a:buFontTx/>
-              <a:buChar char="-"/>
-            </a:pPr>
-            <a:r>
-              <a:rPr lang="en-US" altLang="ko-KR" sz="2000" dirty="0">
-                <a:latin typeface="프리젠테이션 4 Regular" pitchFamily="2" charset="-127"/>
-                <a:ea typeface="프리젠테이션 4 Regular" pitchFamily="2" charset="-127"/>
-              </a:rPr>
-              <a:t>Sex, Age, BMI(Metabolic)</a:t>
-            </a:r>
-          </a:p>
-          <a:p>
-            <a:pPr>
-              <a:buFontTx/>
-              <a:buChar char="-"/>
-            </a:pPr>
-            <a:r>
-              <a:rPr lang="en-US" altLang="ko-KR" sz="2000" dirty="0">
-                <a:latin typeface="프리젠테이션 4 Regular" pitchFamily="2" charset="-127"/>
-                <a:ea typeface="프리젠테이션 4 Regular" pitchFamily="2" charset="-127"/>
-              </a:rPr>
-              <a:t>Liver : </a:t>
-            </a:r>
-            <a:r>
-              <a:rPr lang="en-US" altLang="ko-KR" sz="2000" dirty="0">
-                <a:solidFill>
-                  <a:srgbClr val="0070C0"/>
-                </a:solidFill>
-                <a:latin typeface="프리젠테이션 4 Regular" pitchFamily="2" charset="-127"/>
-                <a:ea typeface="프리젠테이션 4 Regular" pitchFamily="2" charset="-127"/>
-              </a:rPr>
-              <a:t>AST</a:t>
-            </a:r>
-            <a:r>
-              <a:rPr lang="ko-KR" altLang="en-US" sz="2000" dirty="0">
-                <a:solidFill>
-                  <a:srgbClr val="0070C0"/>
-                </a:solidFill>
-                <a:latin typeface="프리젠테이션 4 Regular" pitchFamily="2" charset="-127"/>
-                <a:ea typeface="프리젠테이션 4 Regular" pitchFamily="2" charset="-127"/>
-              </a:rPr>
-              <a:t>  </a:t>
-            </a:r>
-            <a:r>
-              <a:rPr lang="en-US" altLang="ko-KR" sz="2000" dirty="0">
-                <a:solidFill>
-                  <a:srgbClr val="0070C0"/>
-                </a:solidFill>
-                <a:latin typeface="프리젠테이션 4 Regular" pitchFamily="2" charset="-127"/>
-                <a:ea typeface="프리젠테이션 4 Regular" pitchFamily="2" charset="-127"/>
-              </a:rPr>
-              <a:t>ALT</a:t>
-            </a:r>
-            <a:r>
-              <a:rPr lang="ko-KR" altLang="en-US" sz="2000" dirty="0">
-                <a:solidFill>
-                  <a:srgbClr val="0070C0"/>
-                </a:solidFill>
-                <a:latin typeface="프리젠테이션 4 Regular" pitchFamily="2" charset="-127"/>
-                <a:ea typeface="프리젠테이션 4 Regular" pitchFamily="2" charset="-127"/>
-              </a:rPr>
-              <a:t>  </a:t>
-            </a:r>
-            <a:r>
-              <a:rPr lang="en-US" altLang="ko-KR" sz="2000" dirty="0">
-                <a:solidFill>
-                  <a:srgbClr val="0070C0"/>
-                </a:solidFill>
-                <a:latin typeface="프리젠테이션 4 Regular" pitchFamily="2" charset="-127"/>
-                <a:ea typeface="프리젠테이션 4 Regular" pitchFamily="2" charset="-127"/>
-              </a:rPr>
-              <a:t>ALP</a:t>
-            </a:r>
-            <a:r>
-              <a:rPr lang="ko-KR" altLang="en-US" sz="2000" dirty="0">
-                <a:solidFill>
-                  <a:srgbClr val="0070C0"/>
-                </a:solidFill>
-                <a:latin typeface="프리젠테이션 4 Regular" pitchFamily="2" charset="-127"/>
-                <a:ea typeface="프리젠테이션 4 Regular" pitchFamily="2" charset="-127"/>
-              </a:rPr>
-              <a:t>  </a:t>
-            </a:r>
-            <a:r>
-              <a:rPr lang="en-US" altLang="ko-KR" sz="2000" dirty="0">
-                <a:solidFill>
-                  <a:srgbClr val="0070C0"/>
-                </a:solidFill>
-                <a:latin typeface="프리젠테이션 4 Regular" pitchFamily="2" charset="-127"/>
-                <a:ea typeface="프리젠테이션 4 Regular" pitchFamily="2" charset="-127"/>
-              </a:rPr>
-              <a:t>Bilirubin  </a:t>
-            </a:r>
-            <a:r>
-              <a:rPr lang="en-US" altLang="ko-KR" sz="2000" dirty="0">
-                <a:solidFill>
-                  <a:srgbClr val="FF0000"/>
-                </a:solidFill>
-                <a:latin typeface="프리젠테이션 4 Regular" pitchFamily="2" charset="-127"/>
-                <a:ea typeface="프리젠테이션 4 Regular" pitchFamily="2" charset="-127"/>
-              </a:rPr>
-              <a:t>Protein  Albumin  </a:t>
-            </a:r>
-            <a:r>
-              <a:rPr lang="en-US" altLang="ko-KR" sz="2000" dirty="0">
-                <a:solidFill>
-                  <a:schemeClr val="accent1"/>
-                </a:solidFill>
-                <a:latin typeface="프리젠테이션 4 Regular" pitchFamily="2" charset="-127"/>
-                <a:ea typeface="프리젠테이션 4 Regular" pitchFamily="2" charset="-127"/>
-              </a:rPr>
-              <a:t>PT  APTT</a:t>
-            </a:r>
-          </a:p>
-          <a:p>
-            <a:pPr>
-              <a:buFontTx/>
-              <a:buChar char="-"/>
-            </a:pPr>
-            <a:r>
-              <a:rPr lang="en-US" altLang="ko-KR" sz="2000" dirty="0">
-                <a:latin typeface="프리젠테이션 4 Regular" pitchFamily="2" charset="-127"/>
-                <a:ea typeface="프리젠테이션 4 Regular" pitchFamily="2" charset="-127"/>
-              </a:rPr>
-              <a:t>Metabolic : </a:t>
-            </a:r>
-            <a:r>
-              <a:rPr lang="en-US" altLang="ko-KR" sz="2000" dirty="0">
-                <a:solidFill>
-                  <a:schemeClr val="accent1"/>
-                </a:solidFill>
-                <a:latin typeface="프리젠테이션 4 Regular" pitchFamily="2" charset="-127"/>
-                <a:ea typeface="프리젠테이션 4 Regular" pitchFamily="2" charset="-127"/>
-              </a:rPr>
-              <a:t>Cholesterol	TG	LDL	HDL	</a:t>
-            </a:r>
-            <a:r>
-              <a:rPr lang="en-US" altLang="ko-KR" sz="2000" dirty="0" err="1">
-                <a:solidFill>
-                  <a:schemeClr val="accent1"/>
-                </a:solidFill>
-                <a:latin typeface="프리젠테이션 4 Regular" pitchFamily="2" charset="-127"/>
-                <a:ea typeface="프리젠테이션 4 Regular" pitchFamily="2" charset="-127"/>
-              </a:rPr>
-              <a:t>R_Glucose</a:t>
-            </a:r>
-            <a:r>
-              <a:rPr lang="en-US" altLang="ko-KR" sz="2000" dirty="0">
-                <a:solidFill>
-                  <a:schemeClr val="accent1"/>
-                </a:solidFill>
-                <a:latin typeface="프리젠테이션 4 Regular" pitchFamily="2" charset="-127"/>
-                <a:ea typeface="프리젠테이션 4 Regular" pitchFamily="2" charset="-127"/>
-              </a:rPr>
-              <a:t>	</a:t>
-            </a:r>
-            <a:r>
-              <a:rPr lang="en-US" altLang="ko-KR" sz="2000" dirty="0" err="1">
-                <a:solidFill>
-                  <a:schemeClr val="accent1"/>
-                </a:solidFill>
-                <a:latin typeface="프리젠테이션 4 Regular" pitchFamily="2" charset="-127"/>
-                <a:ea typeface="프리젠테이션 4 Regular" pitchFamily="2" charset="-127"/>
-              </a:rPr>
-              <a:t>F_Glucose</a:t>
-            </a:r>
-            <a:r>
-              <a:rPr lang="en-US" altLang="ko-KR" sz="2000" dirty="0">
-                <a:solidFill>
-                  <a:schemeClr val="accent1"/>
-                </a:solidFill>
-                <a:latin typeface="프리젠테이션 4 Regular" pitchFamily="2" charset="-127"/>
-                <a:ea typeface="프리젠테이션 4 Regular" pitchFamily="2" charset="-127"/>
-              </a:rPr>
-              <a:t>	HbA1c</a:t>
-            </a:r>
-          </a:p>
-          <a:p>
-            <a:pPr>
-              <a:buFontTx/>
-              <a:buChar char="-"/>
-            </a:pPr>
-            <a:r>
-              <a:rPr lang="en-US" altLang="ko-KR" sz="2000" dirty="0">
-                <a:latin typeface="프리젠테이션 4 Regular" pitchFamily="2" charset="-127"/>
-                <a:ea typeface="프리젠테이션 4 Regular" pitchFamily="2" charset="-127"/>
-              </a:rPr>
-              <a:t>Kidney: </a:t>
-            </a:r>
-            <a:r>
-              <a:rPr lang="en-US" altLang="ko-KR" sz="2000" dirty="0">
-                <a:solidFill>
-                  <a:schemeClr val="accent1"/>
-                </a:solidFill>
-                <a:latin typeface="프리젠테이션 4 Regular" pitchFamily="2" charset="-127"/>
-                <a:ea typeface="프리젠테이션 4 Regular" pitchFamily="2" charset="-127"/>
-              </a:rPr>
-              <a:t>BUN     Cr</a:t>
-            </a:r>
-            <a:r>
-              <a:rPr lang="en-US" altLang="ko-KR" sz="2000" dirty="0">
-                <a:latin typeface="프리젠테이션 4 Regular" pitchFamily="2" charset="-127"/>
-                <a:ea typeface="프리젠테이션 4 Regular" pitchFamily="2" charset="-127"/>
-              </a:rPr>
-              <a:t>	</a:t>
-            </a:r>
-            <a:r>
-              <a:rPr lang="en-US" altLang="ko-KR" sz="2000" dirty="0">
-                <a:solidFill>
-                  <a:srgbClr val="FF0000"/>
-                </a:solidFill>
-                <a:latin typeface="프리젠테이션 4 Regular" pitchFamily="2" charset="-127"/>
-                <a:ea typeface="프리젠테이션 4 Regular" pitchFamily="2" charset="-127"/>
-              </a:rPr>
-              <a:t>GFR(CKD_EPI)  </a:t>
-            </a:r>
-            <a:r>
-              <a:rPr lang="en-US" altLang="ko-KR" sz="2000" dirty="0" err="1">
-                <a:solidFill>
-                  <a:srgbClr val="FF0000"/>
-                </a:solidFill>
-                <a:latin typeface="프리젠테이션 4 Regular" pitchFamily="2" charset="-127"/>
-                <a:ea typeface="프리젠테이션 4 Regular" pitchFamily="2" charset="-127"/>
-              </a:rPr>
-              <a:t>CrCl</a:t>
-            </a:r>
-            <a:endParaRPr lang="en-US" altLang="ko-KR" sz="2000" dirty="0">
-              <a:solidFill>
-                <a:srgbClr val="FF0000"/>
-              </a:solidFill>
-              <a:latin typeface="프리젠테이션 4 Regular" pitchFamily="2" charset="-127"/>
-              <a:ea typeface="프리젠테이션 4 Regular" pitchFamily="2" charset="-127"/>
-            </a:endParaRPr>
-          </a:p>
-          <a:p>
-            <a:pPr>
-              <a:buFontTx/>
-              <a:buChar char="-"/>
-            </a:pPr>
-            <a:r>
-              <a:rPr lang="en-US" altLang="ko-KR" sz="2000" dirty="0" err="1">
-                <a:latin typeface="프리젠테이션 4 Regular" pitchFamily="2" charset="-127"/>
-                <a:ea typeface="프리젠테이션 4 Regular" pitchFamily="2" charset="-127"/>
-              </a:rPr>
-              <a:t>Etc</a:t>
-            </a:r>
-            <a:r>
-              <a:rPr lang="en-US" altLang="ko-KR" sz="2000" dirty="0">
-                <a:latin typeface="프리젠테이션 4 Regular" pitchFamily="2" charset="-127"/>
-                <a:ea typeface="프리젠테이션 4 Regular" pitchFamily="2" charset="-127"/>
-              </a:rPr>
-              <a:t>: </a:t>
-            </a:r>
-            <a:r>
-              <a:rPr lang="en-US" altLang="ko-KR" sz="2000" dirty="0">
-                <a:solidFill>
-                  <a:schemeClr val="accent1"/>
-                </a:solidFill>
-                <a:latin typeface="프리젠테이션 4 Regular" pitchFamily="2" charset="-127"/>
-                <a:ea typeface="프리젠테이션 4 Regular" pitchFamily="2" charset="-127"/>
-              </a:rPr>
-              <a:t>Amylase   CRP</a:t>
-            </a:r>
-          </a:p>
-          <a:p>
-            <a:pPr>
-              <a:buFontTx/>
-              <a:buChar char="-"/>
-            </a:pPr>
-            <a:endParaRPr lang="en-US" altLang="ko-KR" sz="2400" dirty="0">
-              <a:latin typeface="프리젠테이션 4 Regular" pitchFamily="2" charset="-127"/>
-              <a:ea typeface="프리젠테이션 4 Regular" pitchFamily="2" charset="-127"/>
-            </a:endParaRPr>
-          </a:p>
-          <a:p>
-            <a:pPr>
-              <a:buFontTx/>
-              <a:buChar char="-"/>
-            </a:pPr>
-            <a:endParaRPr lang="en-US" altLang="ko-KR" sz="2400" dirty="0">
-              <a:latin typeface="프리젠테이션 4 Regular" pitchFamily="2" charset="-127"/>
-              <a:ea typeface="프리젠테이션 4 Regular" pitchFamily="2" charset="-127"/>
-            </a:endParaRPr>
-          </a:p>
-          <a:p>
-            <a:pPr lvl="1">
-              <a:buFontTx/>
-              <a:buChar char="-"/>
-            </a:pPr>
-            <a:endParaRPr lang="en-US" altLang="ko-KR" sz="2000" dirty="0">
-              <a:latin typeface="프리젠테이션 4 Regular" pitchFamily="2" charset="-127"/>
-              <a:ea typeface="프리젠테이션 4 Regular" pitchFamily="2" charset="-127"/>
-            </a:endParaRPr>
-          </a:p>
-          <a:p>
-            <a:pPr>
-              <a:buFontTx/>
-              <a:buChar char="-"/>
-            </a:pPr>
-            <a:endParaRPr lang="en-US" altLang="ko-KR" sz="2400" dirty="0">
-              <a:latin typeface="프리젠테이션 4 Regular" pitchFamily="2" charset="-127"/>
-              <a:ea typeface="프리젠테이션 4 Regular" pitchFamily="2" charset="-127"/>
-            </a:endParaRPr>
-          </a:p>
-          <a:p>
-            <a:pPr>
-              <a:buFontTx/>
-              <a:buChar char="-"/>
-            </a:pPr>
-            <a:endParaRPr lang="en-US" altLang="ko-KR" sz="2400" dirty="0">
-              <a:latin typeface="프리젠테이션 4 Regular" pitchFamily="2" charset="-127"/>
-              <a:ea typeface="프리젠테이션 4 Regular" pitchFamily="2" charset="-127"/>
-            </a:endParaRPr>
-          </a:p>
-        </p:txBody>
-      </p:sp>
-    </p:spTree>
-    <p:extLst>
-      <p:ext uri="{BB962C8B-B14F-4D97-AF65-F5344CB8AC3E}">
-        <p14:creationId xmlns:p14="http://schemas.microsoft.com/office/powerpoint/2010/main" val="2972237924"/>
-      </p:ext>
-    </p:extLst>
-  </p:cSld>
-  <p:clrMapOvr>
-    <a:masterClrMapping/>
-  </p:clrMapOvr>
-</p:sld>
-</file>
-
-<file path=ppt/slides/slide20.xml><?xml version="1.0" encoding="utf-8"?>
+<file path=ppt/slides/slide19.xml><?xml version="1.0" encoding="utf-8"?>
 <p:sld xmlns:a="http://schemas.openxmlformats.org/drawingml/2006/main" xmlns:r="http://schemas.openxmlformats.org/officeDocument/2006/relationships" xmlns:p="http://schemas.openxmlformats.org/presentationml/2006/main">
   <p:cSld>
     <p:spTree>
@@ -16677,7 +14154,1327 @@
 </p:sld>
 </file>
 
-<file path=ppt/slides/slide21.xml><?xml version="1.0" encoding="utf-8"?>
+<file path=ppt/slides/slide2.xml><?xml version="1.0" encoding="utf-8"?>
+<p:sld xmlns:a="http://schemas.openxmlformats.org/drawingml/2006/main" xmlns:r="http://schemas.openxmlformats.org/officeDocument/2006/relationships" xmlns:p="http://schemas.openxmlformats.org/presentationml/2006/main">
+  <p:cSld>
+    <p:spTree>
+      <p:nvGrpSpPr>
+        <p:cNvPr id="1" name=""/>
+        <p:cNvGrpSpPr/>
+        <p:nvPr/>
+      </p:nvGrpSpPr>
+      <p:grpSpPr>
+        <a:xfrm>
+          <a:off x="0" y="0"/>
+          <a:ext cx="0" cy="0"/>
+          <a:chOff x="0" y="0"/>
+          <a:chExt cx="0" cy="0"/>
+        </a:xfrm>
+      </p:grpSpPr>
+      <p:sp>
+        <p:nvSpPr>
+          <p:cNvPr id="3" name="내용 개체 틀 2">
+            <a:extLst>
+              <a:ext uri="{FF2B5EF4-FFF2-40B4-BE49-F238E27FC236}">
+                <a16:creationId xmlns:a16="http://schemas.microsoft.com/office/drawing/2014/main" id="{BA7632E5-1D37-485F-B68F-BADA4B1FB2F0}"/>
+              </a:ext>
+            </a:extLst>
+          </p:cNvPr>
+          <p:cNvSpPr>
+            <a:spLocks noGrp="1"/>
+          </p:cNvSpPr>
+          <p:nvPr>
+            <p:ph idx="1"/>
+          </p:nvPr>
+        </p:nvSpPr>
+        <p:spPr>
+          <a:xfrm>
+            <a:off x="451498" y="213288"/>
+            <a:ext cx="11563321" cy="2707632"/>
+          </a:xfrm>
+        </p:spPr>
+        <p:txBody>
+          <a:bodyPr>
+            <a:normAutofit/>
+          </a:bodyPr>
+          <a:lstStyle/>
+          <a:p>
+            <a:pPr marL="0" indent="0">
+              <a:buNone/>
+            </a:pPr>
+            <a:r>
+              <a:rPr lang="en-US" altLang="ko-KR" dirty="0">
+                <a:latin typeface="프리젠테이션 4 Regular" pitchFamily="2" charset="-127"/>
+                <a:ea typeface="프리젠테이션 4 Regular" pitchFamily="2" charset="-127"/>
+              </a:rPr>
+              <a:t>[</a:t>
+            </a:r>
+            <a:r>
+              <a:rPr lang="ko-KR" altLang="en-US" dirty="0">
+                <a:latin typeface="프리젠테이션 4 Regular" pitchFamily="2" charset="-127"/>
+                <a:ea typeface="프리젠테이션 4 Regular" pitchFamily="2" charset="-127"/>
+              </a:rPr>
+              <a:t>데이터셋</a:t>
+            </a:r>
+            <a:r>
+              <a:rPr lang="en-US" altLang="ko-KR" dirty="0">
+                <a:latin typeface="프리젠테이션 4 Regular" pitchFamily="2" charset="-127"/>
+                <a:ea typeface="프리젠테이션 4 Regular" pitchFamily="2" charset="-127"/>
+              </a:rPr>
+              <a:t>]</a:t>
+            </a:r>
+          </a:p>
+          <a:p>
+            <a:r>
+              <a:rPr lang="ko-KR" altLang="en-US" sz="2000" dirty="0">
+                <a:latin typeface="프리젠테이션 4 Regular" pitchFamily="2" charset="-127"/>
+                <a:ea typeface="프리젠테이션 4 Regular" pitchFamily="2" charset="-127"/>
+              </a:rPr>
+              <a:t>총 </a:t>
+            </a:r>
+            <a:r>
+              <a:rPr lang="en-US" altLang="ko-KR" sz="2000" dirty="0">
+                <a:latin typeface="프리젠테이션 4 Regular" pitchFamily="2" charset="-127"/>
+                <a:ea typeface="프리젠테이션 4 Regular" pitchFamily="2" charset="-127"/>
+              </a:rPr>
+              <a:t>44</a:t>
+            </a:r>
+            <a:r>
+              <a:rPr lang="ko-KR" altLang="en-US" sz="2000" dirty="0">
+                <a:latin typeface="프리젠테이션 4 Regular" pitchFamily="2" charset="-127"/>
+                <a:ea typeface="프리젠테이션 4 Regular" pitchFamily="2" charset="-127"/>
+              </a:rPr>
+              <a:t>명의 환자</a:t>
+            </a:r>
+            <a:r>
+              <a:rPr lang="en-US" altLang="ko-KR" sz="2000" dirty="0">
+                <a:latin typeface="프리젠테이션 4 Regular" pitchFamily="2" charset="-127"/>
+                <a:ea typeface="프리젠테이션 4 Regular" pitchFamily="2" charset="-127"/>
+              </a:rPr>
+              <a:t>- </a:t>
+            </a:r>
+            <a:r>
+              <a:rPr lang="ko-KR" altLang="en-US" sz="2000" dirty="0">
+                <a:latin typeface="프리젠테이션 4 Regular" pitchFamily="2" charset="-127"/>
+                <a:ea typeface="프리젠테이션 4 Regular" pitchFamily="2" charset="-127"/>
+              </a:rPr>
+              <a:t>모두 건강하고</a:t>
+            </a:r>
+            <a:r>
+              <a:rPr lang="en-US" altLang="ko-KR" sz="2000" dirty="0">
+                <a:latin typeface="프리젠테이션 4 Regular" pitchFamily="2" charset="-127"/>
+                <a:ea typeface="프리젠테이션 4 Regular" pitchFamily="2" charset="-127"/>
+              </a:rPr>
+              <a:t>, </a:t>
+            </a:r>
+            <a:r>
+              <a:rPr lang="ko-KR" altLang="en-US" sz="2000" dirty="0">
+                <a:latin typeface="프리젠테이션 4 Regular" pitchFamily="2" charset="-127"/>
+                <a:ea typeface="프리젠테이션 4 Regular" pitchFamily="2" charset="-127"/>
+              </a:rPr>
+              <a:t>위에 </a:t>
+            </a:r>
+            <a:r>
+              <a:rPr lang="en-US" altLang="ko-KR" sz="2000" dirty="0">
+                <a:latin typeface="프리젠테이션 4 Regular" pitchFamily="2" charset="-127"/>
+                <a:ea typeface="프리젠테이션 4 Regular" pitchFamily="2" charset="-127"/>
+              </a:rPr>
+              <a:t>22</a:t>
+            </a:r>
+            <a:r>
+              <a:rPr lang="ko-KR" altLang="en-US" sz="2000" dirty="0">
+                <a:latin typeface="프리젠테이션 4 Regular" pitchFamily="2" charset="-127"/>
+                <a:ea typeface="프리젠테이션 4 Regular" pitchFamily="2" charset="-127"/>
+              </a:rPr>
+              <a:t>명과 아래 </a:t>
+            </a:r>
+            <a:r>
+              <a:rPr lang="en-US" altLang="ko-KR" sz="2000" dirty="0">
+                <a:latin typeface="프리젠테이션 4 Regular" pitchFamily="2" charset="-127"/>
+                <a:ea typeface="프리젠테이션 4 Regular" pitchFamily="2" charset="-127"/>
+              </a:rPr>
+              <a:t>22</a:t>
+            </a:r>
+            <a:r>
+              <a:rPr lang="ko-KR" altLang="en-US" sz="2000" dirty="0">
+                <a:latin typeface="프리젠테이션 4 Regular" pitchFamily="2" charset="-127"/>
+                <a:ea typeface="프리젠테이션 4 Regular" pitchFamily="2" charset="-127"/>
+              </a:rPr>
+              <a:t>명은 다른 검사를 진행함</a:t>
+            </a:r>
+            <a:endParaRPr lang="en-US" altLang="ko-KR" sz="2000" dirty="0">
+              <a:latin typeface="프리젠테이션 4 Regular" pitchFamily="2" charset="-127"/>
+              <a:ea typeface="프리젠테이션 4 Regular" pitchFamily="2" charset="-127"/>
+            </a:endParaRPr>
+          </a:p>
+          <a:p>
+            <a:pPr lvl="1"/>
+            <a:r>
+              <a:rPr lang="ko-KR" altLang="en-US" sz="1600" dirty="0">
+                <a:latin typeface="프리젠테이션 4 Regular" pitchFamily="2" charset="-127"/>
+                <a:ea typeface="프리젠테이션 4 Regular" pitchFamily="2" charset="-127"/>
+              </a:rPr>
+              <a:t>위 </a:t>
+            </a:r>
+            <a:r>
+              <a:rPr lang="en-US" altLang="ko-KR" sz="1600" dirty="0">
+                <a:latin typeface="프리젠테이션 4 Regular" pitchFamily="2" charset="-127"/>
+                <a:ea typeface="프리젠테이션 4 Regular" pitchFamily="2" charset="-127"/>
+              </a:rPr>
+              <a:t>22</a:t>
+            </a:r>
+            <a:r>
+              <a:rPr lang="ko-KR" altLang="en-US" sz="1600" dirty="0">
+                <a:latin typeface="프리젠테이션 4 Regular" pitchFamily="2" charset="-127"/>
+                <a:ea typeface="프리젠테이션 4 Regular" pitchFamily="2" charset="-127"/>
+              </a:rPr>
+              <a:t>명</a:t>
+            </a:r>
+            <a:r>
+              <a:rPr lang="en-US" altLang="ko-KR" sz="1600" dirty="0">
+                <a:latin typeface="프리젠테이션 4 Regular" pitchFamily="2" charset="-127"/>
+                <a:ea typeface="프리젠테이션 4 Regular" pitchFamily="2" charset="-127"/>
+              </a:rPr>
+              <a:t> – KUMC, </a:t>
+            </a:r>
+            <a:r>
+              <a:rPr lang="ko-KR" altLang="en-US" sz="1600" dirty="0">
+                <a:latin typeface="프리젠테이션 4 Regular" pitchFamily="2" charset="-127"/>
+                <a:ea typeface="프리젠테이션 4 Regular" pitchFamily="2" charset="-127"/>
+              </a:rPr>
+              <a:t>간 주변의 지방 조직의 면역세포 비율</a:t>
+            </a:r>
+            <a:r>
+              <a:rPr lang="en-US" altLang="ko-KR" sz="1600" dirty="0">
+                <a:latin typeface="프리젠테이션 4 Regular" pitchFamily="2" charset="-127"/>
+                <a:ea typeface="프리젠테이션 4 Regular" pitchFamily="2" charset="-127"/>
+              </a:rPr>
+              <a:t>, </a:t>
+            </a:r>
+            <a:r>
+              <a:rPr lang="ko-KR" altLang="en-US" sz="1600" dirty="0">
+                <a:latin typeface="프리젠테이션 4 Regular" pitchFamily="2" charset="-127"/>
+                <a:ea typeface="프리젠테이션 4 Regular" pitchFamily="2" charset="-127"/>
+              </a:rPr>
+              <a:t>숫자 </a:t>
+            </a:r>
+            <a:endParaRPr lang="en-US" altLang="ko-KR" sz="1600" dirty="0">
+              <a:latin typeface="프리젠테이션 4 Regular" pitchFamily="2" charset="-127"/>
+              <a:ea typeface="프리젠테이션 4 Regular" pitchFamily="2" charset="-127"/>
+            </a:endParaRPr>
+          </a:p>
+          <a:p>
+            <a:pPr lvl="1"/>
+            <a:r>
+              <a:rPr lang="ko-KR" altLang="en-US" sz="1600" dirty="0">
+                <a:latin typeface="프리젠테이션 4 Regular" pitchFamily="2" charset="-127"/>
+                <a:ea typeface="프리젠테이션 4 Regular" pitchFamily="2" charset="-127"/>
+              </a:rPr>
+              <a:t>아래 </a:t>
+            </a:r>
+            <a:r>
+              <a:rPr lang="en-US" altLang="ko-KR" sz="1600" dirty="0">
+                <a:latin typeface="프리젠테이션 4 Regular" pitchFamily="2" charset="-127"/>
+                <a:ea typeface="프리젠테이션 4 Regular" pitchFamily="2" charset="-127"/>
+              </a:rPr>
+              <a:t>22</a:t>
+            </a:r>
+            <a:r>
+              <a:rPr lang="ko-KR" altLang="en-US" sz="1600" dirty="0">
+                <a:latin typeface="프리젠테이션 4 Regular" pitchFamily="2" charset="-127"/>
+                <a:ea typeface="프리젠테이션 4 Regular" pitchFamily="2" charset="-127"/>
+              </a:rPr>
+              <a:t>명 </a:t>
+            </a:r>
+            <a:r>
+              <a:rPr lang="en-US" altLang="ko-KR" sz="1600" dirty="0">
+                <a:latin typeface="프리젠테이션 4 Regular" pitchFamily="2" charset="-127"/>
+                <a:ea typeface="프리젠테이션 4 Regular" pitchFamily="2" charset="-127"/>
+              </a:rPr>
+              <a:t>– AMC, </a:t>
+            </a:r>
+            <a:r>
+              <a:rPr lang="ko-KR" altLang="en-US" sz="1600" dirty="0">
+                <a:latin typeface="프리젠테이션 4 Regular" pitchFamily="2" charset="-127"/>
+                <a:ea typeface="프리젠테이션 4 Regular" pitchFamily="2" charset="-127"/>
+              </a:rPr>
+              <a:t>신장 주변 지방 조직에의 면역세포 비율</a:t>
+            </a:r>
+            <a:r>
+              <a:rPr lang="en-US" altLang="ko-KR" sz="1600" dirty="0">
+                <a:latin typeface="프리젠테이션 4 Regular" pitchFamily="2" charset="-127"/>
+                <a:ea typeface="프리젠테이션 4 Regular" pitchFamily="2" charset="-127"/>
+              </a:rPr>
+              <a:t>, </a:t>
+            </a:r>
+            <a:r>
+              <a:rPr lang="ko-KR" altLang="en-US" sz="1600" dirty="0">
+                <a:latin typeface="프리젠테이션 4 Regular" pitchFamily="2" charset="-127"/>
+                <a:ea typeface="프리젠테이션 4 Regular" pitchFamily="2" charset="-127"/>
+              </a:rPr>
+              <a:t>숫자</a:t>
+            </a:r>
+            <a:endParaRPr lang="en-US" altLang="ko-KR" sz="1600" dirty="0">
+              <a:latin typeface="프리젠테이션 4 Regular" pitchFamily="2" charset="-127"/>
+              <a:ea typeface="프리젠테이션 4 Regular" pitchFamily="2" charset="-127"/>
+            </a:endParaRPr>
+          </a:p>
+          <a:p>
+            <a:r>
+              <a:rPr lang="ko-KR" altLang="en-US" sz="2000" dirty="0">
+                <a:latin typeface="프리젠테이션 4 Regular" pitchFamily="2" charset="-127"/>
+                <a:ea typeface="프리젠테이션 4 Regular" pitchFamily="2" charset="-127"/>
+              </a:rPr>
+              <a:t>일단 </a:t>
+            </a:r>
+            <a:r>
+              <a:rPr lang="en-US" altLang="ko-KR" sz="2000" dirty="0">
+                <a:latin typeface="프리젠테이션 4 Regular" pitchFamily="2" charset="-127"/>
+                <a:ea typeface="프리젠테이션 4 Regular" pitchFamily="2" charset="-127"/>
+              </a:rPr>
+              <a:t>D = </a:t>
+            </a:r>
+            <a:r>
+              <a:rPr lang="ko-KR" altLang="en-US" sz="2000" dirty="0">
+                <a:latin typeface="프리젠테이션 4 Regular" pitchFamily="2" charset="-127"/>
+                <a:ea typeface="프리젠테이션 4 Regular" pitchFamily="2" charset="-127"/>
+              </a:rPr>
+              <a:t>내려가면 좋은 지표</a:t>
+            </a:r>
+            <a:r>
+              <a:rPr lang="en-US" altLang="ko-KR" sz="2000" dirty="0">
+                <a:latin typeface="프리젠테이션 4 Regular" pitchFamily="2" charset="-127"/>
+                <a:ea typeface="프리젠테이션 4 Regular" pitchFamily="2" charset="-127"/>
+              </a:rPr>
+              <a:t>/ U=</a:t>
+            </a:r>
+            <a:r>
+              <a:rPr lang="ko-KR" altLang="en-US" sz="2000" dirty="0">
+                <a:latin typeface="프리젠테이션 4 Regular" pitchFamily="2" charset="-127"/>
+                <a:ea typeface="프리젠테이션 4 Regular" pitchFamily="2" charset="-127"/>
+              </a:rPr>
+              <a:t>올라가면 좋은 지표</a:t>
+            </a:r>
+            <a:r>
+              <a:rPr lang="en-US" altLang="ko-KR" sz="2000" dirty="0">
+                <a:latin typeface="프리젠테이션 4 Regular" pitchFamily="2" charset="-127"/>
+                <a:ea typeface="프리젠테이션 4 Regular" pitchFamily="2" charset="-127"/>
+              </a:rPr>
+              <a:t> -&gt; U</a:t>
+            </a:r>
+            <a:r>
+              <a:rPr lang="ko-KR" altLang="en-US" sz="2000" dirty="0">
+                <a:latin typeface="프리젠테이션 4 Regular" pitchFamily="2" charset="-127"/>
+                <a:ea typeface="프리젠테이션 4 Regular" pitchFamily="2" charset="-127"/>
+              </a:rPr>
+              <a:t>는 음수 붙여 </a:t>
+            </a:r>
+            <a:r>
+              <a:rPr lang="en-US" altLang="ko-KR" sz="2000" dirty="0">
+                <a:latin typeface="프리젠테이션 4 Regular" pitchFamily="2" charset="-127"/>
+                <a:ea typeface="프리젠테이션 4 Regular" pitchFamily="2" charset="-127"/>
+              </a:rPr>
+              <a:t>PCA</a:t>
+            </a:r>
+            <a:r>
+              <a:rPr lang="ko-KR" altLang="en-US" sz="2000" dirty="0">
+                <a:latin typeface="프리젠테이션 4 Regular" pitchFamily="2" charset="-127"/>
+                <a:ea typeface="프리젠테이션 4 Regular" pitchFamily="2" charset="-127"/>
+              </a:rPr>
+              <a:t>진행</a:t>
+            </a:r>
+            <a:endParaRPr lang="en-US" altLang="ko-KR" sz="2000" dirty="0">
+              <a:latin typeface="프리젠테이션 4 Regular" pitchFamily="2" charset="-127"/>
+              <a:ea typeface="프리젠테이션 4 Regular" pitchFamily="2" charset="-127"/>
+            </a:endParaRPr>
+          </a:p>
+          <a:p>
+            <a:r>
+              <a:rPr lang="en-US" altLang="ko-KR" sz="2000" dirty="0">
+                <a:latin typeface="프리젠테이션 4 Regular" pitchFamily="2" charset="-127"/>
+                <a:ea typeface="프리젠테이션 4 Regular" pitchFamily="2" charset="-127"/>
+              </a:rPr>
+              <a:t>BMI</a:t>
+            </a:r>
+            <a:r>
+              <a:rPr lang="ko-KR" altLang="en-US" sz="2000" dirty="0">
+                <a:latin typeface="프리젠테이션 4 Regular" pitchFamily="2" charset="-127"/>
+                <a:ea typeface="프리젠테이션 4 Regular" pitchFamily="2" charset="-127"/>
+              </a:rPr>
+              <a:t>가 적으신 분들을 대상으로는 하였지만</a:t>
+            </a:r>
+            <a:r>
+              <a:rPr lang="en-US" altLang="ko-KR" sz="2000" dirty="0">
+                <a:latin typeface="프리젠테이션 4 Regular" pitchFamily="2" charset="-127"/>
+                <a:ea typeface="프리젠테이션 4 Regular" pitchFamily="2" charset="-127"/>
+              </a:rPr>
+              <a:t>, BMI correction</a:t>
+            </a:r>
+            <a:r>
+              <a:rPr lang="ko-KR" altLang="en-US" sz="2000" dirty="0">
+                <a:latin typeface="프리젠테이션 4 Regular" pitchFamily="2" charset="-127"/>
+                <a:ea typeface="프리젠테이션 4 Regular" pitchFamily="2" charset="-127"/>
+              </a:rPr>
+              <a:t>은 필요함</a:t>
+            </a:r>
+            <a:r>
+              <a:rPr lang="en-US" altLang="ko-KR" sz="2000" dirty="0">
+                <a:latin typeface="프리젠테이션 4 Regular" pitchFamily="2" charset="-127"/>
+                <a:ea typeface="프리젠테이션 4 Regular" pitchFamily="2" charset="-127"/>
+              </a:rPr>
+              <a:t>.</a:t>
+            </a:r>
+          </a:p>
+          <a:p>
+            <a:r>
+              <a:rPr lang="ko-KR" altLang="en-US" sz="2000" dirty="0">
+                <a:latin typeface="프리젠테이션 4 Regular" pitchFamily="2" charset="-127"/>
+                <a:ea typeface="프리젠테이션 4 Regular" pitchFamily="2" charset="-127"/>
+              </a:rPr>
+              <a:t>나이 </a:t>
+            </a:r>
+            <a:r>
+              <a:rPr lang="en-US" altLang="ko-KR" sz="2000" dirty="0">
+                <a:latin typeface="프리젠테이션 4 Regular" pitchFamily="2" charset="-127"/>
+                <a:ea typeface="프리젠테이션 4 Regular" pitchFamily="2" charset="-127"/>
+              </a:rPr>
+              <a:t>correction? </a:t>
+            </a:r>
+          </a:p>
+          <a:p>
+            <a:endParaRPr lang="en-US" altLang="ko-KR" sz="2000" dirty="0">
+              <a:latin typeface="프리젠테이션 4 Regular" pitchFamily="2" charset="-127"/>
+              <a:ea typeface="프리젠테이션 4 Regular" pitchFamily="2" charset="-127"/>
+            </a:endParaRPr>
+          </a:p>
+          <a:p>
+            <a:endParaRPr lang="en-US" altLang="ko-KR" sz="2000" dirty="0">
+              <a:latin typeface="프리젠테이션 4 Regular" pitchFamily="2" charset="-127"/>
+              <a:ea typeface="프리젠테이션 4 Regular" pitchFamily="2" charset="-127"/>
+            </a:endParaRPr>
+          </a:p>
+        </p:txBody>
+      </p:sp>
+      <p:sp>
+        <p:nvSpPr>
+          <p:cNvPr id="15" name="Rectangle 3">
+            <a:extLst>
+              <a:ext uri="{FF2B5EF4-FFF2-40B4-BE49-F238E27FC236}">
+                <a16:creationId xmlns:a16="http://schemas.microsoft.com/office/drawing/2014/main" id="{0A729966-9DD8-4DDA-BEBB-8AA9AE23C6C0}"/>
+              </a:ext>
+            </a:extLst>
+          </p:cNvPr>
+          <p:cNvSpPr>
+            <a:spLocks noChangeArrowheads="1"/>
+          </p:cNvSpPr>
+          <p:nvPr/>
+        </p:nvSpPr>
+        <p:spPr bwMode="auto">
+          <a:xfrm>
+            <a:off x="0" y="-323165"/>
+            <a:ext cx="184731" cy="646331"/>
+          </a:xfrm>
+          <a:prstGeom prst="rect">
+            <a:avLst/>
+          </a:prstGeom>
+          <a:noFill/>
+          <a:ln>
+            <a:noFill/>
+          </a:ln>
+          <a:effectLst/>
+          <a:extLst>
+            <a:ext uri="{909E8E84-426E-40DD-AFC4-6F175D3DCCD1}">
+              <a14:hiddenFill xmlns:a14="http://schemas.microsoft.com/office/drawing/2010/main">
+                <a:solidFill>
+                  <a:schemeClr val="accent1"/>
+                </a:solidFill>
+              </a14:hiddenFill>
+            </a:ext>
+            <a:ext uri="{91240B29-F687-4F45-9708-019B960494DF}">
+              <a14:hiddenLine xmlns:a14="http://schemas.microsoft.com/office/drawing/2010/main" w="9525">
+                <a:solidFill>
+                  <a:schemeClr val="tx1"/>
+                </a:solidFill>
+                <a:miter lim="800000"/>
+                <a:headEnd/>
+                <a:tailEnd/>
+              </a14:hiddenLine>
+            </a:ext>
+            <a:ext uri="{AF507438-7753-43E0-B8FC-AC1667EBCBE1}">
+              <a14:hiddenEffects xmlns:a14="http://schemas.microsoft.com/office/drawing/2010/main">
+                <a:effectLst>
+                  <a:outerShdw dist="35921" dir="2700000" algn="ctr" rotWithShape="0">
+                    <a:schemeClr val="bg2"/>
+                  </a:outerShdw>
+                </a:effectLst>
+              </a14:hiddenEffects>
+            </a:ext>
+          </a:extLst>
+        </p:spPr>
+        <p:txBody>
+          <a:bodyPr vert="horz" wrap="none" lIns="91440" tIns="45720" rIns="91440" bIns="45720" numCol="1" anchor="ctr" anchorCtr="0" compatLnSpc="1">
+            <a:prstTxWarp prst="textNoShape">
+              <a:avLst/>
+            </a:prstTxWarp>
+            <a:spAutoFit/>
+          </a:bodyPr>
+          <a:lstStyle/>
+          <a:p>
+            <a:pPr marL="0" marR="0" lvl="0" indent="0" algn="l" defTabSz="914400" rtl="0" eaLnBrk="0" fontAlgn="base" latinLnBrk="0" hangingPunct="0">
+              <a:lnSpc>
+                <a:spcPct val="100000"/>
+              </a:lnSpc>
+              <a:spcBef>
+                <a:spcPct val="0"/>
+              </a:spcBef>
+              <a:spcAft>
+                <a:spcPct val="0"/>
+              </a:spcAft>
+              <a:buClrTx/>
+              <a:buSzTx/>
+              <a:buFontTx/>
+              <a:buNone/>
+              <a:tabLst/>
+            </a:pPr>
+            <a:endParaRPr kumimoji="0" lang="ko-KR" altLang="ko-KR" sz="1800" b="0" i="0" u="none" strike="noStrike" cap="none" normalizeH="0" baseline="0" dirty="0">
+              <a:ln>
+                <a:noFill/>
+              </a:ln>
+              <a:solidFill>
+                <a:schemeClr val="tx1"/>
+              </a:solidFill>
+              <a:effectLst/>
+              <a:latin typeface="Arial" panose="020B0604020202020204" pitchFamily="34" charset="0"/>
+            </a:endParaRPr>
+          </a:p>
+          <a:p>
+            <a:pPr marL="0" marR="0" lvl="0" indent="0" algn="l" defTabSz="914400" rtl="0" eaLnBrk="0" fontAlgn="base" latinLnBrk="0" hangingPunct="0">
+              <a:lnSpc>
+                <a:spcPct val="100000"/>
+              </a:lnSpc>
+              <a:spcBef>
+                <a:spcPct val="0"/>
+              </a:spcBef>
+              <a:spcAft>
+                <a:spcPct val="0"/>
+              </a:spcAft>
+              <a:buClrTx/>
+              <a:buSzTx/>
+              <a:buFontTx/>
+              <a:buNone/>
+              <a:tabLst/>
+            </a:pPr>
+            <a:endParaRPr kumimoji="0" lang="ko-KR" altLang="ko-KR" sz="1800" b="0" i="0" u="none" strike="noStrike" cap="none" normalizeH="0" baseline="0" dirty="0">
+              <a:ln>
+                <a:noFill/>
+              </a:ln>
+              <a:solidFill>
+                <a:schemeClr val="tx1"/>
+              </a:solidFill>
+              <a:effectLst/>
+              <a:latin typeface="Arial" panose="020B0604020202020204" pitchFamily="34" charset="0"/>
+            </a:endParaRPr>
+          </a:p>
+        </p:txBody>
+      </p:sp>
+      <p:sp>
+        <p:nvSpPr>
+          <p:cNvPr id="16" name="내용 개체 틀 2">
+            <a:extLst>
+              <a:ext uri="{FF2B5EF4-FFF2-40B4-BE49-F238E27FC236}">
+                <a16:creationId xmlns:a16="http://schemas.microsoft.com/office/drawing/2014/main" id="{5D00206A-E838-4DC1-8869-33970326FFDB}"/>
+              </a:ext>
+            </a:extLst>
+          </p:cNvPr>
+          <p:cNvSpPr txBox="1">
+            <a:spLocks/>
+          </p:cNvSpPr>
+          <p:nvPr/>
+        </p:nvSpPr>
+        <p:spPr>
+          <a:xfrm>
+            <a:off x="451498" y="3638966"/>
+            <a:ext cx="11563321" cy="2843466"/>
+          </a:xfrm>
+          <a:prstGeom prst="rect">
+            <a:avLst/>
+          </a:prstGeom>
+        </p:spPr>
+        <p:txBody>
+          <a:bodyPr vert="horz" lIns="91440" tIns="45720" rIns="91440" bIns="45720" rtlCol="0">
+            <a:normAutofit/>
+          </a:bodyPr>
+          <a:lstStyle>
+            <a:lvl1pPr marL="228600" indent="-228600" algn="l" defTabSz="914400" rtl="0" eaLnBrk="1" latinLnBrk="1" hangingPunct="1">
+              <a:lnSpc>
+                <a:spcPct val="90000"/>
+              </a:lnSpc>
+              <a:spcBef>
+                <a:spcPts val="1000"/>
+              </a:spcBef>
+              <a:buFont typeface="Arial" panose="020B0604020202020204" pitchFamily="34" charset="0"/>
+              <a:buChar char="•"/>
+              <a:defRPr sz="2800" kern="1200">
+                <a:solidFill>
+                  <a:schemeClr val="tx1"/>
+                </a:solidFill>
+                <a:latin typeface="+mn-lt"/>
+                <a:ea typeface="+mn-ea"/>
+                <a:cs typeface="+mn-cs"/>
+              </a:defRPr>
+            </a:lvl1pPr>
+            <a:lvl2pPr marL="685800" indent="-228600" algn="l" defTabSz="914400" rtl="0" eaLnBrk="1" latinLnBrk="1" hangingPunct="1">
+              <a:lnSpc>
+                <a:spcPct val="90000"/>
+              </a:lnSpc>
+              <a:spcBef>
+                <a:spcPts val="500"/>
+              </a:spcBef>
+              <a:buFont typeface="Arial" panose="020B0604020202020204" pitchFamily="34" charset="0"/>
+              <a:buChar char="•"/>
+              <a:defRPr sz="2400" kern="1200">
+                <a:solidFill>
+                  <a:schemeClr val="tx1"/>
+                </a:solidFill>
+                <a:latin typeface="+mn-lt"/>
+                <a:ea typeface="+mn-ea"/>
+                <a:cs typeface="+mn-cs"/>
+              </a:defRPr>
+            </a:lvl2pPr>
+            <a:lvl3pPr marL="1143000" indent="-228600" algn="l" defTabSz="914400" rtl="0" eaLnBrk="1" latinLnBrk="1" hangingPunct="1">
+              <a:lnSpc>
+                <a:spcPct val="90000"/>
+              </a:lnSpc>
+              <a:spcBef>
+                <a:spcPts val="500"/>
+              </a:spcBef>
+              <a:buFont typeface="Arial" panose="020B0604020202020204" pitchFamily="34" charset="0"/>
+              <a:buChar char="•"/>
+              <a:defRPr sz="2000" kern="1200">
+                <a:solidFill>
+                  <a:schemeClr val="tx1"/>
+                </a:solidFill>
+                <a:latin typeface="+mn-lt"/>
+                <a:ea typeface="+mn-ea"/>
+                <a:cs typeface="+mn-cs"/>
+              </a:defRPr>
+            </a:lvl3pPr>
+            <a:lvl4pPr marL="1600200" indent="-228600" algn="l" defTabSz="914400" rtl="0" eaLnBrk="1" latinLnBrk="1" hangingPunct="1">
+              <a:lnSpc>
+                <a:spcPct val="90000"/>
+              </a:lnSpc>
+              <a:spcBef>
+                <a:spcPts val="500"/>
+              </a:spcBef>
+              <a:buFont typeface="Arial" panose="020B0604020202020204" pitchFamily="34" charset="0"/>
+              <a:buChar char="•"/>
+              <a:defRPr sz="1800" kern="1200">
+                <a:solidFill>
+                  <a:schemeClr val="tx1"/>
+                </a:solidFill>
+                <a:latin typeface="+mn-lt"/>
+                <a:ea typeface="+mn-ea"/>
+                <a:cs typeface="+mn-cs"/>
+              </a:defRPr>
+            </a:lvl4pPr>
+            <a:lvl5pPr marL="2057400" indent="-228600" algn="l" defTabSz="914400" rtl="0" eaLnBrk="1" latinLnBrk="1" hangingPunct="1">
+              <a:lnSpc>
+                <a:spcPct val="90000"/>
+              </a:lnSpc>
+              <a:spcBef>
+                <a:spcPts val="500"/>
+              </a:spcBef>
+              <a:buFont typeface="Arial" panose="020B0604020202020204" pitchFamily="34" charset="0"/>
+              <a:buChar char="•"/>
+              <a:defRPr sz="1800" kern="1200">
+                <a:solidFill>
+                  <a:schemeClr val="tx1"/>
+                </a:solidFill>
+                <a:latin typeface="+mn-lt"/>
+                <a:ea typeface="+mn-ea"/>
+                <a:cs typeface="+mn-cs"/>
+              </a:defRPr>
+            </a:lvl5pPr>
+            <a:lvl6pPr marL="2514600" indent="-228600" algn="l" defTabSz="914400" rtl="0" eaLnBrk="1" latinLnBrk="1" hangingPunct="1">
+              <a:lnSpc>
+                <a:spcPct val="90000"/>
+              </a:lnSpc>
+              <a:spcBef>
+                <a:spcPts val="500"/>
+              </a:spcBef>
+              <a:buFont typeface="Arial" panose="020B0604020202020204" pitchFamily="34" charset="0"/>
+              <a:buChar char="•"/>
+              <a:defRPr sz="1800" kern="1200">
+                <a:solidFill>
+                  <a:schemeClr val="tx1"/>
+                </a:solidFill>
+                <a:latin typeface="+mn-lt"/>
+                <a:ea typeface="+mn-ea"/>
+                <a:cs typeface="+mn-cs"/>
+              </a:defRPr>
+            </a:lvl6pPr>
+            <a:lvl7pPr marL="2971800" indent="-228600" algn="l" defTabSz="914400" rtl="0" eaLnBrk="1" latinLnBrk="1" hangingPunct="1">
+              <a:lnSpc>
+                <a:spcPct val="90000"/>
+              </a:lnSpc>
+              <a:spcBef>
+                <a:spcPts val="500"/>
+              </a:spcBef>
+              <a:buFont typeface="Arial" panose="020B0604020202020204" pitchFamily="34" charset="0"/>
+              <a:buChar char="•"/>
+              <a:defRPr sz="1800" kern="1200">
+                <a:solidFill>
+                  <a:schemeClr val="tx1"/>
+                </a:solidFill>
+                <a:latin typeface="+mn-lt"/>
+                <a:ea typeface="+mn-ea"/>
+                <a:cs typeface="+mn-cs"/>
+              </a:defRPr>
+            </a:lvl7pPr>
+            <a:lvl8pPr marL="3429000" indent="-228600" algn="l" defTabSz="914400" rtl="0" eaLnBrk="1" latinLnBrk="1" hangingPunct="1">
+              <a:lnSpc>
+                <a:spcPct val="90000"/>
+              </a:lnSpc>
+              <a:spcBef>
+                <a:spcPts val="500"/>
+              </a:spcBef>
+              <a:buFont typeface="Arial" panose="020B0604020202020204" pitchFamily="34" charset="0"/>
+              <a:buChar char="•"/>
+              <a:defRPr sz="1800" kern="1200">
+                <a:solidFill>
+                  <a:schemeClr val="tx1"/>
+                </a:solidFill>
+                <a:latin typeface="+mn-lt"/>
+                <a:ea typeface="+mn-ea"/>
+                <a:cs typeface="+mn-cs"/>
+              </a:defRPr>
+            </a:lvl8pPr>
+            <a:lvl9pPr marL="3886200" indent="-228600" algn="l" defTabSz="914400" rtl="0" eaLnBrk="1" latinLnBrk="1" hangingPunct="1">
+              <a:lnSpc>
+                <a:spcPct val="90000"/>
+              </a:lnSpc>
+              <a:spcBef>
+                <a:spcPts val="500"/>
+              </a:spcBef>
+              <a:buFont typeface="Arial" panose="020B0604020202020204" pitchFamily="34" charset="0"/>
+              <a:buChar char="•"/>
+              <a:defRPr sz="1800" kern="1200">
+                <a:solidFill>
+                  <a:schemeClr val="tx1"/>
+                </a:solidFill>
+                <a:latin typeface="+mn-lt"/>
+                <a:ea typeface="+mn-ea"/>
+                <a:cs typeface="+mn-cs"/>
+              </a:defRPr>
+            </a:lvl9pPr>
+          </a:lstStyle>
+          <a:p>
+            <a:pPr marL="0" indent="0">
+              <a:buFont typeface="Arial" panose="020B0604020202020204" pitchFamily="34" charset="0"/>
+              <a:buNone/>
+            </a:pPr>
+            <a:endParaRPr lang="en-US" altLang="ko-KR" sz="2000" dirty="0">
+              <a:latin typeface="프리젠테이션 4 Regular" pitchFamily="2" charset="-127"/>
+              <a:ea typeface="프리젠테이션 4 Regular" pitchFamily="2" charset="-127"/>
+            </a:endParaRPr>
+          </a:p>
+        </p:txBody>
+      </p:sp>
+      <p:sp>
+        <p:nvSpPr>
+          <p:cNvPr id="5" name="내용 개체 틀 2">
+            <a:extLst>
+              <a:ext uri="{FF2B5EF4-FFF2-40B4-BE49-F238E27FC236}">
+                <a16:creationId xmlns:a16="http://schemas.microsoft.com/office/drawing/2014/main" id="{F1991F33-A165-421B-A2AC-9F85F89A411B}"/>
+              </a:ext>
+            </a:extLst>
+          </p:cNvPr>
+          <p:cNvSpPr txBox="1">
+            <a:spLocks/>
+          </p:cNvSpPr>
+          <p:nvPr/>
+        </p:nvSpPr>
+        <p:spPr>
+          <a:xfrm>
+            <a:off x="451498" y="3219034"/>
+            <a:ext cx="10395450" cy="3561512"/>
+          </a:xfrm>
+          <a:prstGeom prst="rect">
+            <a:avLst/>
+          </a:prstGeom>
+        </p:spPr>
+        <p:txBody>
+          <a:bodyPr vert="horz" lIns="91440" tIns="45720" rIns="91440" bIns="45720" rtlCol="0">
+            <a:normAutofit/>
+          </a:bodyPr>
+          <a:lstStyle>
+            <a:lvl1pPr marL="228600" indent="-228600" algn="l" defTabSz="914400" rtl="0" eaLnBrk="1" latinLnBrk="1" hangingPunct="1">
+              <a:lnSpc>
+                <a:spcPct val="90000"/>
+              </a:lnSpc>
+              <a:spcBef>
+                <a:spcPts val="1000"/>
+              </a:spcBef>
+              <a:buFont typeface="Arial" panose="020B0604020202020204" pitchFamily="34" charset="0"/>
+              <a:buChar char="•"/>
+              <a:defRPr sz="2800" kern="1200">
+                <a:solidFill>
+                  <a:schemeClr val="tx1"/>
+                </a:solidFill>
+                <a:latin typeface="+mn-lt"/>
+                <a:ea typeface="+mn-ea"/>
+                <a:cs typeface="+mn-cs"/>
+              </a:defRPr>
+            </a:lvl1pPr>
+            <a:lvl2pPr marL="685800" indent="-228600" algn="l" defTabSz="914400" rtl="0" eaLnBrk="1" latinLnBrk="1" hangingPunct="1">
+              <a:lnSpc>
+                <a:spcPct val="90000"/>
+              </a:lnSpc>
+              <a:spcBef>
+                <a:spcPts val="500"/>
+              </a:spcBef>
+              <a:buFont typeface="Arial" panose="020B0604020202020204" pitchFamily="34" charset="0"/>
+              <a:buChar char="•"/>
+              <a:defRPr sz="2400" kern="1200">
+                <a:solidFill>
+                  <a:schemeClr val="tx1"/>
+                </a:solidFill>
+                <a:latin typeface="+mn-lt"/>
+                <a:ea typeface="+mn-ea"/>
+                <a:cs typeface="+mn-cs"/>
+              </a:defRPr>
+            </a:lvl2pPr>
+            <a:lvl3pPr marL="1143000" indent="-228600" algn="l" defTabSz="914400" rtl="0" eaLnBrk="1" latinLnBrk="1" hangingPunct="1">
+              <a:lnSpc>
+                <a:spcPct val="90000"/>
+              </a:lnSpc>
+              <a:spcBef>
+                <a:spcPts val="500"/>
+              </a:spcBef>
+              <a:buFont typeface="Arial" panose="020B0604020202020204" pitchFamily="34" charset="0"/>
+              <a:buChar char="•"/>
+              <a:defRPr sz="2000" kern="1200">
+                <a:solidFill>
+                  <a:schemeClr val="tx1"/>
+                </a:solidFill>
+                <a:latin typeface="+mn-lt"/>
+                <a:ea typeface="+mn-ea"/>
+                <a:cs typeface="+mn-cs"/>
+              </a:defRPr>
+            </a:lvl3pPr>
+            <a:lvl4pPr marL="1600200" indent="-228600" algn="l" defTabSz="914400" rtl="0" eaLnBrk="1" latinLnBrk="1" hangingPunct="1">
+              <a:lnSpc>
+                <a:spcPct val="90000"/>
+              </a:lnSpc>
+              <a:spcBef>
+                <a:spcPts val="500"/>
+              </a:spcBef>
+              <a:buFont typeface="Arial" panose="020B0604020202020204" pitchFamily="34" charset="0"/>
+              <a:buChar char="•"/>
+              <a:defRPr sz="1800" kern="1200">
+                <a:solidFill>
+                  <a:schemeClr val="tx1"/>
+                </a:solidFill>
+                <a:latin typeface="+mn-lt"/>
+                <a:ea typeface="+mn-ea"/>
+                <a:cs typeface="+mn-cs"/>
+              </a:defRPr>
+            </a:lvl4pPr>
+            <a:lvl5pPr marL="2057400" indent="-228600" algn="l" defTabSz="914400" rtl="0" eaLnBrk="1" latinLnBrk="1" hangingPunct="1">
+              <a:lnSpc>
+                <a:spcPct val="90000"/>
+              </a:lnSpc>
+              <a:spcBef>
+                <a:spcPts val="500"/>
+              </a:spcBef>
+              <a:buFont typeface="Arial" panose="020B0604020202020204" pitchFamily="34" charset="0"/>
+              <a:buChar char="•"/>
+              <a:defRPr sz="1800" kern="1200">
+                <a:solidFill>
+                  <a:schemeClr val="tx1"/>
+                </a:solidFill>
+                <a:latin typeface="+mn-lt"/>
+                <a:ea typeface="+mn-ea"/>
+                <a:cs typeface="+mn-cs"/>
+              </a:defRPr>
+            </a:lvl5pPr>
+            <a:lvl6pPr marL="2514600" indent="-228600" algn="l" defTabSz="914400" rtl="0" eaLnBrk="1" latinLnBrk="1" hangingPunct="1">
+              <a:lnSpc>
+                <a:spcPct val="90000"/>
+              </a:lnSpc>
+              <a:spcBef>
+                <a:spcPts val="500"/>
+              </a:spcBef>
+              <a:buFont typeface="Arial" panose="020B0604020202020204" pitchFamily="34" charset="0"/>
+              <a:buChar char="•"/>
+              <a:defRPr sz="1800" kern="1200">
+                <a:solidFill>
+                  <a:schemeClr val="tx1"/>
+                </a:solidFill>
+                <a:latin typeface="+mn-lt"/>
+                <a:ea typeface="+mn-ea"/>
+                <a:cs typeface="+mn-cs"/>
+              </a:defRPr>
+            </a:lvl6pPr>
+            <a:lvl7pPr marL="2971800" indent="-228600" algn="l" defTabSz="914400" rtl="0" eaLnBrk="1" latinLnBrk="1" hangingPunct="1">
+              <a:lnSpc>
+                <a:spcPct val="90000"/>
+              </a:lnSpc>
+              <a:spcBef>
+                <a:spcPts val="500"/>
+              </a:spcBef>
+              <a:buFont typeface="Arial" panose="020B0604020202020204" pitchFamily="34" charset="0"/>
+              <a:buChar char="•"/>
+              <a:defRPr sz="1800" kern="1200">
+                <a:solidFill>
+                  <a:schemeClr val="tx1"/>
+                </a:solidFill>
+                <a:latin typeface="+mn-lt"/>
+                <a:ea typeface="+mn-ea"/>
+                <a:cs typeface="+mn-cs"/>
+              </a:defRPr>
+            </a:lvl7pPr>
+            <a:lvl8pPr marL="3429000" indent="-228600" algn="l" defTabSz="914400" rtl="0" eaLnBrk="1" latinLnBrk="1" hangingPunct="1">
+              <a:lnSpc>
+                <a:spcPct val="90000"/>
+              </a:lnSpc>
+              <a:spcBef>
+                <a:spcPts val="500"/>
+              </a:spcBef>
+              <a:buFont typeface="Arial" panose="020B0604020202020204" pitchFamily="34" charset="0"/>
+              <a:buChar char="•"/>
+              <a:defRPr sz="1800" kern="1200">
+                <a:solidFill>
+                  <a:schemeClr val="tx1"/>
+                </a:solidFill>
+                <a:latin typeface="+mn-lt"/>
+                <a:ea typeface="+mn-ea"/>
+                <a:cs typeface="+mn-cs"/>
+              </a:defRPr>
+            </a:lvl8pPr>
+            <a:lvl9pPr marL="3886200" indent="-228600" algn="l" defTabSz="914400" rtl="0" eaLnBrk="1" latinLnBrk="1" hangingPunct="1">
+              <a:lnSpc>
+                <a:spcPct val="90000"/>
+              </a:lnSpc>
+              <a:spcBef>
+                <a:spcPts val="500"/>
+              </a:spcBef>
+              <a:buFont typeface="Arial" panose="020B0604020202020204" pitchFamily="34" charset="0"/>
+              <a:buChar char="•"/>
+              <a:defRPr sz="1800" kern="1200">
+                <a:solidFill>
+                  <a:schemeClr val="tx1"/>
+                </a:solidFill>
+                <a:latin typeface="+mn-lt"/>
+                <a:ea typeface="+mn-ea"/>
+                <a:cs typeface="+mn-cs"/>
+              </a:defRPr>
+            </a:lvl9pPr>
+          </a:lstStyle>
+          <a:p>
+            <a:pPr marL="0" indent="0">
+              <a:buFont typeface="Arial" panose="020B0604020202020204" pitchFamily="34" charset="0"/>
+              <a:buNone/>
+            </a:pPr>
+            <a:r>
+              <a:rPr lang="en-US" altLang="ko-KR" dirty="0">
+                <a:latin typeface="프리젠테이션 4 Regular" pitchFamily="2" charset="-127"/>
+                <a:ea typeface="프리젠테이션 4 Regular" pitchFamily="2" charset="-127"/>
+              </a:rPr>
+              <a:t> [Column</a:t>
+            </a:r>
+            <a:r>
+              <a:rPr lang="ko-KR" altLang="en-US" dirty="0">
+                <a:latin typeface="프리젠테이션 4 Regular" pitchFamily="2" charset="-127"/>
+                <a:ea typeface="프리젠테이션 4 Regular" pitchFamily="2" charset="-127"/>
+              </a:rPr>
+              <a:t>이해</a:t>
+            </a:r>
+            <a:r>
+              <a:rPr lang="en-US" altLang="ko-KR" dirty="0">
+                <a:latin typeface="프리젠테이션 4 Regular" pitchFamily="2" charset="-127"/>
+                <a:ea typeface="프리젠테이션 4 Regular" pitchFamily="2" charset="-127"/>
+              </a:rPr>
+              <a:t>]</a:t>
+            </a:r>
+          </a:p>
+          <a:p>
+            <a:pPr marL="0" indent="0">
+              <a:buFont typeface="Arial" panose="020B0604020202020204" pitchFamily="34" charset="0"/>
+              <a:buNone/>
+            </a:pPr>
+            <a:r>
+              <a:rPr lang="ko-KR" altLang="en-US" sz="2000" dirty="0">
+                <a:latin typeface="프리젠테이션 4 Regular" pitchFamily="2" charset="-127"/>
+                <a:ea typeface="프리젠테이션 4 Regular" pitchFamily="2" charset="-127"/>
+              </a:rPr>
+              <a:t>대사</a:t>
+            </a:r>
+            <a:r>
+              <a:rPr lang="en-US" altLang="ko-KR" sz="2000" dirty="0">
+                <a:latin typeface="프리젠테이션 4 Regular" pitchFamily="2" charset="-127"/>
+                <a:ea typeface="프리젠테이션 4 Regular" pitchFamily="2" charset="-127"/>
+              </a:rPr>
+              <a:t>, </a:t>
+            </a:r>
+            <a:r>
+              <a:rPr lang="ko-KR" altLang="en-US" sz="2000" dirty="0">
+                <a:latin typeface="프리젠테이션 4 Regular" pitchFamily="2" charset="-127"/>
+                <a:ea typeface="프리젠테이션 4 Regular" pitchFamily="2" charset="-127"/>
+              </a:rPr>
+              <a:t>간</a:t>
+            </a:r>
+            <a:r>
+              <a:rPr lang="en-US" altLang="ko-KR" sz="2000" dirty="0">
+                <a:latin typeface="프리젠테이션 4 Regular" pitchFamily="2" charset="-127"/>
+                <a:ea typeface="프리젠테이션 4 Regular" pitchFamily="2" charset="-127"/>
+              </a:rPr>
+              <a:t>, </a:t>
+            </a:r>
+            <a:r>
+              <a:rPr lang="ko-KR" altLang="en-US" sz="2000" dirty="0">
+                <a:latin typeface="프리젠테이션 4 Regular" pitchFamily="2" charset="-127"/>
+                <a:ea typeface="프리젠테이션 4 Regular" pitchFamily="2" charset="-127"/>
+              </a:rPr>
+              <a:t>신장 기능 평가 지표</a:t>
+            </a:r>
+            <a:endParaRPr lang="en-US" altLang="ko-KR" sz="2000" dirty="0">
+              <a:latin typeface="프리젠테이션 4 Regular" pitchFamily="2" charset="-127"/>
+              <a:ea typeface="프리젠테이션 4 Regular" pitchFamily="2" charset="-127"/>
+            </a:endParaRPr>
+          </a:p>
+          <a:p>
+            <a:pPr>
+              <a:buFontTx/>
+              <a:buChar char="-"/>
+            </a:pPr>
+            <a:r>
+              <a:rPr lang="en-US" altLang="ko-KR" sz="2000" dirty="0">
+                <a:latin typeface="프리젠테이션 4 Regular" pitchFamily="2" charset="-127"/>
+                <a:ea typeface="프리젠테이션 4 Regular" pitchFamily="2" charset="-127"/>
+              </a:rPr>
+              <a:t>Sex, Age, BMI(Metabolic)</a:t>
+            </a:r>
+          </a:p>
+          <a:p>
+            <a:pPr>
+              <a:buFontTx/>
+              <a:buChar char="-"/>
+            </a:pPr>
+            <a:r>
+              <a:rPr lang="en-US" altLang="ko-KR" sz="2000" dirty="0">
+                <a:latin typeface="프리젠테이션 4 Regular" pitchFamily="2" charset="-127"/>
+                <a:ea typeface="프리젠테이션 4 Regular" pitchFamily="2" charset="-127"/>
+              </a:rPr>
+              <a:t>Liver : </a:t>
+            </a:r>
+            <a:r>
+              <a:rPr lang="en-US" altLang="ko-KR" sz="2000" dirty="0">
+                <a:solidFill>
+                  <a:srgbClr val="0070C0"/>
+                </a:solidFill>
+                <a:latin typeface="프리젠테이션 4 Regular" pitchFamily="2" charset="-127"/>
+                <a:ea typeface="프리젠테이션 4 Regular" pitchFamily="2" charset="-127"/>
+              </a:rPr>
+              <a:t>AST</a:t>
+            </a:r>
+            <a:r>
+              <a:rPr lang="ko-KR" altLang="en-US" sz="2000" dirty="0">
+                <a:solidFill>
+                  <a:srgbClr val="0070C0"/>
+                </a:solidFill>
+                <a:latin typeface="프리젠테이션 4 Regular" pitchFamily="2" charset="-127"/>
+                <a:ea typeface="프리젠테이션 4 Regular" pitchFamily="2" charset="-127"/>
+              </a:rPr>
+              <a:t>  </a:t>
+            </a:r>
+            <a:r>
+              <a:rPr lang="en-US" altLang="ko-KR" sz="2000" dirty="0">
+                <a:solidFill>
+                  <a:srgbClr val="0070C0"/>
+                </a:solidFill>
+                <a:latin typeface="프리젠테이션 4 Regular" pitchFamily="2" charset="-127"/>
+                <a:ea typeface="프리젠테이션 4 Regular" pitchFamily="2" charset="-127"/>
+              </a:rPr>
+              <a:t>ALT</a:t>
+            </a:r>
+            <a:r>
+              <a:rPr lang="ko-KR" altLang="en-US" sz="2000" dirty="0">
+                <a:solidFill>
+                  <a:srgbClr val="0070C0"/>
+                </a:solidFill>
+                <a:latin typeface="프리젠테이션 4 Regular" pitchFamily="2" charset="-127"/>
+                <a:ea typeface="프리젠테이션 4 Regular" pitchFamily="2" charset="-127"/>
+              </a:rPr>
+              <a:t>  </a:t>
+            </a:r>
+            <a:r>
+              <a:rPr lang="en-US" altLang="ko-KR" sz="2000" dirty="0">
+                <a:solidFill>
+                  <a:srgbClr val="0070C0"/>
+                </a:solidFill>
+                <a:latin typeface="프리젠테이션 4 Regular" pitchFamily="2" charset="-127"/>
+                <a:ea typeface="프리젠테이션 4 Regular" pitchFamily="2" charset="-127"/>
+              </a:rPr>
+              <a:t>ALP</a:t>
+            </a:r>
+            <a:r>
+              <a:rPr lang="ko-KR" altLang="en-US" sz="2000" dirty="0">
+                <a:solidFill>
+                  <a:srgbClr val="0070C0"/>
+                </a:solidFill>
+                <a:latin typeface="프리젠테이션 4 Regular" pitchFamily="2" charset="-127"/>
+                <a:ea typeface="프리젠테이션 4 Regular" pitchFamily="2" charset="-127"/>
+              </a:rPr>
+              <a:t>  </a:t>
+            </a:r>
+            <a:r>
+              <a:rPr lang="en-US" altLang="ko-KR" sz="2000" dirty="0">
+                <a:solidFill>
+                  <a:srgbClr val="0070C0"/>
+                </a:solidFill>
+                <a:latin typeface="프리젠테이션 4 Regular" pitchFamily="2" charset="-127"/>
+                <a:ea typeface="프리젠테이션 4 Regular" pitchFamily="2" charset="-127"/>
+              </a:rPr>
+              <a:t>Bilirubin  </a:t>
+            </a:r>
+            <a:r>
+              <a:rPr lang="en-US" altLang="ko-KR" sz="2000" dirty="0">
+                <a:solidFill>
+                  <a:srgbClr val="FF0000"/>
+                </a:solidFill>
+                <a:latin typeface="프리젠테이션 4 Regular" pitchFamily="2" charset="-127"/>
+                <a:ea typeface="프리젠테이션 4 Regular" pitchFamily="2" charset="-127"/>
+              </a:rPr>
+              <a:t>Protein  Albumin  </a:t>
+            </a:r>
+            <a:r>
+              <a:rPr lang="en-US" altLang="ko-KR" sz="2000" dirty="0">
+                <a:solidFill>
+                  <a:schemeClr val="accent1"/>
+                </a:solidFill>
+                <a:latin typeface="프리젠테이션 4 Regular" pitchFamily="2" charset="-127"/>
+                <a:ea typeface="프리젠테이션 4 Regular" pitchFamily="2" charset="-127"/>
+              </a:rPr>
+              <a:t>PT  APTT</a:t>
+            </a:r>
+          </a:p>
+          <a:p>
+            <a:pPr>
+              <a:buFontTx/>
+              <a:buChar char="-"/>
+            </a:pPr>
+            <a:r>
+              <a:rPr lang="en-US" altLang="ko-KR" sz="2000" dirty="0">
+                <a:latin typeface="프리젠테이션 4 Regular" pitchFamily="2" charset="-127"/>
+                <a:ea typeface="프리젠테이션 4 Regular" pitchFamily="2" charset="-127"/>
+              </a:rPr>
+              <a:t>Metabolic : </a:t>
+            </a:r>
+            <a:r>
+              <a:rPr lang="en-US" altLang="ko-KR" sz="2000" dirty="0">
+                <a:solidFill>
+                  <a:schemeClr val="accent1"/>
+                </a:solidFill>
+                <a:latin typeface="프리젠테이션 4 Regular" pitchFamily="2" charset="-127"/>
+                <a:ea typeface="프리젠테이션 4 Regular" pitchFamily="2" charset="-127"/>
+              </a:rPr>
+              <a:t>Cholesterol	TG	LDL	HDL	</a:t>
+            </a:r>
+            <a:r>
+              <a:rPr lang="en-US" altLang="ko-KR" sz="2000" dirty="0" err="1">
+                <a:solidFill>
+                  <a:schemeClr val="accent1"/>
+                </a:solidFill>
+                <a:latin typeface="프리젠테이션 4 Regular" pitchFamily="2" charset="-127"/>
+                <a:ea typeface="프리젠테이션 4 Regular" pitchFamily="2" charset="-127"/>
+              </a:rPr>
+              <a:t>R_Glucose</a:t>
+            </a:r>
+            <a:r>
+              <a:rPr lang="en-US" altLang="ko-KR" sz="2000" dirty="0">
+                <a:solidFill>
+                  <a:schemeClr val="accent1"/>
+                </a:solidFill>
+                <a:latin typeface="프리젠테이션 4 Regular" pitchFamily="2" charset="-127"/>
+                <a:ea typeface="프리젠테이션 4 Regular" pitchFamily="2" charset="-127"/>
+              </a:rPr>
+              <a:t>	</a:t>
+            </a:r>
+            <a:r>
+              <a:rPr lang="en-US" altLang="ko-KR" sz="2000" dirty="0" err="1">
+                <a:solidFill>
+                  <a:schemeClr val="accent1"/>
+                </a:solidFill>
+                <a:latin typeface="프리젠테이션 4 Regular" pitchFamily="2" charset="-127"/>
+                <a:ea typeface="프리젠테이션 4 Regular" pitchFamily="2" charset="-127"/>
+              </a:rPr>
+              <a:t>F_Glucose</a:t>
+            </a:r>
+            <a:r>
+              <a:rPr lang="en-US" altLang="ko-KR" sz="2000" dirty="0">
+                <a:solidFill>
+                  <a:schemeClr val="accent1"/>
+                </a:solidFill>
+                <a:latin typeface="프리젠테이션 4 Regular" pitchFamily="2" charset="-127"/>
+                <a:ea typeface="프리젠테이션 4 Regular" pitchFamily="2" charset="-127"/>
+              </a:rPr>
+              <a:t>	HbA1c</a:t>
+            </a:r>
+          </a:p>
+          <a:p>
+            <a:pPr>
+              <a:buFontTx/>
+              <a:buChar char="-"/>
+            </a:pPr>
+            <a:r>
+              <a:rPr lang="en-US" altLang="ko-KR" sz="2000" dirty="0">
+                <a:latin typeface="프리젠테이션 4 Regular" pitchFamily="2" charset="-127"/>
+                <a:ea typeface="프리젠테이션 4 Regular" pitchFamily="2" charset="-127"/>
+              </a:rPr>
+              <a:t>Kidney: </a:t>
+            </a:r>
+            <a:r>
+              <a:rPr lang="en-US" altLang="ko-KR" sz="2000" dirty="0">
+                <a:solidFill>
+                  <a:schemeClr val="accent1"/>
+                </a:solidFill>
+                <a:latin typeface="프리젠테이션 4 Regular" pitchFamily="2" charset="-127"/>
+                <a:ea typeface="프리젠테이션 4 Regular" pitchFamily="2" charset="-127"/>
+              </a:rPr>
+              <a:t>BUN     Cr</a:t>
+            </a:r>
+            <a:r>
+              <a:rPr lang="en-US" altLang="ko-KR" sz="2000" dirty="0">
+                <a:latin typeface="프리젠테이션 4 Regular" pitchFamily="2" charset="-127"/>
+                <a:ea typeface="프리젠테이션 4 Regular" pitchFamily="2" charset="-127"/>
+              </a:rPr>
+              <a:t>	</a:t>
+            </a:r>
+            <a:r>
+              <a:rPr lang="en-US" altLang="ko-KR" sz="2000" dirty="0">
+                <a:solidFill>
+                  <a:srgbClr val="FF0000"/>
+                </a:solidFill>
+                <a:latin typeface="프리젠테이션 4 Regular" pitchFamily="2" charset="-127"/>
+                <a:ea typeface="프리젠테이션 4 Regular" pitchFamily="2" charset="-127"/>
+              </a:rPr>
+              <a:t>GFR(CKD_EPI)  </a:t>
+            </a:r>
+            <a:r>
+              <a:rPr lang="en-US" altLang="ko-KR" sz="2000" dirty="0" err="1">
+                <a:solidFill>
+                  <a:srgbClr val="FF0000"/>
+                </a:solidFill>
+                <a:latin typeface="프리젠테이션 4 Regular" pitchFamily="2" charset="-127"/>
+                <a:ea typeface="프리젠테이션 4 Regular" pitchFamily="2" charset="-127"/>
+              </a:rPr>
+              <a:t>CrCl</a:t>
+            </a:r>
+            <a:endParaRPr lang="en-US" altLang="ko-KR" sz="2000" dirty="0">
+              <a:solidFill>
+                <a:srgbClr val="FF0000"/>
+              </a:solidFill>
+              <a:latin typeface="프리젠테이션 4 Regular" pitchFamily="2" charset="-127"/>
+              <a:ea typeface="프리젠테이션 4 Regular" pitchFamily="2" charset="-127"/>
+            </a:endParaRPr>
+          </a:p>
+          <a:p>
+            <a:pPr>
+              <a:buFontTx/>
+              <a:buChar char="-"/>
+            </a:pPr>
+            <a:r>
+              <a:rPr lang="en-US" altLang="ko-KR" sz="2000" dirty="0" err="1">
+                <a:latin typeface="프리젠테이션 4 Regular" pitchFamily="2" charset="-127"/>
+                <a:ea typeface="프리젠테이션 4 Regular" pitchFamily="2" charset="-127"/>
+              </a:rPr>
+              <a:t>Etc</a:t>
+            </a:r>
+            <a:r>
+              <a:rPr lang="en-US" altLang="ko-KR" sz="2000" dirty="0">
+                <a:latin typeface="프리젠테이션 4 Regular" pitchFamily="2" charset="-127"/>
+                <a:ea typeface="프리젠테이션 4 Regular" pitchFamily="2" charset="-127"/>
+              </a:rPr>
+              <a:t>: </a:t>
+            </a:r>
+            <a:r>
+              <a:rPr lang="en-US" altLang="ko-KR" sz="2000" dirty="0">
+                <a:solidFill>
+                  <a:schemeClr val="accent1"/>
+                </a:solidFill>
+                <a:latin typeface="프리젠테이션 4 Regular" pitchFamily="2" charset="-127"/>
+                <a:ea typeface="프리젠테이션 4 Regular" pitchFamily="2" charset="-127"/>
+              </a:rPr>
+              <a:t>Amylase   CRP</a:t>
+            </a:r>
+          </a:p>
+          <a:p>
+            <a:pPr>
+              <a:buFontTx/>
+              <a:buChar char="-"/>
+            </a:pPr>
+            <a:endParaRPr lang="en-US" altLang="ko-KR" sz="2400" dirty="0">
+              <a:latin typeface="프리젠테이션 4 Regular" pitchFamily="2" charset="-127"/>
+              <a:ea typeface="프리젠테이션 4 Regular" pitchFamily="2" charset="-127"/>
+            </a:endParaRPr>
+          </a:p>
+          <a:p>
+            <a:pPr>
+              <a:buFontTx/>
+              <a:buChar char="-"/>
+            </a:pPr>
+            <a:endParaRPr lang="en-US" altLang="ko-KR" sz="2400" dirty="0">
+              <a:latin typeface="프리젠테이션 4 Regular" pitchFamily="2" charset="-127"/>
+              <a:ea typeface="프리젠테이션 4 Regular" pitchFamily="2" charset="-127"/>
+            </a:endParaRPr>
+          </a:p>
+          <a:p>
+            <a:pPr lvl="1">
+              <a:buFontTx/>
+              <a:buChar char="-"/>
+            </a:pPr>
+            <a:endParaRPr lang="en-US" altLang="ko-KR" sz="2000" dirty="0">
+              <a:latin typeface="프리젠테이션 4 Regular" pitchFamily="2" charset="-127"/>
+              <a:ea typeface="프리젠테이션 4 Regular" pitchFamily="2" charset="-127"/>
+            </a:endParaRPr>
+          </a:p>
+          <a:p>
+            <a:pPr>
+              <a:buFontTx/>
+              <a:buChar char="-"/>
+            </a:pPr>
+            <a:endParaRPr lang="en-US" altLang="ko-KR" sz="2400" dirty="0">
+              <a:latin typeface="프리젠테이션 4 Regular" pitchFamily="2" charset="-127"/>
+              <a:ea typeface="프리젠테이션 4 Regular" pitchFamily="2" charset="-127"/>
+            </a:endParaRPr>
+          </a:p>
+          <a:p>
+            <a:pPr>
+              <a:buFontTx/>
+              <a:buChar char="-"/>
+            </a:pPr>
+            <a:endParaRPr lang="en-US" altLang="ko-KR" sz="2400" dirty="0">
+              <a:latin typeface="프리젠테이션 4 Regular" pitchFamily="2" charset="-127"/>
+              <a:ea typeface="프리젠테이션 4 Regular" pitchFamily="2" charset="-127"/>
+            </a:endParaRPr>
+          </a:p>
+        </p:txBody>
+      </p:sp>
+    </p:spTree>
+    <p:extLst>
+      <p:ext uri="{BB962C8B-B14F-4D97-AF65-F5344CB8AC3E}">
+        <p14:creationId xmlns:p14="http://schemas.microsoft.com/office/powerpoint/2010/main" val="2972237924"/>
+      </p:ext>
+    </p:extLst>
+  </p:cSld>
+  <p:clrMapOvr>
+    <a:masterClrMapping/>
+  </p:clrMapOvr>
+</p:sld>
+</file>
+
+<file path=ppt/slides/slide20.xml><?xml version="1.0" encoding="utf-8"?>
 <p:sld xmlns:a="http://schemas.openxmlformats.org/drawingml/2006/main" xmlns:r="http://schemas.openxmlformats.org/officeDocument/2006/relationships" xmlns:p="http://schemas.openxmlformats.org/presentationml/2006/main">
   <p:cSld>
     <p:spTree>
@@ -16985,7 +15782,7 @@
           <p:nvPr>
             <p:extLst>
               <p:ext uri="{D42A27DB-BD31-4B8C-83A1-F6EECF244321}">
-                <p14:modId xmlns:p14="http://schemas.microsoft.com/office/powerpoint/2010/main" val="2215598062"/>
+                <p14:modId xmlns:p14="http://schemas.microsoft.com/office/powerpoint/2010/main" val="2215876728"/>
               </p:ext>
             </p:extLst>
           </p:nvPr>
@@ -17949,7 +16746,7 @@
 </p:sld>
 </file>
 
-<file path=ppt/slides/slide22.xml><?xml version="1.0" encoding="utf-8"?>
+<file path=ppt/slides/slide21.xml><?xml version="1.0" encoding="utf-8"?>
 <p:sld xmlns:a="http://schemas.openxmlformats.org/drawingml/2006/main" xmlns:r="http://schemas.openxmlformats.org/officeDocument/2006/relationships" xmlns:p="http://schemas.openxmlformats.org/presentationml/2006/main">
   <p:cSld>
     <p:spTree>
@@ -18280,7 +17077,7 @@
 </p:sld>
 </file>
 
-<file path=ppt/slides/slide23.xml><?xml version="1.0" encoding="utf-8"?>
+<file path=ppt/slides/slide22.xml><?xml version="1.0" encoding="utf-8"?>
 <p:sld xmlns:a="http://schemas.openxmlformats.org/drawingml/2006/main" xmlns:r="http://schemas.openxmlformats.org/officeDocument/2006/relationships" xmlns:p="http://schemas.openxmlformats.org/presentationml/2006/main">
   <p:cSld>
     <p:spTree>
@@ -18364,7 +17161,7 @@
 </p:sld>
 </file>
 
-<file path=ppt/slides/slide24.xml><?xml version="1.0" encoding="utf-8"?>
+<file path=ppt/slides/slide23.xml><?xml version="1.0" encoding="utf-8"?>
 <p:sld xmlns:a="http://schemas.openxmlformats.org/drawingml/2006/main" xmlns:r="http://schemas.openxmlformats.org/officeDocument/2006/relationships" xmlns:p="http://schemas.openxmlformats.org/presentationml/2006/main">
   <p:cSld>
     <p:spTree>
